--- a/clients/liane-jamason/seo/reports/SEO-Audit-Presentation.pptx
+++ b/clients/liane-jamason/seo/reports/SEO-Audit-Presentation.pptx
@@ -2226,7 +2226,7 @@
                 <a:ea typeface="Arial" pitchFamily="34" charset="-122"/>
                 <a:cs typeface="Arial" pitchFamily="34" charset="-120"/>
               </a:rPr>
-              <a:t>example.com</a:t>
+              <a:t>lianejamason.com</a:t>
             </a:r>
             <a:endParaRPr lang="en-US" sz="2800" dirty="0"/>
           </a:p>
@@ -2279,7 +2279,7 @@
                 <a:ea typeface="Arial" pitchFamily="34" charset="-122"/>
                 <a:cs typeface="Arial" pitchFamily="34" charset="-120"/>
               </a:rPr>
-              <a:t>Client Name</a:t>
+              <a:t>Liane Jamason</a:t>
             </a:r>
             <a:endParaRPr lang="en-US" sz="1600" dirty="0"/>
           </a:p>
@@ -2318,7 +2318,7 @@
                 <a:ea typeface="Arial" pitchFamily="34" charset="-122"/>
                 <a:cs typeface="Arial" pitchFamily="34" charset="-120"/>
               </a:rPr>
-              <a:t>Brokerage / Company Name</a:t>
+              <a:t>Corcoran Dwellings</a:t>
             </a:r>
             <a:endParaRPr lang="en-US" sz="1400" dirty="0"/>
           </a:p>
@@ -2357,7 +2357,7 @@
                 <a:ea typeface="Arial" pitchFamily="34" charset="-122"/>
                 <a:cs typeface="Arial" pitchFamily="34" charset="-120"/>
               </a:rPr>
-              <a:t>March 1, 2026</a:t>
+              <a:t>April 8, 2026</a:t>
             </a:r>
             <a:endParaRPr lang="en-US" sz="1400" dirty="0"/>
           </a:p>
@@ -2767,7 +2767,7 @@
                           <a:ea typeface="Arial" pitchFamily="34" charset="-122"/>
                           <a:cs typeface="Arial" pitchFamily="34" charset="-120"/>
                         </a:rPr>
-                        <a:t>Month 1: Establish Credibility</a:t>
+                        <a:t>Month 1: Establish Market Authority</a:t>
                       </a:r>
                       <a:endParaRPr lang="en-US" sz="1100" dirty="0">
                         <a:latin typeface="Arial" charset="0"/>
@@ -2902,7 +2902,7 @@
                           <a:ea typeface="Arial" pitchFamily="34" charset="-122"/>
                           <a:cs typeface="Arial" pitchFamily="34" charset="-120"/>
                         </a:rPr>
-                        <a:t>Industry/Market Report: Current Data</a:t>
+                        <a:t>St. Petersburg Housing Market Update: Spring 2026</a:t>
                       </a:r>
                       <a:endParaRPr lang="en-US" sz="1100" dirty="0">
                         <a:latin typeface="Arial" charset="0"/>
@@ -2967,7 +2967,7 @@
                           <a:ea typeface="Arial" pitchFamily="34" charset="-122"/>
                           <a:cs typeface="Arial" pitchFamily="34" charset="-120"/>
                         </a:rPr>
-                        <a:t>primary market keyword</a:t>
+                        <a:t>st petersburg fl housing market 2026</a:t>
                       </a:r>
                       <a:endParaRPr lang="en-US" sz="1100" dirty="0">
                         <a:latin typeface="Arial" charset="0"/>
@@ -3032,7 +3032,7 @@
                           <a:ea typeface="Arial" pitchFamily="34" charset="-122"/>
                           <a:cs typeface="Arial" pitchFamily="34" charset="-120"/>
                         </a:rPr>
-                        <a:t>Market Report</a:t>
+                        <a:t>Market Update</a:t>
                       </a:r>
                       <a:endParaRPr lang="en-US" sz="1100" dirty="0">
                         <a:latin typeface="Arial" charset="0"/>
@@ -3164,7 +3164,7 @@
                           <a:ea typeface="Arial" pitchFamily="34" charset="-122"/>
                           <a:cs typeface="Arial" pitchFamily="34" charset="-120"/>
                         </a:rPr>
-                        <a:t>Best [Locations/Options] Guide (Current Year)</a:t>
+                        <a:t>The Complete Guide to Buying a Waterfront Home in St. Petersburg</a:t>
                       </a:r>
                       <a:endParaRPr lang="en-US" sz="1100" dirty="0">
                         <a:latin typeface="Arial" charset="0"/>
@@ -3229,7 +3229,7 @@
                           <a:ea typeface="Arial" pitchFamily="34" charset="-122"/>
                           <a:cs typeface="Arial" pitchFamily="34" charset="-120"/>
                         </a:rPr>
-                        <a:t>best locations keyword</a:t>
+                        <a:t>waterfront homes st petersburg fl</a:t>
                       </a:r>
                       <a:endParaRPr lang="en-US" sz="1100" dirty="0">
                         <a:latin typeface="Arial" charset="0"/>
@@ -3294,7 +3294,7 @@
                           <a:ea typeface="Arial" pitchFamily="34" charset="-122"/>
                           <a:cs typeface="Arial" pitchFamily="34" charset="-120"/>
                         </a:rPr>
-                        <a:t>Guide</a:t>
+                        <a:t>Pillar / Evergreen</a:t>
                       </a:r>
                       <a:endParaRPr lang="en-US" sz="1100" dirty="0">
                         <a:latin typeface="Arial" charset="0"/>
@@ -3426,7 +3426,7 @@
                           <a:ea typeface="Arial" pitchFamily="34" charset="-122"/>
                           <a:cs typeface="Arial" pitchFamily="34" charset="-120"/>
                         </a:rPr>
-                        <a:t>Is [Industry] a Good Investment?</a:t>
+                        <a:t>Snell Isle: St. Petersburg's Premier Waterfront Community</a:t>
                       </a:r>
                       <a:endParaRPr lang="en-US" sz="1100" dirty="0">
                         <a:latin typeface="Arial" charset="0"/>
@@ -3491,7 +3491,7 @@
                           <a:ea typeface="Arial" pitchFamily="34" charset="-122"/>
                           <a:cs typeface="Arial" pitchFamily="34" charset="-120"/>
                         </a:rPr>
-                        <a:t>investment keyword</a:t>
+                        <a:t>snell isle homes for sale</a:t>
                       </a:r>
                       <a:endParaRPr lang="en-US" sz="1100" dirty="0">
                         <a:latin typeface="Arial" charset="0"/>
@@ -3556,7 +3556,7 @@
                           <a:ea typeface="Arial" pitchFamily="34" charset="-122"/>
                           <a:cs typeface="Arial" pitchFamily="34" charset="-120"/>
                         </a:rPr>
-                        <a:t>Informational</a:t>
+                        <a:t>Neighborhood Deep-Dive</a:t>
                       </a:r>
                       <a:endParaRPr lang="en-US" sz="1100" dirty="0">
                         <a:latin typeface="Arial" charset="0"/>
@@ -3688,7 +3688,7 @@
                           <a:ea typeface="Arial" pitchFamily="34" charset="-122"/>
                           <a:cs typeface="Arial" pitchFamily="34" charset="-120"/>
                         </a:rPr>
-                        <a:t>Major Development/Trend: What Buyers Need to Know</a:t>
+                        <a:t>Is Now a Good Time to Buy a Home in St. Petersburg FL? (2026 Analysis)</a:t>
                       </a:r>
                       <a:endParaRPr lang="en-US" sz="1100" dirty="0">
                         <a:latin typeface="Arial" charset="0"/>
@@ -3753,7 +3753,7 @@
                           <a:ea typeface="Arial" pitchFamily="34" charset="-122"/>
                           <a:cs typeface="Arial" pitchFamily="34" charset="-120"/>
                         </a:rPr>
-                        <a:t>trend keyword</a:t>
+                        <a:t>buy a home in st petersburg fl</a:t>
                       </a:r>
                       <a:endParaRPr lang="en-US" sz="1100" dirty="0">
                         <a:latin typeface="Arial" charset="0"/>
@@ -3818,7 +3818,7 @@
                           <a:ea typeface="Arial" pitchFamily="34" charset="-122"/>
                           <a:cs typeface="Arial" pitchFamily="34" charset="-120"/>
                         </a:rPr>
-                        <a:t>News/Analysis</a:t>
+                        <a:t>Informational / FAQ</a:t>
                       </a:r>
                       <a:endParaRPr lang="en-US" sz="1100" dirty="0">
                         <a:latin typeface="Arial" charset="0"/>
@@ -3885,7 +3885,7 @@
                           <a:ea typeface="Arial" pitchFamily="34" charset="-122"/>
                           <a:cs typeface="Arial" pitchFamily="34" charset="-120"/>
                         </a:rPr>
-                        <a:t>Month 2: Build Depth</a:t>
+                        <a:t>Month 2: Build Neighborhood Depth</a:t>
                       </a:r>
                       <a:endParaRPr lang="en-US" sz="1100" dirty="0">
                         <a:latin typeface="Arial" charset="0"/>
@@ -4020,7 +4020,7 @@
                           <a:ea typeface="Arial" pitchFamily="34" charset="-122"/>
                           <a:cs typeface="Arial" pitchFamily="34" charset="-120"/>
                         </a:rPr>
-                        <a:t>Relocation/Getting Started Guide</a:t>
+                        <a:t>Best Neighborhoods in St. Petersburg FL for Waterfront Living</a:t>
                       </a:r>
                       <a:endParaRPr lang="en-US" sz="1100" dirty="0">
                         <a:latin typeface="Arial" charset="0"/>
@@ -4085,7 +4085,7 @@
                           <a:ea typeface="Arial" pitchFamily="34" charset="-122"/>
                           <a:cs typeface="Arial" pitchFamily="34" charset="-120"/>
                         </a:rPr>
-                        <a:t>relocation keyword</a:t>
+                        <a:t>waterfront homes st petersburg fl</a:t>
                       </a:r>
                       <a:endParaRPr lang="en-US" sz="1100" dirty="0">
                         <a:latin typeface="Arial" charset="0"/>
@@ -4150,7 +4150,7 @@
                           <a:ea typeface="Arial" pitchFamily="34" charset="-122"/>
                           <a:cs typeface="Arial" pitchFamily="34" charset="-120"/>
                         </a:rPr>
-                        <a:t>Guide</a:t>
+                        <a:t>Comparison / Pillar</a:t>
                       </a:r>
                       <a:endParaRPr lang="en-US" sz="1100" dirty="0">
                         <a:latin typeface="Arial" charset="0"/>
@@ -4282,7 +4282,7 @@
                           <a:ea typeface="Arial" pitchFamily="34" charset="-122"/>
                           <a:cs typeface="Arial" pitchFamily="34" charset="-120"/>
                         </a:rPr>
-                        <a:t>Premium/Specialty Offering Guide</a:t>
+                        <a:t>What to Know About Flood Insurance for St. Petersburg Waterfront Homes</a:t>
                       </a:r>
                       <a:endParaRPr lang="en-US" sz="1100" dirty="0">
                         <a:latin typeface="Arial" charset="0"/>
@@ -4347,7 +4347,7 @@
                           <a:ea typeface="Arial" pitchFamily="34" charset="-122"/>
                           <a:cs typeface="Arial" pitchFamily="34" charset="-120"/>
                         </a:rPr>
-                        <a:t>specialty keyword</a:t>
+                        <a:t>waterfront home flood insurance florida</a:t>
                       </a:r>
                       <a:endParaRPr lang="en-US" sz="1100" dirty="0">
                         <a:latin typeface="Arial" charset="0"/>
@@ -4412,7 +4412,7 @@
                           <a:ea typeface="Arial" pitchFamily="34" charset="-122"/>
                           <a:cs typeface="Arial" pitchFamily="34" charset="-120"/>
                         </a:rPr>
-                        <a:t>Property Guide</a:t>
+                        <a:t>Expert / E-E-A-T</a:t>
                       </a:r>
                       <a:endParaRPr lang="en-US" sz="1100" dirty="0">
                         <a:latin typeface="Arial" charset="0"/>
@@ -4544,7 +4544,7 @@
                           <a:ea typeface="Arial" pitchFamily="34" charset="-122"/>
                           <a:cs typeface="Arial" pitchFamily="34" charset="-120"/>
                         </a:rPr>
-                        <a:t>Comparison: Your Market vs. Alternative</a:t>
+                        <a:t>Historic Old Northeast: Architecture, Lifestyle &amp; Real Estate Guide</a:t>
                       </a:r>
                       <a:endParaRPr lang="en-US" sz="1100" dirty="0">
                         <a:latin typeface="Arial" charset="0"/>
@@ -4609,7 +4609,7 @@
                           <a:ea typeface="Arial" pitchFamily="34" charset="-122"/>
                           <a:cs typeface="Arial" pitchFamily="34" charset="-120"/>
                         </a:rPr>
-                        <a:t>comparison keyword</a:t>
+                        <a:t>old northeast st petersburg real estate</a:t>
                       </a:r>
                       <a:endParaRPr lang="en-US" sz="1100" dirty="0">
                         <a:latin typeface="Arial" charset="0"/>
@@ -4674,7 +4674,7 @@
                           <a:ea typeface="Arial" pitchFamily="34" charset="-122"/>
                           <a:cs typeface="Arial" pitchFamily="34" charset="-120"/>
                         </a:rPr>
-                        <a:t>Comparison</a:t>
+                        <a:t>Neighborhood Deep-Dive</a:t>
                       </a:r>
                       <a:endParaRPr lang="en-US" sz="1100" dirty="0">
                         <a:latin typeface="Arial" charset="0"/>
@@ -4806,7 +4806,7 @@
                           <a:ea typeface="Arial" pitchFamily="34" charset="-122"/>
                           <a:cs typeface="Arial" pitchFamily="34" charset="-120"/>
                         </a:rPr>
-                        <a:t>Costs, Fees, and Practical FAQ</a:t>
+                        <a:t>Selling Your St. Petersburg Home in 2026: The Complete Guide</a:t>
                       </a:r>
                       <a:endParaRPr lang="en-US" sz="1100" dirty="0">
                         <a:latin typeface="Arial" charset="0"/>
@@ -4871,7 +4871,7 @@
                           <a:ea typeface="Arial" pitchFamily="34" charset="-122"/>
                           <a:cs typeface="Arial" pitchFamily="34" charset="-120"/>
                         </a:rPr>
-                        <a:t>practical keyword</a:t>
+                        <a:t>sell my house st petersburg fl</a:t>
                       </a:r>
                       <a:endParaRPr lang="en-US" sz="1100" dirty="0">
                         <a:latin typeface="Arial" charset="0"/>
@@ -4936,7 +4936,7 @@
                           <a:ea typeface="Arial" pitchFamily="34" charset="-122"/>
                           <a:cs typeface="Arial" pitchFamily="34" charset="-120"/>
                         </a:rPr>
-                        <a:t>FAQ/Guide</a:t>
+                        <a:t>Seller Resource / Pillar</a:t>
                       </a:r>
                       <a:endParaRPr lang="en-US" sz="1100" dirty="0">
                         <a:latin typeface="Arial" charset="0"/>
@@ -5003,7 +5003,7 @@
                           <a:ea typeface="Arial" pitchFamily="34" charset="-122"/>
                           <a:cs typeface="Arial" pitchFamily="34" charset="-120"/>
                         </a:rPr>
-                        <a:t>Month 3: Expand Reach</a:t>
+                        <a:t>Month 3: Expand Reach &amp; Convert</a:t>
                       </a:r>
                       <a:endParaRPr lang="en-US" sz="1100" dirty="0">
                         <a:latin typeface="Arial" charset="0"/>
@@ -5138,7 +5138,7 @@
                           <a:ea typeface="Arial" pitchFamily="34" charset="-122"/>
                           <a:cs typeface="Arial" pitchFamily="34" charset="-120"/>
                         </a:rPr>
-                        <a:t>Quarterly Market Update</a:t>
+                        <a:t>Downtown St. Pete Condo Market Report: Prices, Inventory &amp; Outlook</a:t>
                       </a:r>
                       <a:endParaRPr lang="en-US" sz="1100" dirty="0">
                         <a:latin typeface="Arial" charset="0"/>
@@ -5203,7 +5203,7 @@
                           <a:ea typeface="Arial" pitchFamily="34" charset="-122"/>
                           <a:cs typeface="Arial" pitchFamily="34" charset="-120"/>
                         </a:rPr>
-                        <a:t>market update keyword</a:t>
+                        <a:t>downtown st pete condos for sale</a:t>
                       </a:r>
                       <a:endParaRPr lang="en-US" sz="1100" dirty="0">
                         <a:latin typeface="Arial" charset="0"/>
@@ -5268,7 +5268,7 @@
                           <a:ea typeface="Arial" pitchFamily="34" charset="-122"/>
                           <a:cs typeface="Arial" pitchFamily="34" charset="-120"/>
                         </a:rPr>
-                        <a:t>Market Report</a:t>
+                        <a:t>Market Update / Data</a:t>
                       </a:r>
                       <a:endParaRPr lang="en-US" sz="1100" dirty="0">
                         <a:latin typeface="Arial" charset="0"/>
@@ -5400,7 +5400,7 @@
                           <a:ea typeface="Arial" pitchFamily="34" charset="-122"/>
                           <a:cs typeface="Arial" pitchFamily="34" charset="-120"/>
                         </a:rPr>
-                        <a:t>Adjacent Area/Hidden Gem Guide</a:t>
+                        <a:t>Shore Acres vs. Old Northeast: Which Neighborhood Is Right for You?</a:t>
                       </a:r>
                       <a:endParaRPr lang="en-US" sz="1100" dirty="0">
                         <a:latin typeface="Arial" charset="0"/>
@@ -5465,7 +5465,7 @@
                           <a:ea typeface="Arial" pitchFamily="34" charset="-122"/>
                           <a:cs typeface="Arial" pitchFamily="34" charset="-120"/>
                         </a:rPr>
-                        <a:t>adjacent area keyword</a:t>
+                        <a:t>shore acres st petersburg homes for sale</a:t>
                       </a:r>
                       <a:endParaRPr lang="en-US" sz="1100" dirty="0">
                         <a:latin typeface="Arial" charset="0"/>
@@ -5530,7 +5530,7 @@
                           <a:ea typeface="Arial" pitchFamily="34" charset="-122"/>
                           <a:cs typeface="Arial" pitchFamily="34" charset="-120"/>
                         </a:rPr>
-                        <a:t>Area Guide</a:t>
+                        <a:t>Comparison</a:t>
                       </a:r>
                       <a:endParaRPr lang="en-US" sz="1100" dirty="0">
                         <a:latin typeface="Arial" charset="0"/>
@@ -5662,7 +5662,7 @@
                           <a:ea typeface="Arial" pitchFamily="34" charset="-122"/>
                           <a:cs typeface="Arial" pitchFamily="34" charset="-120"/>
                         </a:rPr>
-                        <a:t>Regulations/Rules Investors Need to Know</a:t>
+                        <a:t>Moving to St. Petersburg FL: The Complete Relocation Guide</a:t>
                       </a:r>
                       <a:endParaRPr lang="en-US" sz="1100" dirty="0">
                         <a:latin typeface="Arial" charset="0"/>
@@ -5727,7 +5727,7 @@
                           <a:ea typeface="Arial" pitchFamily="34" charset="-122"/>
                           <a:cs typeface="Arial" pitchFamily="34" charset="-120"/>
                         </a:rPr>
-                        <a:t>regulations keyword</a:t>
+                        <a:t>moving to st petersburg fl</a:t>
                       </a:r>
                       <a:endParaRPr lang="en-US" sz="1100" dirty="0">
                         <a:latin typeface="Arial" charset="0"/>
@@ -5792,7 +5792,7 @@
                           <a:ea typeface="Arial" pitchFamily="34" charset="-122"/>
                           <a:cs typeface="Arial" pitchFamily="34" charset="-120"/>
                         </a:rPr>
-                        <a:t>Investment Guide</a:t>
+                        <a:t>Pillar / Evergreen</a:t>
                       </a:r>
                       <a:endParaRPr lang="en-US" sz="1100" dirty="0">
                         <a:latin typeface="Arial" charset="0"/>
@@ -5924,7 +5924,7 @@
                           <a:ea typeface="Arial" pitchFamily="34" charset="-122"/>
                           <a:cs typeface="Arial" pitchFamily="34" charset="-120"/>
                         </a:rPr>
-                        <a:t>Luxury/Premium Segment Deep Dive</a:t>
+                        <a:t>St. Petersburg Real Estate Investment: Cap Rates, Rental Markets &amp; Opportunity Zones</a:t>
                       </a:r>
                       <a:endParaRPr lang="en-US" sz="1100" dirty="0">
                         <a:latin typeface="Arial" charset="0"/>
@@ -5989,7 +5989,7 @@
                           <a:ea typeface="Arial" pitchFamily="34" charset="-122"/>
                           <a:cs typeface="Arial" pitchFamily="34" charset="-120"/>
                         </a:rPr>
-                        <a:t>luxury keyword</a:t>
+                        <a:t>st petersburg fl investment property</a:t>
                       </a:r>
                       <a:endParaRPr lang="en-US" sz="1100" dirty="0">
                         <a:latin typeface="Arial" charset="0"/>
@@ -6054,7 +6054,7 @@
                           <a:ea typeface="Arial" pitchFamily="34" charset="-122"/>
                           <a:cs typeface="Arial" pitchFamily="34" charset="-120"/>
                         </a:rPr>
-                        <a:t>Luxury Guide</a:t>
+                        <a:t>Investor-Focused</a:t>
                       </a:r>
                       <a:endParaRPr lang="en-US" sz="1100" dirty="0">
                         <a:latin typeface="Arial" charset="0"/>
@@ -6615,7 +6615,7 @@
                           <a:ea typeface="Arial" pitchFamily="34" charset="-122"/>
                           <a:cs typeface="Arial" pitchFamily="34" charset="-120"/>
                         </a:rPr>
-                        <a:t>All pages</a:t>
+                        <a:t>20+ pages (core, neighborhood, blog, utility)</a:t>
                       </a:r>
                       <a:endParaRPr lang="en-US" sz="1300" dirty="0">
                         <a:latin typeface="Arial" charset="0"/>
@@ -6680,7 +6680,7 @@
                           <a:ea typeface="Arial" pitchFamily="34" charset="-122"/>
                           <a:cs typeface="Arial" pitchFamily="34" charset="-120"/>
                         </a:rPr>
-                        <a:t>8.75/10</a:t>
+                        <a:t>9.00/10</a:t>
                       </a:r>
                       <a:endParaRPr lang="en-US" sz="1300" dirty="0">
                         <a:latin typeface="Arial" charset="0"/>
@@ -6745,7 +6745,7 @@
                           <a:ea typeface="Arial" pitchFamily="34" charset="-122"/>
                           <a:cs typeface="Arial" pitchFamily="34" charset="-120"/>
                         </a:rPr>
-                        <a:t>Ready — verify claims with client</a:t>
+                        <a:t>Ready — 2 versions created (Claude + Codex), verify URLs and paste into Rank Math</a:t>
                       </a:r>
                       <a:endParaRPr lang="en-US" sz="1300" dirty="0">
                         <a:latin typeface="Arial" charset="0"/>
@@ -6877,7 +6877,7 @@
                           <a:ea typeface="Arial" pitchFamily="34" charset="-122"/>
                           <a:cs typeface="Arial" pitchFamily="34" charset="-120"/>
                         </a:rPr>
-                        <a:t>8 schema blocks</a:t>
+                        <a:t>8+ schema blocks (Organization, RealEstateAgent, AggregateRating, FAQPage, BreadcrumbList, AboutPage, Service, WebSite)</a:t>
                       </a:r>
                       <a:endParaRPr lang="en-US" sz="1300" dirty="0">
                         <a:latin typeface="Arial" charset="0"/>
@@ -7007,7 +7007,7 @@
                           <a:ea typeface="Arial" pitchFamily="34" charset="-122"/>
                           <a:cs typeface="Arial" pitchFamily="34" charset="-120"/>
                         </a:rPr>
-                        <a:t>Ready — verify URLs</a:t>
+                        <a:t>Ready — 2 versions created, verify license number and review count before deploying</a:t>
                       </a:r>
                       <a:endParaRPr lang="en-US" sz="1300" dirty="0">
                         <a:latin typeface="Arial" charset="0"/>
@@ -7074,7 +7074,7 @@
                           <a:ea typeface="Arial" pitchFamily="34" charset="-122"/>
                           <a:cs typeface="Arial" pitchFamily="34" charset="-120"/>
                         </a:rPr>
-                        <a:t>Key Pages (expanded content)</a:t>
+                        <a:t>Community/Neighborhood Pages</a:t>
                       </a:r>
                       <a:endParaRPr lang="en-US" sz="1300" dirty="0">
                         <a:latin typeface="Arial" charset="0"/>
@@ -7139,7 +7139,7 @@
                           <a:ea typeface="Arial" pitchFamily="34" charset="-122"/>
                           <a:cs typeface="Arial" pitchFamily="34" charset="-120"/>
                         </a:rPr>
-                        <a:t>4 pages, 1,000+ words</a:t>
+                        <a:t>Downtown St Pete Condos + additional neighborhoods (2,000+ words each)</a:t>
                       </a:r>
                       <a:endParaRPr lang="en-US" sz="1300" dirty="0">
                         <a:latin typeface="Arial" charset="0"/>
@@ -7269,7 +7269,7 @@
                           <a:ea typeface="Arial" pitchFamily="34" charset="-122"/>
                           <a:cs typeface="Arial" pitchFamily="34" charset="-120"/>
                         </a:rPr>
-                        <a:t>Ready — paste into CMS</a:t>
+                        <a:t>Ready — 2 versions created, paste into CMS as new pages</a:t>
                       </a:r>
                       <a:endParaRPr lang="en-US" sz="1300" dirty="0">
                         <a:latin typeface="Arial" charset="0"/>
@@ -7401,7 +7401,7 @@
                           <a:ea typeface="Arial" pitchFamily="34" charset="-122"/>
                           <a:cs typeface="Arial" pitchFamily="34" charset="-120"/>
                         </a:rPr>
-                        <a:t>4 posts, 900-1,200 words</a:t>
+                        <a:t>4 posts: Market Report, Waterfront Guide, Snell Isle Deep-Dive, Is Now a Good Time to Buy</a:t>
                       </a:r>
                       <a:endParaRPr lang="en-US" sz="1300" dirty="0">
                         <a:latin typeface="Arial" charset="0"/>
@@ -7531,7 +7531,7 @@
                           <a:ea typeface="Arial" pitchFamily="34" charset="-122"/>
                           <a:cs typeface="Arial" pitchFamily="34" charset="-120"/>
                         </a:rPr>
-                        <a:t>Ready — paste into CMS</a:t>
+                        <a:t>Ready — 2 versions created, paste into WordPress blog</a:t>
                       </a:r>
                       <a:endParaRPr lang="en-US" sz="1300" dirty="0">
                         <a:latin typeface="Arial" charset="0"/>
@@ -7656,7 +7656,7 @@
                 <a:ea typeface="Arial" pitchFamily="34" charset="-122"/>
                 <a:cs typeface="Arial" pitchFamily="34" charset="-120"/>
               </a:rPr>
-              <a:t>Page 1  |  Page 2  |  Page 3  |  Page 4</a:t>
+              <a:t>Downtown St. Pete Condos for Sale  |  St. Petersburg Waterfront Homes Guide  |  Snell Isle Neighborhood Deep-Dive  |  Selling Your St. Petersburg Home Guide</a:t>
             </a:r>
             <a:endParaRPr lang="en-US" sz="1300" dirty="0"/>
           </a:p>
@@ -7734,7 +7734,7 @@
                 <a:ea typeface="Arial" pitchFamily="34" charset="-122"/>
                 <a:cs typeface="Arial" pitchFamily="34" charset="-120"/>
               </a:rPr>
-              <a:t>Blog Post 1  |  Blog Post 2  |  Blog Post 3  |  Blog Post 4</a:t>
+              <a:t>St. Petersburg FL Real Estate Market Report: Spring 2026  |  The Complete Guide to Buying a Waterfront Home in St. Petersburg  |  Snell Isle: St. Petersburg's Premier Waterfront Community  |  Is Now a Good Time to Buy a Home in St. Petersburg FL?</a:t>
             </a:r>
             <a:endParaRPr lang="en-US" sz="1300" dirty="0"/>
           </a:p>
@@ -7879,7 +7879,7 @@
                 <a:ea typeface="Arial" pitchFamily="34" charset="-122"/>
                 <a:cs typeface="Arial" pitchFamily="34" charset="-120"/>
               </a:rPr>
-              <a:t>Hub Page for Top Topic</a:t>
+              <a:t>7 Neighborhood Landing Pages</a:t>
             </a:r>
             <a:endParaRPr lang="en-US" sz="1300" dirty="0"/>
           </a:p>
@@ -7918,7 +7918,7 @@
                 <a:ea typeface="Arial" pitchFamily="34" charset="-122"/>
                 <a:cs typeface="Arial" pitchFamily="34" charset="-120"/>
               </a:rPr>
-              <a:t>Comprehensive guide for highest-value keyword cluster</a:t>
+              <a:t>Snell Isle, Old Northeast, Downtown, Shore Acres, Tierra Verde, Venetian Isles, Coffee Pot Bayou — each with 2,000+ words, market stats, school data, lifestyle content</a:t>
             </a:r>
             <a:endParaRPr lang="en-US" sz="1200" dirty="0"/>
           </a:p>
@@ -7979,7 +7979,7 @@
                 <a:ea typeface="Arial" pitchFamily="34" charset="-122"/>
                 <a:cs typeface="Arial" pitchFamily="34" charset="-120"/>
               </a:rPr>
-              <a:t>Topic Section Pages</a:t>
+              <a:t>5 Property-Type Pages</a:t>
             </a:r>
             <a:endParaRPr lang="en-US" sz="1300" dirty="0"/>
           </a:p>
@@ -8018,7 +8018,7 @@
                 <a:ea typeface="Arial" pitchFamily="34" charset="-122"/>
                 <a:cs typeface="Arial" pitchFamily="34" charset="-120"/>
               </a:rPr>
-              <a:t>Individual pages for each sub-topic within main clusters</a:t>
+              <a:t>Waterfront Homes, Luxury Homes, Waterfront Condos, Downtown Condos, Historic Homes — dedicated pages with unique content and filtered listings</a:t>
             </a:r>
             <a:endParaRPr lang="en-US" sz="1200" dirty="0"/>
           </a:p>
@@ -8079,7 +8079,7 @@
                 <a:ea typeface="Arial" pitchFamily="34" charset="-122"/>
                 <a:cs typeface="Arial" pitchFamily="34" charset="-120"/>
               </a:rPr>
-              <a:t>Relocation Guide</a:t>
+              <a:t>Expand Existing Neighborhood Pages</a:t>
             </a:r>
             <a:endParaRPr lang="en-US" sz="1300" dirty="0"/>
           </a:p>
@@ -8118,7 +8118,7 @@
                 <a:ea typeface="Arial" pitchFamily="34" charset="-122"/>
                 <a:cs typeface="Arial" pitchFamily="34" charset="-120"/>
               </a:rPr>
-              <a:t>2,000+ words on local info, costs, lifestyle, climate</a:t>
+              <a:t>Shore Acres, Old Northeast, Snell Isle, Pinellas Point, Tierra Verde — from 250-550 words to 2,000-2,500+ with market statistics tables</a:t>
             </a:r>
             <a:endParaRPr lang="en-US" sz="1200" dirty="0"/>
           </a:p>
@@ -8179,7 +8179,7 @@
                 <a:ea typeface="Arial" pitchFamily="34" charset="-122"/>
                 <a:cs typeface="Arial" pitchFamily="34" charset="-120"/>
               </a:rPr>
-              <a:t>Investment Guide</a:t>
+              <a:t>Moving to St. Petersburg Relocation Guide</a:t>
             </a:r>
             <a:endParaRPr lang="en-US" sz="1300" dirty="0"/>
           </a:p>
@@ -8218,7 +8218,7 @@
                 <a:ea typeface="Arial" pitchFamily="34" charset="-122"/>
                 <a:cs typeface="Arial" pitchFamily="34" charset="-120"/>
               </a:rPr>
-              <a:t>Regulations, ROI analysis, rates, management</a:t>
+              <a:t>2,000+ words covering neighborhoods, cost of living, schools, flood zones, lifestyle — high-volume keyword opportunity</a:t>
             </a:r>
             <a:endParaRPr lang="en-US" sz="1200" dirty="0"/>
           </a:p>
@@ -8279,7 +8279,7 @@
                 <a:ea typeface="Arial" pitchFamily="34" charset="-122"/>
                 <a:cs typeface="Arial" pitchFamily="34" charset="-120"/>
               </a:rPr>
-              <a:t>New Development/Product Pages</a:t>
+              <a:t>Condo Building Pages</a:t>
             </a:r>
             <a:endParaRPr lang="en-US" sz="1300" dirty="0"/>
           </a:p>
@@ -8318,7 +8318,7 @@
                 <a:ea typeface="Arial" pitchFamily="34" charset="-122"/>
                 <a:cs typeface="Arial" pitchFamily="34" charset="-120"/>
               </a:rPr>
-              <a:t>Dedicated pages for newest offerings</a:t>
+              <a:t>Waldorf Astoria Residences, Saltaire, ONE St Petersburg, 400 Central, The Salvador — Eagan dominates this space with 20+ pages</a:t>
             </a:r>
             <a:endParaRPr lang="en-US" sz="1200" dirty="0"/>
           </a:p>
@@ -8379,7 +8379,7 @@
                 <a:ea typeface="Arial" pitchFamily="34" charset="-122"/>
                 <a:cs typeface="Arial" pitchFamily="34" charset="-120"/>
               </a:rPr>
-              <a:t>Individual Listing/Location Pages</a:t>
+              <a:t>Downloadable Lead Magnets</a:t>
             </a:r>
             <a:endParaRPr lang="en-US" sz="1300" dirty="0"/>
           </a:p>
@@ -8418,7 +8418,7 @@
                 <a:ea typeface="Arial" pitchFamily="34" charset="-122"/>
                 <a:cs typeface="Arial" pitchFamily="34" charset="-120"/>
               </a:rPr>
-              <a:t>Top 20 individual sub-pages following competitor model</a:t>
+              <a:t>Waterfront Buyer's Checklist, 2026 Market Report PDF — gated behind email capture to start building subscriber list</a:t>
             </a:r>
             <a:endParaRPr lang="en-US" sz="1200" dirty="0"/>
           </a:p>
@@ -8479,7 +8479,7 @@
                 <a:ea typeface="Arial" pitchFamily="34" charset="-122"/>
                 <a:cs typeface="Arial" pitchFamily="34" charset="-120"/>
               </a:rPr>
-              <a:t>FAQ Schema on All Key Pages</a:t>
+              <a:t>FAQPage Schema on Blog Posts</a:t>
             </a:r>
             <a:endParaRPr lang="en-US" sz="1300" dirty="0"/>
           </a:p>
@@ -8518,7 +8518,7 @@
                 <a:ea typeface="Arial" pitchFamily="34" charset="-122"/>
                 <a:cs typeface="Arial" pitchFamily="34" charset="-120"/>
               </a:rPr>
-              <a:t>Rich snippets + AI Overview citation opportunities</a:t>
+              <a:t>Market Update, Best Neighborhoods, Flood Zones — earns rich results in SERPs and AI Overview citations</a:t>
             </a:r>
             <a:endParaRPr lang="en-US" sz="1200" dirty="0"/>
           </a:p>
@@ -8579,7 +8579,7 @@
                 <a:ea typeface="Arial" pitchFamily="34" charset="-122"/>
                 <a:cs typeface="Arial" pitchFamily="34" charset="-120"/>
               </a:rPr>
-              <a:t>Cross-Linking Strategy</a:t>
+              <a:t>Cross-Linking Strategy Across Owned Domains</a:t>
             </a:r>
             <a:endParaRPr lang="en-US" sz="1300" dirty="0"/>
           </a:p>
@@ -8618,7 +8618,7 @@
                 <a:ea typeface="Arial" pitchFamily="34" charset="-122"/>
                 <a:cs typeface="Arial" pitchFamily="34" charset="-120"/>
               </a:rPr>
-              <a:t>Blog &gt; key pages &gt; conversion pages across all content</a:t>
+              <a:t>stpetersburgrealestate.com, dwellingwell.com, dwellfl.com all properly linking to lianejamason.com with relevant anchor text</a:t>
             </a:r>
             <a:endParaRPr lang="en-US" sz="1200" dirty="0"/>
           </a:p>
@@ -8819,7 +8819,7 @@
                 <a:ea typeface="Arial" pitchFamily="34" charset="-122"/>
                 <a:cs typeface="Arial" pitchFamily="34" charset="-120"/>
               </a:rPr>
-              <a:t>  Monthly reports</a:t>
+              <a:t>  Monthly waterfront market reports</a:t>
             </a:r>
             <a:endParaRPr lang="en-US" sz="1100" dirty="0"/>
           </a:p>
@@ -8855,7 +8855,7 @@
                 <a:ea typeface="Arial" pitchFamily="34" charset="-122"/>
                 <a:cs typeface="Arial" pitchFamily="34" charset="-120"/>
               </a:rPr>
-              <a:t>  Build to 200+ pages</a:t>
+              <a:t>  Build neighborhood pages to 20+</a:t>
             </a:r>
             <a:endParaRPr lang="en-US" sz="1100" dirty="0"/>
           </a:p>
@@ -8891,7 +8891,7 @@
                 <a:ea typeface="Arial" pitchFamily="34" charset="-122"/>
                 <a:cs typeface="Arial" pitchFamily="34" charset="-120"/>
               </a:rPr>
-              <a:t>  Lifestyle/resource guides</a:t>
+              <a:t>  Lifestyle/restaurant guides per area</a:t>
             </a:r>
             <a:endParaRPr lang="en-US" sz="1100" dirty="0"/>
           </a:p>
@@ -8927,7 +8927,7 @@
                 <a:ea typeface="Arial" pitchFamily="34" charset="-122"/>
                 <a:cs typeface="Arial" pitchFamily="34" charset="-120"/>
               </a:rPr>
-              <a:t>  Comparison content</a:t>
+              <a:t>  School district &amp; comparison tools</a:t>
             </a:r>
             <a:endParaRPr lang="en-US" sz="1100" dirty="0"/>
           </a:p>
@@ -8963,7 +8963,7 @@
                 <a:ea typeface="Arial" pitchFamily="34" charset="-122"/>
                 <a:cs typeface="Arial" pitchFamily="34" charset="-120"/>
               </a:rPr>
-              <a:t>  "Best of" resource pages</a:t>
+              <a:t>  Quarterly luxury real estate review PDF</a:t>
             </a:r>
             <a:endParaRPr lang="en-US" sz="1100" dirty="0"/>
           </a:p>
@@ -9080,7 +9080,7 @@
                 <a:ea typeface="Arial" pitchFamily="34" charset="-122"/>
                 <a:cs typeface="Arial" pitchFamily="34" charset="-120"/>
               </a:rPr>
-              <a:t>  Monthly video updates</a:t>
+              <a:t>  Embed 9+ Bay News 9 segments on Press page</a:t>
             </a:r>
             <a:endParaRPr lang="en-US" sz="1100" dirty="0"/>
           </a:p>
@@ -9116,7 +9116,7 @@
                 <a:ea typeface="Arial" pitchFamily="34" charset="-122"/>
                 <a:cs typeface="Arial" pitchFamily="34" charset="-120"/>
               </a:rPr>
-              <a:t>  Tour/showcase videos</a:t>
+              <a:t>  Monthly video market updates</a:t>
             </a:r>
             <a:endParaRPr lang="en-US" sz="1100" dirty="0"/>
           </a:p>
@@ -9152,7 +9152,7 @@
                 <a:ea typeface="Arial" pitchFamily="34" charset="-122"/>
                 <a:cs typeface="Arial" pitchFamily="34" charset="-120"/>
               </a:rPr>
-              <a:t>  Team introduction video</a:t>
+              <a:t>  Neighborhood tour videos</a:t>
             </a:r>
             <a:endParaRPr lang="en-US" sz="1100" dirty="0"/>
           </a:p>
@@ -9188,7 +9188,7 @@
                 <a:ea typeface="Arial" pitchFamily="34" charset="-122"/>
                 <a:cs typeface="Arial" pitchFamily="34" charset="-120"/>
               </a:rPr>
-              <a:t>  Press/media coverage</a:t>
+              <a:t>  VideoObject schema on all video pages</a:t>
             </a:r>
             <a:endParaRPr lang="en-US" sz="1100" dirty="0"/>
           </a:p>
@@ -9224,7 +9224,7 @@
                 <a:ea typeface="Arial" pitchFamily="34" charset="-122"/>
                 <a:cs typeface="Arial" pitchFamily="34" charset="-120"/>
               </a:rPr>
-              <a:t>  "As Featured In" section</a:t>
+              <a:t>  Pitch Architectural Digest features</a:t>
             </a:r>
             <a:endParaRPr lang="en-US" sz="1100" dirty="0"/>
           </a:p>
@@ -9341,7 +9341,7 @@
                 <a:ea typeface="Arial" pitchFamily="34" charset="-122"/>
                 <a:cs typeface="Arial" pitchFamily="34" charset="-120"/>
               </a:rPr>
-              <a:t>  Email newsletter</a:t>
+              <a:t>  Email newsletter (biggest gap)</a:t>
             </a:r>
             <a:endParaRPr lang="en-US" sz="1100" dirty="0"/>
           </a:p>
@@ -9377,7 +9377,7 @@
                 <a:ea typeface="Arial" pitchFamily="34" charset="-122"/>
                 <a:cs typeface="Arial" pitchFamily="34" charset="-120"/>
               </a:rPr>
-              <a:t>  Gated PDFs/downloads</a:t>
+              <a:t>  Gated PDF market reports</a:t>
             </a:r>
             <a:endParaRPr lang="en-US" sz="1100" dirty="0"/>
           </a:p>
@@ -9413,7 +9413,7 @@
                 <a:ea typeface="Arial" pitchFamily="34" charset="-122"/>
                 <a:cs typeface="Arial" pitchFamily="34" charset="-120"/>
               </a:rPr>
-              <a:t>  Chat widget</a:t>
+              <a:t>  End-of-post CTAs on all 287 blog posts</a:t>
             </a:r>
             <a:endParaRPr lang="en-US" sz="1100" dirty="0"/>
           </a:p>
@@ -9449,7 +9449,7 @@
                 <a:ea typeface="Arial" pitchFamily="34" charset="-122"/>
                 <a:cs typeface="Arial" pitchFamily="34" charset="-120"/>
               </a:rPr>
-              <a:t>  Page-specific email signups</a:t>
+              <a:t>  Neighborhood-specific contact forms</a:t>
             </a:r>
             <a:endParaRPr lang="en-US" sz="1100" dirty="0"/>
           </a:p>
@@ -9485,7 +9485,7 @@
                 <a:ea typeface="Arial" pitchFamily="34" charset="-122"/>
                 <a:cs typeface="Arial" pitchFamily="34" charset="-120"/>
               </a:rPr>
-              <a:t>  Alert notifications</a:t>
+              <a:t>  SMS opt-in for property alerts</a:t>
             </a:r>
             <a:endParaRPr lang="en-US" sz="1100" dirty="0"/>
           </a:p>
@@ -9546,7 +9546,7 @@
                 <a:ea typeface="Arial" pitchFamily="34" charset="-122"/>
                 <a:cs typeface="Arial" pitchFamily="34" charset="-120"/>
               </a:rPr>
-              <a:t>Local SEO</a:t>
+              <a:t>Local SEO &amp; Links</a:t>
             </a:r>
             <a:endParaRPr lang="en-US" sz="1500" dirty="0"/>
           </a:p>
@@ -9602,7 +9602,7 @@
                 <a:ea typeface="Arial" pitchFamily="34" charset="-122"/>
                 <a:cs typeface="Arial" pitchFamily="34" charset="-120"/>
               </a:rPr>
-              <a:t>  Google Business Profile</a:t>
+              <a:t>  St. Pete Chamber membership</a:t>
             </a:r>
             <a:endParaRPr lang="en-US" sz="1100" dirty="0"/>
           </a:p>
@@ -9638,7 +9638,7 @@
                 <a:ea typeface="Arial" pitchFamily="34" charset="-122"/>
                 <a:cs typeface="Arial" pitchFamily="34" charset="-120"/>
               </a:rPr>
-              <a:t>  Directory profiles</a:t>
+              <a:t>  Johns Hopkins donor page backlink</a:t>
             </a:r>
             <a:endParaRPr lang="en-US" sz="1100" dirty="0"/>
           </a:p>
@@ -9674,7 +9674,7 @@
                 <a:ea typeface="Arial" pitchFamily="34" charset="-122"/>
                 <a:cs typeface="Arial" pitchFamily="34" charset="-120"/>
               </a:rPr>
-              <a:t>  Citation consistency</a:t>
+              <a:t>  USF St. Petersburg partnership (.edu)</a:t>
             </a:r>
             <a:endParaRPr lang="en-US" sz="1100" dirty="0"/>
           </a:p>
@@ -9710,7 +9710,7 @@
                 <a:ea typeface="Arial" pitchFamily="34" charset="-122"/>
                 <a:cs typeface="Arial" pitchFamily="34" charset="-120"/>
               </a:rPr>
-              <a:t>  International tags if needed</a:t>
+              <a:t>  SHINE / Localtopia event sponsorships</a:t>
             </a:r>
             <a:endParaRPr lang="en-US" sz="1100" dirty="0"/>
           </a:p>
@@ -9746,7 +9746,7 @@
                 <a:ea typeface="Arial" pitchFamily="34" charset="-122"/>
                 <a:cs typeface="Arial" pitchFamily="34" charset="-120"/>
               </a:rPr>
-              <a:t>  Performance audit</a:t>
+              <a:t>  Tampa Bay Times recurring column</a:t>
             </a:r>
             <a:endParaRPr lang="en-US" sz="1100" dirty="0"/>
           </a:p>
@@ -9930,7 +9930,7 @@
                 <a:ea typeface="Arial" pitchFamily="34" charset="-122"/>
                 <a:cs typeface="Arial" pitchFamily="34" charset="-120"/>
               </a:rPr>
-              <a:t>Strong Brand</a:t>
+              <a:t>Raw Content Volume</a:t>
             </a:r>
             <a:endParaRPr lang="en-US" sz="1500" dirty="0"/>
           </a:p>
@@ -9969,7 +9969,7 @@
                 <a:ea typeface="Arial" pitchFamily="34" charset="-122"/>
                 <a:cs typeface="Arial" pitchFamily="34" charset="-120"/>
               </a:rPr>
-              <a:t>Recognized brand name provides luxury/authority cachet</a:t>
+              <a:t>287 blog posts — more than any single competitor. This content library is a genuine asset that competitors would need years to replicate</a:t>
             </a:r>
             <a:endParaRPr lang="en-US" sz="1300" dirty="0"/>
           </a:p>
@@ -10030,7 +10030,7 @@
                 <a:ea typeface="Arial" pitchFamily="34" charset="-122"/>
                 <a:cs typeface="Arial" pitchFamily="34" charset="-120"/>
               </a:rPr>
-              <a:t>Same Platform as Competitors</a:t>
+              <a:t>National Press Credentials</a:t>
             </a:r>
             <a:endParaRPr lang="en-US" sz="1500" dirty="0"/>
           </a:p>
@@ -10069,7 +10069,7 @@
                 <a:ea typeface="Arial" pitchFamily="34" charset="-122"/>
                 <a:cs typeface="Arial" pitchFamily="34" charset="-120"/>
               </a:rPr>
-              <a:t>Everything they do, you can do too</a:t>
+              <a:t>Forbes, WSJ, USA Today, HuffPost, Realtor.com features, 9+ Bay News 9 TV segments, ABC Action News, 10 Tampa Bay — no local competitor has this breadth of national press</a:t>
             </a:r>
             <a:endParaRPr lang="en-US" sz="1300" dirty="0"/>
           </a:p>
@@ -10130,7 +10130,7 @@
                 <a:ea typeface="Arial" pitchFamily="34" charset="-122"/>
                 <a:cs typeface="Arial" pitchFamily="34" charset="-120"/>
               </a:rPr>
-              <a:t>First Mover on Key Content</a:t>
+              <a:t>Blog Post Quality</a:t>
             </a:r>
             <a:endParaRPr lang="en-US" sz="1500" dirty="0"/>
           </a:p>
@@ -10169,7 +10169,7 @@
                 <a:ea typeface="Arial" pitchFamily="34" charset="-122"/>
                 <a:cs typeface="Arial" pitchFamily="34" charset="-120"/>
               </a:rPr>
-              <a:t>No competitor publishes regular market data</a:t>
+              <a:t>Best posts ('9 Mistakes Luxury Sellers Make' at 3,500 words) demonstrate exactly the first-hand expertise that Google's E-E-A-T framework rewards — specific local references, genuine market knowledge, personality</a:t>
             </a:r>
             <a:endParaRPr lang="en-US" sz="1300" dirty="0"/>
           </a:p>
@@ -10230,7 +10230,7 @@
                 <a:ea typeface="Arial" pitchFamily="34" charset="-122"/>
                 <a:cs typeface="Arial" pitchFamily="34" charset="-120"/>
               </a:rPr>
-              <a:t>Solid Foundation</a:t>
+              <a:t>Broker/Owner Authority</a:t>
             </a:r>
             <a:endParaRPr lang="en-US" sz="1500" dirty="0"/>
           </a:p>
@@ -10269,7 +10269,7 @@
                 <a:ea typeface="Arial" pitchFamily="34" charset="-122"/>
                 <a:cs typeface="Arial" pitchFamily="34" charset="-120"/>
               </a:rPr>
-              <a:t>Clean design, existing pages, IDX integration</a:t>
+              <a:t>Recognized individual expert and broker/owner, not part of a faceless team. For luxury buyers who value personal service, this is a genuine differentiator</a:t>
             </a:r>
             <a:endParaRPr lang="en-US" sz="1300" dirty="0"/>
           </a:p>
@@ -10330,7 +10330,7 @@
                 <a:ea typeface="Arial" pitchFamily="34" charset="-122"/>
                 <a:cs typeface="Arial" pitchFamily="34" charset="-120"/>
               </a:rPr>
-              <a:t>Strong Social Proof</a:t>
+              <a:t>Corcoran Brand Affiliation</a:t>
             </a:r>
             <a:endParaRPr lang="en-US" sz="1500" dirty="0"/>
           </a:p>
@@ -10369,7 +10369,7 @@
                 <a:ea typeface="Arial" pitchFamily="34" charset="-122"/>
                 <a:cs typeface="Arial" pitchFamily="34" charset="-120"/>
               </a:rPr>
-              <a:t>Sales volume, transaction count, success rate — just needs visibility</a:t>
+              <a:t>National luxury brand recognition that competitors at LPT Realty, Keller Williams, or Michael Saunders cannot match in the luxury segment</a:t>
             </a:r>
             <a:endParaRPr lang="en-US" sz="1300" dirty="0"/>
           </a:p>
@@ -10378,6 +10378,306 @@
       <p:sp>
         <p:nvSpPr>
           <p:cNvPr id="20" name="Shape 18"/>
+          <p:cNvSpPr/>
+          <p:nvPr/>
+        </p:nvSpPr>
+        <p:spPr>
+          <a:xfrm>
+            <a:off x="457200" y="5852160"/>
+            <a:ext cx="274320" cy="274320"/>
+          </a:xfrm>
+          <a:prstGeom prst="rect">
+            <a:avLst>
+              <a:gd name="adj" fmla="val 50000"/>
+            </a:avLst>
+          </a:prstGeom>
+          <a:solidFill>
+            <a:srgbClr val="27AE60"/>
+          </a:solidFill>
+          <a:ln/>
+        </p:spPr>
+      </p:sp>
+      <p:sp>
+        <p:nvSpPr>
+          <p:cNvPr id="21" name="Text 19"/>
+          <p:cNvSpPr/>
+          <p:nvPr/>
+        </p:nvSpPr>
+        <p:spPr>
+          <a:xfrm>
+            <a:off x="1005840" y="5806440"/>
+            <a:ext cx="3657600" cy="320040"/>
+          </a:xfrm>
+          <a:prstGeom prst="rect">
+            <a:avLst/>
+          </a:prstGeom>
+          <a:noFill/>
+          <a:ln/>
+        </p:spPr>
+        <p:txBody>
+          <a:bodyPr wrap="square" rtlCol="0" anchor="ctr"/>
+          <a:lstStyle/>
+          <a:p>
+            <a:pPr indent="0" marL="0">
+              <a:buNone/>
+            </a:pPr>
+            <a:r>
+              <a:rPr lang="en-US" sz="1500" b="1" dirty="0">
+                <a:solidFill>
+                  <a:srgbClr val="1A1A2E"/>
+                </a:solidFill>
+                <a:latin typeface="Arial" pitchFamily="34" charset="0"/>
+                <a:ea typeface="Arial" pitchFamily="34" charset="-122"/>
+                <a:cs typeface="Arial" pitchFamily="34" charset="-120"/>
+              </a:rPr>
+              <a:t>Geographic Breadth</a:t>
+            </a:r>
+            <a:endParaRPr lang="en-US" sz="1500" dirty="0"/>
+          </a:p>
+        </p:txBody>
+      </p:sp>
+      <p:sp>
+        <p:nvSpPr>
+          <p:cNvPr id="22" name="Text 20"/>
+          <p:cNvSpPr/>
+          <p:nvPr/>
+        </p:nvSpPr>
+        <p:spPr>
+          <a:xfrm>
+            <a:off x="4754880" y="5806440"/>
+            <a:ext cx="6858000" cy="320040"/>
+          </a:xfrm>
+          <a:prstGeom prst="rect">
+            <a:avLst/>
+          </a:prstGeom>
+          <a:noFill/>
+          <a:ln/>
+        </p:spPr>
+        <p:txBody>
+          <a:bodyPr wrap="square" rtlCol="0" anchor="ctr"/>
+          <a:lstStyle/>
+          <a:p>
+            <a:pPr indent="0" marL="0">
+              <a:buNone/>
+            </a:pPr>
+            <a:r>
+              <a:rPr lang="en-US" sz="1300" dirty="0">
+                <a:solidFill>
+                  <a:srgbClr val="666666"/>
+                </a:solidFill>
+                <a:latin typeface="Arial" pitchFamily="34" charset="0"/>
+                <a:ea typeface="Arial" pitchFamily="34" charset="-122"/>
+                <a:cs typeface="Arial" pitchFamily="34" charset="-120"/>
+              </a:rPr>
+              <a:t>Covers Tampa, Clearwater, Dunedin, and surrounding areas — broader service area than most boutique competitors who focus only on St. Pete</a:t>
+            </a:r>
+            <a:endParaRPr lang="en-US" sz="1300" dirty="0"/>
+          </a:p>
+        </p:txBody>
+      </p:sp>
+      <p:sp>
+        <p:nvSpPr>
+          <p:cNvPr id="23" name="Shape 21"/>
+          <p:cNvSpPr/>
+          <p:nvPr/>
+        </p:nvSpPr>
+        <p:spPr>
+          <a:xfrm>
+            <a:off x="457200" y="6629400"/>
+            <a:ext cx="274320" cy="274320"/>
+          </a:xfrm>
+          <a:prstGeom prst="rect">
+            <a:avLst>
+              <a:gd name="adj" fmla="val 50000"/>
+            </a:avLst>
+          </a:prstGeom>
+          <a:solidFill>
+            <a:srgbClr val="27AE60"/>
+          </a:solidFill>
+          <a:ln/>
+        </p:spPr>
+      </p:sp>
+      <p:sp>
+        <p:nvSpPr>
+          <p:cNvPr id="24" name="Text 22"/>
+          <p:cNvSpPr/>
+          <p:nvPr/>
+        </p:nvSpPr>
+        <p:spPr>
+          <a:xfrm>
+            <a:off x="1005840" y="6583680"/>
+            <a:ext cx="3657600" cy="320040"/>
+          </a:xfrm>
+          <a:prstGeom prst="rect">
+            <a:avLst/>
+          </a:prstGeom>
+          <a:noFill/>
+          <a:ln/>
+        </p:spPr>
+        <p:txBody>
+          <a:bodyPr wrap="square" rtlCol="0" anchor="ctr"/>
+          <a:lstStyle/>
+          <a:p>
+            <a:pPr indent="0" marL="0">
+              <a:buNone/>
+            </a:pPr>
+            <a:r>
+              <a:rPr lang="en-US" sz="1500" b="1" dirty="0">
+                <a:solidFill>
+                  <a:srgbClr val="1A1A2E"/>
+                </a:solidFill>
+                <a:latin typeface="Arial" pitchFamily="34" charset="0"/>
+                <a:ea typeface="Arial" pitchFamily="34" charset="-122"/>
+                <a:cs typeface="Arial" pitchFamily="34" charset="-120"/>
+              </a:rPr>
+              <a:t>Hyper-Local Neighborhood Knowledge</a:t>
+            </a:r>
+            <a:endParaRPr lang="en-US" sz="1500" dirty="0"/>
+          </a:p>
+        </p:txBody>
+      </p:sp>
+      <p:sp>
+        <p:nvSpPr>
+          <p:cNvPr id="25" name="Text 23"/>
+          <p:cNvSpPr/>
+          <p:nvPr/>
+        </p:nvSpPr>
+        <p:spPr>
+          <a:xfrm>
+            <a:off x="4754880" y="6583680"/>
+            <a:ext cx="6858000" cy="320040"/>
+          </a:xfrm>
+          <a:prstGeom prst="rect">
+            <a:avLst/>
+          </a:prstGeom>
+          <a:noFill/>
+          <a:ln/>
+        </p:spPr>
+        <p:txBody>
+          <a:bodyPr wrap="square" rtlCol="0" anchor="ctr"/>
+          <a:lstStyle/>
+          <a:p>
+            <a:pPr indent="0" marL="0">
+              <a:buNone/>
+            </a:pPr>
+            <a:r>
+              <a:rPr lang="en-US" sz="1300" dirty="0">
+                <a:solidFill>
+                  <a:srgbClr val="666666"/>
+                </a:solidFill>
+                <a:latin typeface="Arial" pitchFamily="34" charset="0"/>
+                <a:ea typeface="Arial" pitchFamily="34" charset="-122"/>
+                <a:cs typeface="Arial" pitchFamily="34" charset="-120"/>
+              </a:rPr>
+              <a:t>Shore Acres, Old Northeast, Snell Isle, and Pinellas Point pages contain insider knowledge no competitor replicates: SACA, C. Perry Snell history, 'Dualing Publixs'</a:t>
+            </a:r>
+            <a:endParaRPr lang="en-US" sz="1300" dirty="0"/>
+          </a:p>
+        </p:txBody>
+      </p:sp>
+      <p:sp>
+        <p:nvSpPr>
+          <p:cNvPr id="26" name="Shape 24"/>
+          <p:cNvSpPr/>
+          <p:nvPr/>
+        </p:nvSpPr>
+        <p:spPr>
+          <a:xfrm>
+            <a:off x="457200" y="7406640"/>
+            <a:ext cx="274320" cy="274320"/>
+          </a:xfrm>
+          <a:prstGeom prst="rect">
+            <a:avLst>
+              <a:gd name="adj" fmla="val 50000"/>
+            </a:avLst>
+          </a:prstGeom>
+          <a:solidFill>
+            <a:srgbClr val="27AE60"/>
+          </a:solidFill>
+          <a:ln/>
+        </p:spPr>
+      </p:sp>
+      <p:sp>
+        <p:nvSpPr>
+          <p:cNvPr id="27" name="Text 25"/>
+          <p:cNvSpPr/>
+          <p:nvPr/>
+        </p:nvSpPr>
+        <p:spPr>
+          <a:xfrm>
+            <a:off x="1005840" y="7360920"/>
+            <a:ext cx="3657600" cy="320040"/>
+          </a:xfrm>
+          <a:prstGeom prst="rect">
+            <a:avLst/>
+          </a:prstGeom>
+          <a:noFill/>
+          <a:ln/>
+        </p:spPr>
+        <p:txBody>
+          <a:bodyPr wrap="square" rtlCol="0" anchor="ctr"/>
+          <a:lstStyle/>
+          <a:p>
+            <a:pPr indent="0" marL="0">
+              <a:buNone/>
+            </a:pPr>
+            <a:r>
+              <a:rPr lang="en-US" sz="1500" b="1" dirty="0">
+                <a:solidFill>
+                  <a:srgbClr val="1A1A2E"/>
+                </a:solidFill>
+                <a:latin typeface="Arial" pitchFamily="34" charset="0"/>
+                <a:ea typeface="Arial" pitchFamily="34" charset="-122"/>
+                <a:cs typeface="Arial" pitchFamily="34" charset="-120"/>
+              </a:rPr>
+              <a:t>Multiple Owned Domains</a:t>
+            </a:r>
+            <a:endParaRPr lang="en-US" sz="1500" dirty="0"/>
+          </a:p>
+        </p:txBody>
+      </p:sp>
+      <p:sp>
+        <p:nvSpPr>
+          <p:cNvPr id="28" name="Text 26"/>
+          <p:cNvSpPr/>
+          <p:nvPr/>
+        </p:nvSpPr>
+        <p:spPr>
+          <a:xfrm>
+            <a:off x="4754880" y="7360920"/>
+            <a:ext cx="6858000" cy="320040"/>
+          </a:xfrm>
+          <a:prstGeom prst="rect">
+            <a:avLst/>
+          </a:prstGeom>
+          <a:noFill/>
+          <a:ln/>
+        </p:spPr>
+        <p:txBody>
+          <a:bodyPr wrap="square" rtlCol="0" anchor="ctr"/>
+          <a:lstStyle/>
+          <a:p>
+            <a:pPr indent="0" marL="0">
+              <a:buNone/>
+            </a:pPr>
+            <a:r>
+              <a:rPr lang="en-US" sz="1300" dirty="0">
+                <a:solidFill>
+                  <a:srgbClr val="666666"/>
+                </a:solidFill>
+                <a:latin typeface="Arial" pitchFamily="34" charset="0"/>
+                <a:ea typeface="Arial" pitchFamily="34" charset="-122"/>
+                <a:cs typeface="Arial" pitchFamily="34" charset="-120"/>
+              </a:rPr>
+              <a:t>5+ owned domains (stpetersburgrealestate.com, dwellingwell.com, dwellfl.com) provide cross-link opportunity not fully utilized by any competitor</a:t>
+            </a:r>
+            <a:endParaRPr lang="en-US" sz="1300" dirty="0"/>
+          </a:p>
+        </p:txBody>
+      </p:sp>
+      <p:sp>
+        <p:nvSpPr>
+          <p:cNvPr id="29" name="Shape 27"/>
           <p:cNvSpPr/>
           <p:nvPr/>
         </p:nvSpPr>
@@ -10399,7 +10699,7 @@
       </p:sp>
       <p:sp>
         <p:nvSpPr>
-          <p:cNvPr id="21" name="Text 19"/>
+          <p:cNvPr id="30" name="Text 28"/>
           <p:cNvSpPr/>
           <p:nvPr/>
         </p:nvSpPr>
@@ -10634,7 +10934,7 @@
                 <a:ea typeface="Arial" pitchFamily="34" charset="-122"/>
                 <a:cs typeface="Arial" pitchFamily="34" charset="-120"/>
               </a:rPr>
-              <a:t>Deploy ready-to-use deliverables (meta tags, schema, pages, blog posts)</a:t>
+              <a:t>Fix the broken Market Analysis form and deploy meta descriptions</a:t>
             </a:r>
             <a:endParaRPr lang="en-US" sz="1600" dirty="0"/>
           </a:p>
@@ -10673,7 +10973,7 @@
                 <a:ea typeface="Arial" pitchFamily="34" charset="-122"/>
                 <a:cs typeface="Arial" pitchFamily="34" charset="-120"/>
               </a:rPr>
-              <a:t>Can be done this week — just copy-paste into CMS</a:t>
+              <a:t>Can be done this week — highest-impact, lowest-effort fixes that restore the seller funnel and improve search snippets</a:t>
             </a:r>
             <a:endParaRPr lang="en-US" sz="1200" dirty="0"/>
           </a:p>
@@ -10773,7 +11073,7 @@
                 <a:ea typeface="Arial" pitchFamily="34" charset="-122"/>
                 <a:cs typeface="Arial" pitchFamily="34" charset="-120"/>
               </a:rPr>
-              <a:t>Complete Week 1-2 quick wins (technical fixes)</a:t>
+              <a:t>Deploy ready-to-use deliverables (meta tags, schema, community pages, blog posts)</a:t>
             </a:r>
             <a:endParaRPr lang="en-US" sz="1600" dirty="0"/>
           </a:p>
@@ -10812,7 +11112,7 @@
                 <a:ea typeface="Arial" pitchFamily="34" charset="-122"/>
                 <a:cs typeface="Arial" pitchFamily="34" charset="-120"/>
               </a:rPr>
-              <a:t>Developer can complete in 1-2 business days</a:t>
+              <a:t>Two versions of each deliverable are ready — verify client-specific details and paste into CMS / Rank Math</a:t>
             </a:r>
             <a:endParaRPr lang="en-US" sz="1200" dirty="0"/>
           </a:p>
@@ -10912,7 +11212,7 @@
                 <a:ea typeface="Arial" pitchFamily="34" charset="-122"/>
                 <a:cs typeface="Arial" pitchFamily="34" charset="-120"/>
               </a:rPr>
-              <a:t>Begin Month 1 content calendar</a:t>
+              <a:t>Claim missing directory profiles (Yelp, Realtor.com, Redfin, BBB, Bing Places)</a:t>
             </a:r>
             <a:endParaRPr lang="en-US" sz="1600" dirty="0"/>
           </a:p>
@@ -10951,7 +11251,7 @@
                 <a:ea typeface="Arial" pitchFamily="34" charset="-122"/>
                 <a:cs typeface="Arial" pitchFamily="34" charset="-120"/>
               </a:rPr>
-              <a:t>One blog post per week targeting high-value keywords</a:t>
+              <a:t>DA 90+ backlinks from directories where all competitors are already present</a:t>
             </a:r>
             <a:endParaRPr lang="en-US" sz="1200" dirty="0"/>
           </a:p>
@@ -11051,7 +11351,7 @@
                 <a:ea typeface="Arial" pitchFamily="34" charset="-122"/>
                 <a:cs typeface="Arial" pitchFamily="34" charset="-120"/>
               </a:rPr>
-              <a:t>Create first market/industry report (first mover advantage)</a:t>
+              <a:t>Begin Month 1 content calendar — one blog post per week</a:t>
             </a:r>
             <a:endParaRPr lang="en-US" sz="1600" dirty="0"/>
           </a:p>
@@ -11090,7 +11390,7 @@
                 <a:ea typeface="Arial" pitchFamily="34" charset="-122"/>
                 <a:cs typeface="Arial" pitchFamily="34" charset="-120"/>
               </a:rPr>
-              <a:t>No competitor currently publishes regular data</a:t>
+              <a:t>Market report, waterfront guide, Snell Isle deep-dive, and buyer FAQ targeting highest-value keywords</a:t>
             </a:r>
             <a:endParaRPr lang="en-US" sz="1200" dirty="0"/>
           </a:p>
@@ -11190,7 +11490,7 @@
                 <a:ea typeface="Arial" pitchFamily="34" charset="-122"/>
                 <a:cs typeface="Arial" pitchFamily="34" charset="-120"/>
               </a:rPr>
-              <a:t>Review progress at 30-day mark and adjust strategy</a:t>
+              <a:t>Review progress at 30-day mark and measure keyword improvements</a:t>
             </a:r>
             <a:endParaRPr lang="en-US" sz="1600" dirty="0"/>
           </a:p>
@@ -11229,7 +11529,7 @@
                 <a:ea typeface="Arial" pitchFamily="34" charset="-122"/>
                 <a:cs typeface="Arial" pitchFamily="34" charset="-120"/>
               </a:rPr>
-              <a:t>Measure keyword improvements, traffic changes, lead capture</a:t>
+              <a:t>Track rankings for top 25 keywords, organic traffic changes, and lead capture volume from fixed forms</a:t>
             </a:r>
             <a:endParaRPr lang="en-US" sz="1200" dirty="0"/>
           </a:p>
@@ -11452,7 +11752,7 @@
                 <a:ea typeface="Arial" pitchFamily="34" charset="-122"/>
                 <a:cs typeface="Arial" pitchFamily="34" charset="-120"/>
               </a:rPr>
-              <a:t>The site is not broken, but it is essentially invisible to search engines</a:t>
+              <a:t>The site has more content than most competitors (287 blog posts, 365+ pages) and genuine press credentials, but severe technical SEO deficiencies, broken lead capture, and zero non-branded organic visibility prevent these strengths from translating into search traffic or leads</a:t>
             </a:r>
             <a:endParaRPr lang="en-US" sz="1000" dirty="0"/>
           </a:p>
@@ -11491,7 +11791,7 @@
                 <a:ea typeface="Arial" pitchFamily="34" charset="-122"/>
                 <a:cs typeface="Arial" pitchFamily="34" charset="-120"/>
               </a:rPr>
-              <a:t>0 / 25</a:t>
+              <a:t>2 / 25</a:t>
             </a:r>
             <a:endParaRPr lang="en-US" sz="2200" dirty="0"/>
           </a:p>
@@ -11530,7 +11830,7 @@
                 <a:ea typeface="Arial" pitchFamily="34" charset="-122"/>
                 <a:cs typeface="Arial" pitchFamily="34" charset="-120"/>
               </a:rPr>
-              <a:t>keywords ranking in Google</a:t>
+              <a:t>keywords ranking — both branded, zero commercial</a:t>
             </a:r>
             <a:endParaRPr lang="en-US" sz="1400" dirty="0"/>
           </a:p>
@@ -11569,7 +11869,7 @@
                 <a:ea typeface="Arial" pitchFamily="34" charset="-122"/>
                 <a:cs typeface="Arial" pitchFamily="34" charset="-120"/>
               </a:rPr>
-              <a:t>62 pages</a:t>
+              <a:t>365+ pages</a:t>
             </a:r>
             <a:endParaRPr lang="en-US" sz="2200" dirty="0"/>
           </a:p>
@@ -11608,7 +11908,7 @@
                 <a:ea typeface="Arial" pitchFamily="34" charset="-122"/>
                 <a:cs typeface="Arial" pitchFamily="34" charset="-120"/>
               </a:rPr>
-              <a:t>vs. competitors' 200-400+</a:t>
+              <a:t>but 60%+ missing meta descriptions</a:t>
             </a:r>
             <a:endParaRPr lang="en-US" sz="1400" dirty="0"/>
           </a:p>
@@ -11641,13 +11941,13 @@
             <a:r>
               <a:rPr lang="en-US" sz="2200" b="1" dirty="0">
                 <a:solidFill>
-                  <a:srgbClr val="F39C12"/>
+                  <a:srgbClr val="27AE60"/>
                 </a:solidFill>
                 <a:latin typeface="Arial" pitchFamily="34" charset="0"/>
                 <a:ea typeface="Arial" pitchFamily="34" charset="-122"/>
                 <a:cs typeface="Arial" pitchFamily="34" charset="-120"/>
               </a:rPr>
-              <a:t>5 blog posts</a:t>
+              <a:t>287 blog posts</a:t>
             </a:r>
             <a:endParaRPr lang="en-US" sz="2200" dirty="0"/>
           </a:p>
@@ -11686,7 +11986,7 @@
                 <a:ea typeface="Arial" pitchFamily="34" charset="-122"/>
                 <a:cs typeface="Arial" pitchFamily="34" charset="-120"/>
               </a:rPr>
-              <a:t>all generic, last updated months ago</a:t>
+              <a:t>more than any competitor — content is an asset</a:t>
             </a:r>
             <a:endParaRPr lang="en-US" sz="1400" dirty="0"/>
           </a:p>
@@ -11725,7 +12025,7 @@
                 <a:ea typeface="Arial" pitchFamily="34" charset="-122"/>
                 <a:cs typeface="Arial" pitchFamily="34" charset="-120"/>
               </a:rPr>
-              <a:t>~200 words</a:t>
+              <a:t>BROKEN</a:t>
             </a:r>
             <a:endParaRPr lang="en-US" sz="2200" dirty="0"/>
           </a:p>
@@ -11764,7 +12064,7 @@
                 <a:ea typeface="Arial" pitchFamily="34" charset="-122"/>
                 <a:cs typeface="Arial" pitchFamily="34" charset="-120"/>
               </a:rPr>
-              <a:t>avg. key page (competitors: 3,500+)</a:t>
+              <a:t>home valuation form — #1 seller lead page</a:t>
             </a:r>
             <a:endParaRPr lang="en-US" sz="1400" dirty="0"/>
           </a:p>
@@ -11803,7 +12103,7 @@
                 <a:ea typeface="Arial" pitchFamily="34" charset="-122"/>
                 <a:cs typeface="Arial" pitchFamily="34" charset="-120"/>
               </a:rPr>
-              <a:t>0 schema</a:t>
+              <a:t>70-83%</a:t>
             </a:r>
             <a:endParaRPr lang="en-US" sz="2200" dirty="0"/>
           </a:p>
@@ -11842,7 +12142,7 @@
                 <a:ea typeface="Arial" pitchFamily="34" charset="-122"/>
                 <a:cs typeface="Arial" pitchFamily="34" charset="-120"/>
               </a:rPr>
-              <a:t>markup on any page</a:t>
+              <a:t>of images missing alt text across key pages</a:t>
             </a:r>
             <a:endParaRPr lang="en-US" sz="1400" dirty="0"/>
           </a:p>
@@ -11881,7 +12181,7 @@
                 <a:ea typeface="Arial" pitchFamily="34" charset="-122"/>
                 <a:cs typeface="Arial" pitchFamily="34" charset="-120"/>
               </a:rPr>
-              <a:t>0 market reports</a:t>
+              <a:t>0 lead magnets</a:t>
             </a:r>
             <a:endParaRPr lang="en-US" sz="2200" dirty="0"/>
           </a:p>
@@ -11920,7 +12220,7 @@
                 <a:ea typeface="Arial" pitchFamily="34" charset="-122"/>
                 <a:cs typeface="Arial" pitchFamily="34" charset="-120"/>
               </a:rPr>
-              <a:t>the #1 content type for this industry</a:t>
+              <a:t>no downloadable guides, no email capture on blog</a:t>
             </a:r>
             <a:endParaRPr lang="en-US" sz="1400" dirty="0"/>
           </a:p>
@@ -12104,7 +12404,7 @@
                 <a:ea typeface="Arial" pitchFamily="34" charset="-122"/>
                 <a:cs typeface="Arial" pitchFamily="34" charset="-120"/>
               </a:rPr>
-              <a:t>Zero organic search visibility</a:t>
+              <a:t>Zero non-branded organic visibility</a:t>
             </a:r>
             <a:endParaRPr lang="en-US" sz="1600" dirty="0"/>
           </a:p>
@@ -12143,7 +12443,7 @@
                 <a:ea typeface="Arial" pitchFamily="34" charset="-122"/>
                 <a:cs typeface="Arial" pitchFamily="34" charset="-120"/>
               </a:rPr>
-              <a:t>Not found for any of 25 target keywords — potential clients cannot find this site through Google</a:t>
+              <a:t>Ranks for only 2 of 25 target keywords — both branded queries. Zero ranking for any commercial keyword (luxury homes, waterfront homes, neighborhoods, agent intent)</a:t>
             </a:r>
             <a:endParaRPr lang="en-US" sz="1200" dirty="0"/>
           </a:p>
@@ -12243,7 +12543,7 @@
                 <a:ea typeface="Arial" pitchFamily="34" charset="-122"/>
                 <a:cs typeface="Arial" pitchFamily="34" charset="-120"/>
               </a:rPr>
-              <a:t>Critically thin content</a:t>
+              <a:t>Broken primary lead capture funnel</a:t>
             </a:r>
             <a:endParaRPr lang="en-US" sz="1600" dirty="0"/>
           </a:p>
@@ -12282,7 +12582,7 @@
                 <a:ea typeface="Arial" pitchFamily="34" charset="-122"/>
                 <a:cs typeface="Arial" pitchFamily="34" charset="-120"/>
               </a:rPr>
-              <a:t>Far fewer pages than competitors; dead or nonexistent blog</a:t>
+              <a:t>Market Analysis / home valuation form is non-rendering. Homepage CTA 'What's My Home Worth?' leads to a dead end. Seller conversion path is completely broken</a:t>
             </a:r>
             <a:endParaRPr lang="en-US" sz="1200" dirty="0"/>
           </a:p>
@@ -12382,7 +12682,7 @@
                 <a:ea typeface="Arial" pitchFamily="34" charset="-122"/>
                 <a:cs typeface="Arial" pitchFamily="34" charset="-120"/>
               </a:rPr>
-              <a:t>No locally-focused content</a:t>
+              <a:t>60%+ of core pages missing meta descriptions</a:t>
             </a:r>
             <a:endParaRPr lang="en-US" sz="1600" dirty="0"/>
           </a:p>
@@ -12421,7 +12721,7 @@
                 <a:ea typeface="Arial" pitchFamily="34" charset="-122"/>
                 <a:cs typeface="Arial" pitchFamily="34" charset="-120"/>
               </a:rPr>
-              <a:t>Missing the #1 content type for local SEO in this industry</a:t>
+              <a:t>Homepage, blog index, reviews, property search, active listings, sold listings, and most area pages have no meta descriptions. Google auto-generates poor snippets</a:t>
             </a:r>
             <a:endParaRPr lang="en-US" sz="1200" dirty="0"/>
           </a:p>
@@ -12521,7 +12821,7 @@
                 <a:ea typeface="Arial" pitchFamily="34" charset="-122"/>
                 <a:cs typeface="Arial" pitchFamily="34" charset="-120"/>
               </a:rPr>
-              <a:t>Technical SEO errors</a:t>
+              <a:t>70-83% of images missing alt text</a:t>
             </a:r>
             <a:endParaRPr lang="en-US" sz="1600" dirty="0"/>
           </a:p>
@@ -12560,7 +12860,7 @@
                 <a:ea typeface="Arial" pitchFamily="34" charset="-122"/>
                 <a:cs typeface="Arial" pitchFamily="34" charset="-120"/>
               </a:rPr>
-              <a:t>Broken pages, corrupted meta tags, missing schema markup, images without alt text</a:t>
+              <a:t>Hero images, professional headshot, press logos (Bay News 9, Tampa Bay Times, HuffPost), property photos, and blog featured images all lack alt text</a:t>
             </a:r>
             <a:endParaRPr lang="en-US" sz="1200" dirty="0"/>
           </a:p>
@@ -12660,7 +12960,7 @@
                 <a:ea typeface="Arial" pitchFamily="34" charset="-122"/>
                 <a:cs typeface="Arial" pitchFamily="34" charset="-120"/>
               </a:rPr>
-              <a:t>No lead capture on key pages</a:t>
+              <a:t>Broken sitemap and thin-page indexing</a:t>
             </a:r>
             <a:endParaRPr lang="en-US" sz="1600" dirty="0"/>
           </a:p>
@@ -12699,7 +12999,7 @@
                 <a:ea typeface="Arial" pitchFamily="34" charset="-122"/>
                 <a:cs typeface="Arial" pitchFamily="34" charset="-120"/>
               </a:rPr>
-              <a:t>Highest-traffic pages have no forms, CTAs, or lead magnets</a:t>
+              <a:t>7 attachment sitemaps feeding hundreds of thin media pages into Google's index. One broken sitemap returning 404. Crawl budget wasted on junk content</a:t>
             </a:r>
             <a:endParaRPr lang="en-US" sz="1200" dirty="0"/>
           </a:p>
@@ -12783,7 +13083,7 @@
                 <a:ea typeface="Arial" pitchFamily="34" charset="-122"/>
                 <a:cs typeface="Arial" pitchFamily="34" charset="-120"/>
               </a:rPr>
-              <a:t>Search Visibility: 0 of 5 Keywords</a:t>
+              <a:t>Search Visibility: 2 of 25 Keywords</a:t>
             </a:r>
             <a:endParaRPr lang="en-US" sz="2800" dirty="0"/>
           </a:p>
@@ -12822,7 +13122,7 @@
                 <a:ea typeface="Arial" pitchFamily="34" charset="-122"/>
                 <a:cs typeface="Arial" pitchFamily="34" charset="-120"/>
               </a:rPr>
-              <a:t>We tested 5 keywords covering brand, type, area, intent, and long-tail terms.</a:t>
+              <a:t>We tested 25 keywords covering brand, type, area, intent, and long-tail terms.</a:t>
             </a:r>
             <a:endParaRPr lang="en-US" sz="1400" dirty="0"/>
           </a:p>
@@ -12839,7 +13139,7 @@
                 <a:ea typeface="Arial" pitchFamily="34" charset="-122"/>
                 <a:cs typeface="Arial" pitchFamily="34" charset="-120"/>
               </a:rPr>
-              <a:t>example.com was NOT found in organic results for any of them.</a:t>
+              <a:t>lianejamason.com was found for 2 of them.</a:t>
             </a:r>
             <a:endParaRPr lang="en-US" sz="1400" dirty="0"/>
           </a:p>
@@ -13096,7 +13396,7 @@
                           <a:ea typeface="Arial" pitchFamily="34" charset="-122"/>
                           <a:cs typeface="Arial" pitchFamily="34" charset="-120"/>
                         </a:rPr>
-                        <a:t>Competitor 1</a:t>
+                        <a:t>Avalon Group</a:t>
                       </a:r>
                       <a:endParaRPr lang="en-US" sz="1100" dirty="0">
                         <a:latin typeface="Arial" charset="0"/>
@@ -13234,7 +13534,661 @@
                           <a:ea typeface="Arial" pitchFamily="34" charset="-122"/>
                           <a:cs typeface="Arial" pitchFamily="34" charset="-120"/>
                         </a:rPr>
-                        <a:t>primary keyword 1</a:t>
+                        <a:t>Liane Jamason realtor St Petersburg FL</a:t>
+                      </a:r>
+                      <a:endParaRPr lang="en-US" sz="1100" dirty="0">
+                        <a:latin typeface="Arial" charset="0"/>
+                        <a:ea typeface="Arial" charset="0"/>
+                        <a:cs typeface="Arial" charset="0"/>
+                      </a:endParaRPr>
+                    </a:p>
+                  </a:txBody>
+                  <a:tcPr marL="91440" marR="91440" marT="45720" marB="45720">
+                    <a:lnL w="6350" cap="flat" cmpd="sng" algn="ctr">
+                      <a:solidFill>
+                        <a:srgbClr val="CCCCCC"/>
+                      </a:solidFill>
+                      <a:prstDash val="solid"/>
+                      <a:round/>
+                      <a:headEnd type="none" w="med" len="med"/>
+                      <a:tailEnd type="none" w="med" len="med"/>
+                    </a:lnL>
+                    <a:lnR w="6350" cap="flat" cmpd="sng" algn="ctr">
+                      <a:solidFill>
+                        <a:srgbClr val="CCCCCC"/>
+                      </a:solidFill>
+                      <a:prstDash val="solid"/>
+                      <a:round/>
+                      <a:headEnd type="none" w="med" len="med"/>
+                      <a:tailEnd type="none" w="med" len="med"/>
+                    </a:lnR>
+                    <a:lnT w="6350" cap="flat" cmpd="sng" algn="ctr">
+                      <a:solidFill>
+                        <a:srgbClr val="CCCCCC"/>
+                      </a:solidFill>
+                      <a:prstDash val="solid"/>
+                      <a:round/>
+                      <a:headEnd type="none" w="med" len="med"/>
+                      <a:tailEnd type="none" w="med" len="med"/>
+                    </a:lnT>
+                    <a:lnB w="6350" cap="flat" cmpd="sng" algn="ctr">
+                      <a:solidFill>
+                        <a:srgbClr val="CCCCCC"/>
+                      </a:solidFill>
+                      <a:prstDash val="solid"/>
+                      <a:round/>
+                      <a:headEnd type="none" w="med" len="med"/>
+                      <a:tailEnd type="none" w="med" len="med"/>
+                    </a:lnB>
+                  </a:tcPr>
+                </a:tc>
+                <a:tc>
+                  <a:txBody>
+                    <a:bodyPr/>
+                    <a:lstStyle/>
+                    <a:p>
+                      <a:pPr indent="0" marL="0">
+                        <a:buNone/>
+                      </a:pPr>
+                      <a:r>
+                        <a:rPr lang="en-US" sz="1100" dirty="0">
+                          <a:solidFill>
+                            <a:srgbClr val="000000"/>
+                          </a:solidFill>
+                          <a:latin typeface="Arial" pitchFamily="34" charset="0"/>
+                          <a:ea typeface="Arial" pitchFamily="34" charset="-122"/>
+                          <a:cs typeface="Arial" pitchFamily="34" charset="-120"/>
+                        </a:rPr>
+                        <a:t>Low</a:t>
+                      </a:r>
+                      <a:endParaRPr lang="en-US" sz="1100" dirty="0">
+                        <a:latin typeface="Arial" charset="0"/>
+                        <a:ea typeface="Arial" charset="0"/>
+                        <a:cs typeface="Arial" charset="0"/>
+                      </a:endParaRPr>
+                    </a:p>
+                  </a:txBody>
+                  <a:tcPr marL="91440" marR="91440" marT="45720" marB="45720">
+                    <a:lnL w="6350" cap="flat" cmpd="sng" algn="ctr">
+                      <a:solidFill>
+                        <a:srgbClr val="CCCCCC"/>
+                      </a:solidFill>
+                      <a:prstDash val="solid"/>
+                      <a:round/>
+                      <a:headEnd type="none" w="med" len="med"/>
+                      <a:tailEnd type="none" w="med" len="med"/>
+                    </a:lnL>
+                    <a:lnR w="6350" cap="flat" cmpd="sng" algn="ctr">
+                      <a:solidFill>
+                        <a:srgbClr val="CCCCCC"/>
+                      </a:solidFill>
+                      <a:prstDash val="solid"/>
+                      <a:round/>
+                      <a:headEnd type="none" w="med" len="med"/>
+                      <a:tailEnd type="none" w="med" len="med"/>
+                    </a:lnR>
+                    <a:lnT w="6350" cap="flat" cmpd="sng" algn="ctr">
+                      <a:solidFill>
+                        <a:srgbClr val="CCCCCC"/>
+                      </a:solidFill>
+                      <a:prstDash val="solid"/>
+                      <a:round/>
+                      <a:headEnd type="none" w="med" len="med"/>
+                      <a:tailEnd type="none" w="med" len="med"/>
+                    </a:lnT>
+                    <a:lnB w="6350" cap="flat" cmpd="sng" algn="ctr">
+                      <a:solidFill>
+                        <a:srgbClr val="CCCCCC"/>
+                      </a:solidFill>
+                      <a:prstDash val="solid"/>
+                      <a:round/>
+                      <a:headEnd type="none" w="med" len="med"/>
+                      <a:tailEnd type="none" w="med" len="med"/>
+                    </a:lnB>
+                  </a:tcPr>
+                </a:tc>
+                <a:tc>
+                  <a:txBody>
+                    <a:bodyPr/>
+                    <a:lstStyle/>
+                    <a:p>
+                      <a:pPr indent="0" marL="0">
+                        <a:buNone/>
+                      </a:pPr>
+                      <a:r>
+                        <a:rPr lang="en-US" sz="1100" dirty="0">
+                          <a:solidFill>
+                            <a:srgbClr val="27AE60"/>
+                          </a:solidFill>
+                          <a:latin typeface="Arial" pitchFamily="34" charset="0"/>
+                          <a:ea typeface="Arial" pitchFamily="34" charset="-122"/>
+                          <a:cs typeface="Arial" pitchFamily="34" charset="-120"/>
+                        </a:rPr>
+                        <a:t>#1, #2</a:t>
+                      </a:r>
+                      <a:endParaRPr lang="en-US" sz="1100" dirty="0">
+                        <a:latin typeface="Arial" charset="0"/>
+                        <a:ea typeface="Arial" charset="0"/>
+                        <a:cs typeface="Arial" charset="0"/>
+                      </a:endParaRPr>
+                    </a:p>
+                  </a:txBody>
+                  <a:tcPr marL="91440" marR="91440" marT="45720" marB="45720">
+                    <a:lnL w="6350" cap="flat" cmpd="sng" algn="ctr">
+                      <a:solidFill>
+                        <a:srgbClr val="CCCCCC"/>
+                      </a:solidFill>
+                      <a:prstDash val="solid"/>
+                      <a:round/>
+                      <a:headEnd type="none" w="med" len="med"/>
+                      <a:tailEnd type="none" w="med" len="med"/>
+                    </a:lnL>
+                    <a:lnR w="6350" cap="flat" cmpd="sng" algn="ctr">
+                      <a:solidFill>
+                        <a:srgbClr val="CCCCCC"/>
+                      </a:solidFill>
+                      <a:prstDash val="solid"/>
+                      <a:round/>
+                      <a:headEnd type="none" w="med" len="med"/>
+                      <a:tailEnd type="none" w="med" len="med"/>
+                    </a:lnR>
+                    <a:lnT w="6350" cap="flat" cmpd="sng" algn="ctr">
+                      <a:solidFill>
+                        <a:srgbClr val="CCCCCC"/>
+                      </a:solidFill>
+                      <a:prstDash val="solid"/>
+                      <a:round/>
+                      <a:headEnd type="none" w="med" len="med"/>
+                      <a:tailEnd type="none" w="med" len="med"/>
+                    </a:lnT>
+                    <a:lnB w="6350" cap="flat" cmpd="sng" algn="ctr">
+                      <a:solidFill>
+                        <a:srgbClr val="CCCCCC"/>
+                      </a:solidFill>
+                      <a:prstDash val="solid"/>
+                      <a:round/>
+                      <a:headEnd type="none" w="med" len="med"/>
+                      <a:tailEnd type="none" w="med" len="med"/>
+                    </a:lnB>
+                  </a:tcPr>
+                </a:tc>
+                <a:tc>
+                  <a:txBody>
+                    <a:bodyPr/>
+                    <a:lstStyle/>
+                    <a:p>
+                      <a:pPr indent="0" marL="0">
+                        <a:buNone/>
+                      </a:pPr>
+                      <a:r>
+                        <a:rPr lang="en-US" sz="1100" dirty="0">
+                          <a:solidFill>
+                            <a:srgbClr val="27AE60"/>
+                          </a:solidFill>
+                          <a:latin typeface="Arial" pitchFamily="34" charset="0"/>
+                          <a:ea typeface="Arial" pitchFamily="34" charset="-122"/>
+                          <a:cs typeface="Arial" pitchFamily="34" charset="-120"/>
+                        </a:rPr>
+                        <a:t>N/A</a:t>
+                      </a:r>
+                      <a:endParaRPr lang="en-US" sz="1100" dirty="0">
+                        <a:latin typeface="Arial" charset="0"/>
+                        <a:ea typeface="Arial" charset="0"/>
+                        <a:cs typeface="Arial" charset="0"/>
+                      </a:endParaRPr>
+                    </a:p>
+                  </a:txBody>
+                  <a:tcPr marL="91440" marR="91440" marT="45720" marB="45720">
+                    <a:lnL w="6350" cap="flat" cmpd="sng" algn="ctr">
+                      <a:solidFill>
+                        <a:srgbClr val="CCCCCC"/>
+                      </a:solidFill>
+                      <a:prstDash val="solid"/>
+                      <a:round/>
+                      <a:headEnd type="none" w="med" len="med"/>
+                      <a:tailEnd type="none" w="med" len="med"/>
+                    </a:lnL>
+                    <a:lnR w="6350" cap="flat" cmpd="sng" algn="ctr">
+                      <a:solidFill>
+                        <a:srgbClr val="CCCCCC"/>
+                      </a:solidFill>
+                      <a:prstDash val="solid"/>
+                      <a:round/>
+                      <a:headEnd type="none" w="med" len="med"/>
+                      <a:tailEnd type="none" w="med" len="med"/>
+                    </a:lnR>
+                    <a:lnT w="6350" cap="flat" cmpd="sng" algn="ctr">
+                      <a:solidFill>
+                        <a:srgbClr val="CCCCCC"/>
+                      </a:solidFill>
+                      <a:prstDash val="solid"/>
+                      <a:round/>
+                      <a:headEnd type="none" w="med" len="med"/>
+                      <a:tailEnd type="none" w="med" len="med"/>
+                    </a:lnT>
+                    <a:lnB w="6350" cap="flat" cmpd="sng" algn="ctr">
+                      <a:solidFill>
+                        <a:srgbClr val="CCCCCC"/>
+                      </a:solidFill>
+                      <a:prstDash val="solid"/>
+                      <a:round/>
+                      <a:headEnd type="none" w="med" len="med"/>
+                      <a:tailEnd type="none" w="med" len="med"/>
+                    </a:lnB>
+                  </a:tcPr>
+                </a:tc>
+                <a:tc>
+                  <a:txBody>
+                    <a:bodyPr/>
+                    <a:lstStyle/>
+                    <a:p>
+                      <a:pPr indent="0" marL="0">
+                        <a:buNone/>
+                      </a:pPr>
+                      <a:r>
+                        <a:rPr lang="en-US" sz="1100" dirty="0">
+                          <a:solidFill>
+                            <a:srgbClr val="000000"/>
+                          </a:solidFill>
+                          <a:latin typeface="Arial" pitchFamily="34" charset="0"/>
+                          <a:ea typeface="Arial" pitchFamily="34" charset="-122"/>
+                          <a:cs typeface="Arial" pitchFamily="34" charset="-120"/>
+                        </a:rPr>
+                        <a:t>lianejamason.com</a:t>
+                      </a:r>
+                      <a:endParaRPr lang="en-US" sz="1100" dirty="0">
+                        <a:latin typeface="Arial" charset="0"/>
+                        <a:ea typeface="Arial" charset="0"/>
+                        <a:cs typeface="Arial" charset="0"/>
+                      </a:endParaRPr>
+                    </a:p>
+                  </a:txBody>
+                  <a:tcPr marL="91440" marR="91440" marT="45720" marB="45720">
+                    <a:lnL w="6350" cap="flat" cmpd="sng" algn="ctr">
+                      <a:solidFill>
+                        <a:srgbClr val="CCCCCC"/>
+                      </a:solidFill>
+                      <a:prstDash val="solid"/>
+                      <a:round/>
+                      <a:headEnd type="none" w="med" len="med"/>
+                      <a:tailEnd type="none" w="med" len="med"/>
+                    </a:lnL>
+                    <a:lnR w="6350" cap="flat" cmpd="sng" algn="ctr">
+                      <a:solidFill>
+                        <a:srgbClr val="CCCCCC"/>
+                      </a:solidFill>
+                      <a:prstDash val="solid"/>
+                      <a:round/>
+                      <a:headEnd type="none" w="med" len="med"/>
+                      <a:tailEnd type="none" w="med" len="med"/>
+                    </a:lnR>
+                    <a:lnT w="6350" cap="flat" cmpd="sng" algn="ctr">
+                      <a:solidFill>
+                        <a:srgbClr val="CCCCCC"/>
+                      </a:solidFill>
+                      <a:prstDash val="solid"/>
+                      <a:round/>
+                      <a:headEnd type="none" w="med" len="med"/>
+                      <a:tailEnd type="none" w="med" len="med"/>
+                    </a:lnT>
+                    <a:lnB w="6350" cap="flat" cmpd="sng" algn="ctr">
+                      <a:solidFill>
+                        <a:srgbClr val="CCCCCC"/>
+                      </a:solidFill>
+                      <a:prstDash val="solid"/>
+                      <a:round/>
+                      <a:headEnd type="none" w="med" len="med"/>
+                      <a:tailEnd type="none" w="med" len="med"/>
+                    </a:lnB>
+                  </a:tcPr>
+                </a:tc>
+              </a:tr>
+              <a:tr h="0">
+                <a:tc>
+                  <a:txBody>
+                    <a:bodyPr/>
+                    <a:lstStyle/>
+                    <a:p>
+                      <a:pPr indent="0" marL="0">
+                        <a:buNone/>
+                      </a:pPr>
+                      <a:r>
+                        <a:rPr lang="en-US" sz="1100" dirty="0">
+                          <a:solidFill>
+                            <a:srgbClr val="000000"/>
+                          </a:solidFill>
+                          <a:latin typeface="Arial" pitchFamily="34" charset="0"/>
+                          <a:ea typeface="Arial" pitchFamily="34" charset="-122"/>
+                          <a:cs typeface="Arial" pitchFamily="34" charset="-120"/>
+                        </a:rPr>
+                        <a:t>Corcoran Dwellings St Petersburg</a:t>
+                      </a:r>
+                      <a:endParaRPr lang="en-US" sz="1100" dirty="0">
+                        <a:latin typeface="Arial" charset="0"/>
+                        <a:ea typeface="Arial" charset="0"/>
+                        <a:cs typeface="Arial" charset="0"/>
+                      </a:endParaRPr>
+                    </a:p>
+                  </a:txBody>
+                  <a:tcPr marL="91440" marR="91440" marT="45720" marB="45720">
+                    <a:lnL w="6350" cap="flat" cmpd="sng" algn="ctr">
+                      <a:solidFill>
+                        <a:srgbClr val="CCCCCC"/>
+                      </a:solidFill>
+                      <a:prstDash val="solid"/>
+                      <a:round/>
+                      <a:headEnd type="none" w="med" len="med"/>
+                      <a:tailEnd type="none" w="med" len="med"/>
+                    </a:lnL>
+                    <a:lnR w="6350" cap="flat" cmpd="sng" algn="ctr">
+                      <a:solidFill>
+                        <a:srgbClr val="CCCCCC"/>
+                      </a:solidFill>
+                      <a:prstDash val="solid"/>
+                      <a:round/>
+                      <a:headEnd type="none" w="med" len="med"/>
+                      <a:tailEnd type="none" w="med" len="med"/>
+                    </a:lnR>
+                    <a:lnT w="6350" cap="flat" cmpd="sng" algn="ctr">
+                      <a:solidFill>
+                        <a:srgbClr val="CCCCCC"/>
+                      </a:solidFill>
+                      <a:prstDash val="solid"/>
+                      <a:round/>
+                      <a:headEnd type="none" w="med" len="med"/>
+                      <a:tailEnd type="none" w="med" len="med"/>
+                    </a:lnT>
+                    <a:lnB w="6350" cap="flat" cmpd="sng" algn="ctr">
+                      <a:solidFill>
+                        <a:srgbClr val="CCCCCC"/>
+                      </a:solidFill>
+                      <a:prstDash val="solid"/>
+                      <a:round/>
+                      <a:headEnd type="none" w="med" len="med"/>
+                      <a:tailEnd type="none" w="med" len="med"/>
+                    </a:lnB>
+                  </a:tcPr>
+                </a:tc>
+                <a:tc>
+                  <a:txBody>
+                    <a:bodyPr/>
+                    <a:lstStyle/>
+                    <a:p>
+                      <a:pPr indent="0" marL="0">
+                        <a:buNone/>
+                      </a:pPr>
+                      <a:r>
+                        <a:rPr lang="en-US" sz="1100" dirty="0">
+                          <a:solidFill>
+                            <a:srgbClr val="000000"/>
+                          </a:solidFill>
+                          <a:latin typeface="Arial" pitchFamily="34" charset="0"/>
+                          <a:ea typeface="Arial" pitchFamily="34" charset="-122"/>
+                          <a:cs typeface="Arial" pitchFamily="34" charset="-120"/>
+                        </a:rPr>
+                        <a:t>Low</a:t>
+                      </a:r>
+                      <a:endParaRPr lang="en-US" sz="1100" dirty="0">
+                        <a:latin typeface="Arial" charset="0"/>
+                        <a:ea typeface="Arial" charset="0"/>
+                        <a:cs typeface="Arial" charset="0"/>
+                      </a:endParaRPr>
+                    </a:p>
+                  </a:txBody>
+                  <a:tcPr marL="91440" marR="91440" marT="45720" marB="45720">
+                    <a:lnL w="6350" cap="flat" cmpd="sng" algn="ctr">
+                      <a:solidFill>
+                        <a:srgbClr val="CCCCCC"/>
+                      </a:solidFill>
+                      <a:prstDash val="solid"/>
+                      <a:round/>
+                      <a:headEnd type="none" w="med" len="med"/>
+                      <a:tailEnd type="none" w="med" len="med"/>
+                    </a:lnL>
+                    <a:lnR w="6350" cap="flat" cmpd="sng" algn="ctr">
+                      <a:solidFill>
+                        <a:srgbClr val="CCCCCC"/>
+                      </a:solidFill>
+                      <a:prstDash val="solid"/>
+                      <a:round/>
+                      <a:headEnd type="none" w="med" len="med"/>
+                      <a:tailEnd type="none" w="med" len="med"/>
+                    </a:lnR>
+                    <a:lnT w="6350" cap="flat" cmpd="sng" algn="ctr">
+                      <a:solidFill>
+                        <a:srgbClr val="CCCCCC"/>
+                      </a:solidFill>
+                      <a:prstDash val="solid"/>
+                      <a:round/>
+                      <a:headEnd type="none" w="med" len="med"/>
+                      <a:tailEnd type="none" w="med" len="med"/>
+                    </a:lnT>
+                    <a:lnB w="6350" cap="flat" cmpd="sng" algn="ctr">
+                      <a:solidFill>
+                        <a:srgbClr val="CCCCCC"/>
+                      </a:solidFill>
+                      <a:prstDash val="solid"/>
+                      <a:round/>
+                      <a:headEnd type="none" w="med" len="med"/>
+                      <a:tailEnd type="none" w="med" len="med"/>
+                    </a:lnB>
+                  </a:tcPr>
+                </a:tc>
+                <a:tc>
+                  <a:txBody>
+                    <a:bodyPr/>
+                    <a:lstStyle/>
+                    <a:p>
+                      <a:pPr indent="0" marL="0">
+                        <a:buNone/>
+                      </a:pPr>
+                      <a:r>
+                        <a:rPr lang="en-US" sz="1100" dirty="0">
+                          <a:solidFill>
+                            <a:srgbClr val="27AE60"/>
+                          </a:solidFill>
+                          <a:latin typeface="Arial" pitchFamily="34" charset="0"/>
+                          <a:ea typeface="Arial" pitchFamily="34" charset="-122"/>
+                          <a:cs typeface="Arial" pitchFamily="34" charset="-120"/>
+                        </a:rPr>
+                        <a:t>#4</a:t>
+                      </a:r>
+                      <a:endParaRPr lang="en-US" sz="1100" dirty="0">
+                        <a:latin typeface="Arial" charset="0"/>
+                        <a:ea typeface="Arial" charset="0"/>
+                        <a:cs typeface="Arial" charset="0"/>
+                      </a:endParaRPr>
+                    </a:p>
+                  </a:txBody>
+                  <a:tcPr marL="91440" marR="91440" marT="45720" marB="45720">
+                    <a:lnL w="6350" cap="flat" cmpd="sng" algn="ctr">
+                      <a:solidFill>
+                        <a:srgbClr val="CCCCCC"/>
+                      </a:solidFill>
+                      <a:prstDash val="solid"/>
+                      <a:round/>
+                      <a:headEnd type="none" w="med" len="med"/>
+                      <a:tailEnd type="none" w="med" len="med"/>
+                    </a:lnL>
+                    <a:lnR w="6350" cap="flat" cmpd="sng" algn="ctr">
+                      <a:solidFill>
+                        <a:srgbClr val="CCCCCC"/>
+                      </a:solidFill>
+                      <a:prstDash val="solid"/>
+                      <a:round/>
+                      <a:headEnd type="none" w="med" len="med"/>
+                      <a:tailEnd type="none" w="med" len="med"/>
+                    </a:lnR>
+                    <a:lnT w="6350" cap="flat" cmpd="sng" algn="ctr">
+                      <a:solidFill>
+                        <a:srgbClr val="CCCCCC"/>
+                      </a:solidFill>
+                      <a:prstDash val="solid"/>
+                      <a:round/>
+                      <a:headEnd type="none" w="med" len="med"/>
+                      <a:tailEnd type="none" w="med" len="med"/>
+                    </a:lnT>
+                    <a:lnB w="6350" cap="flat" cmpd="sng" algn="ctr">
+                      <a:solidFill>
+                        <a:srgbClr val="CCCCCC"/>
+                      </a:solidFill>
+                      <a:prstDash val="solid"/>
+                      <a:round/>
+                      <a:headEnd type="none" w="med" len="med"/>
+                      <a:tailEnd type="none" w="med" len="med"/>
+                    </a:lnB>
+                  </a:tcPr>
+                </a:tc>
+                <a:tc>
+                  <a:txBody>
+                    <a:bodyPr/>
+                    <a:lstStyle/>
+                    <a:p>
+                      <a:pPr indent="0" marL="0">
+                        <a:buNone/>
+                      </a:pPr>
+                      <a:r>
+                        <a:rPr lang="en-US" sz="1100" dirty="0">
+                          <a:solidFill>
+                            <a:srgbClr val="27AE60"/>
+                          </a:solidFill>
+                          <a:latin typeface="Arial" pitchFamily="34" charset="0"/>
+                          <a:ea typeface="Arial" pitchFamily="34" charset="-122"/>
+                          <a:cs typeface="Arial" pitchFamily="34" charset="-120"/>
+                        </a:rPr>
+                        <a:t>N/A</a:t>
+                      </a:r>
+                      <a:endParaRPr lang="en-US" sz="1100" dirty="0">
+                        <a:latin typeface="Arial" charset="0"/>
+                        <a:ea typeface="Arial" charset="0"/>
+                        <a:cs typeface="Arial" charset="0"/>
+                      </a:endParaRPr>
+                    </a:p>
+                  </a:txBody>
+                  <a:tcPr marL="91440" marR="91440" marT="45720" marB="45720">
+                    <a:lnL w="6350" cap="flat" cmpd="sng" algn="ctr">
+                      <a:solidFill>
+                        <a:srgbClr val="CCCCCC"/>
+                      </a:solidFill>
+                      <a:prstDash val="solid"/>
+                      <a:round/>
+                      <a:headEnd type="none" w="med" len="med"/>
+                      <a:tailEnd type="none" w="med" len="med"/>
+                    </a:lnL>
+                    <a:lnR w="6350" cap="flat" cmpd="sng" algn="ctr">
+                      <a:solidFill>
+                        <a:srgbClr val="CCCCCC"/>
+                      </a:solidFill>
+                      <a:prstDash val="solid"/>
+                      <a:round/>
+                      <a:headEnd type="none" w="med" len="med"/>
+                      <a:tailEnd type="none" w="med" len="med"/>
+                    </a:lnR>
+                    <a:lnT w="6350" cap="flat" cmpd="sng" algn="ctr">
+                      <a:solidFill>
+                        <a:srgbClr val="CCCCCC"/>
+                      </a:solidFill>
+                      <a:prstDash val="solid"/>
+                      <a:round/>
+                      <a:headEnd type="none" w="med" len="med"/>
+                      <a:tailEnd type="none" w="med" len="med"/>
+                    </a:lnT>
+                    <a:lnB w="6350" cap="flat" cmpd="sng" algn="ctr">
+                      <a:solidFill>
+                        <a:srgbClr val="CCCCCC"/>
+                      </a:solidFill>
+                      <a:prstDash val="solid"/>
+                      <a:round/>
+                      <a:headEnd type="none" w="med" len="med"/>
+                      <a:tailEnd type="none" w="med" len="med"/>
+                    </a:lnB>
+                  </a:tcPr>
+                </a:tc>
+                <a:tc>
+                  <a:txBody>
+                    <a:bodyPr/>
+                    <a:lstStyle/>
+                    <a:p>
+                      <a:pPr indent="0" marL="0">
+                        <a:buNone/>
+                      </a:pPr>
+                      <a:r>
+                        <a:rPr lang="en-US" sz="1100" dirty="0">
+                          <a:solidFill>
+                            <a:srgbClr val="000000"/>
+                          </a:solidFill>
+                          <a:latin typeface="Arial" pitchFamily="34" charset="0"/>
+                          <a:ea typeface="Arial" pitchFamily="34" charset="-122"/>
+                          <a:cs typeface="Arial" pitchFamily="34" charset="-120"/>
+                        </a:rPr>
+                        <a:t>corcoran.com</a:t>
+                      </a:r>
+                      <a:endParaRPr lang="en-US" sz="1100" dirty="0">
+                        <a:latin typeface="Arial" charset="0"/>
+                        <a:ea typeface="Arial" charset="0"/>
+                        <a:cs typeface="Arial" charset="0"/>
+                      </a:endParaRPr>
+                    </a:p>
+                  </a:txBody>
+                  <a:tcPr marL="91440" marR="91440" marT="45720" marB="45720">
+                    <a:lnL w="6350" cap="flat" cmpd="sng" algn="ctr">
+                      <a:solidFill>
+                        <a:srgbClr val="CCCCCC"/>
+                      </a:solidFill>
+                      <a:prstDash val="solid"/>
+                      <a:round/>
+                      <a:headEnd type="none" w="med" len="med"/>
+                      <a:tailEnd type="none" w="med" len="med"/>
+                    </a:lnL>
+                    <a:lnR w="6350" cap="flat" cmpd="sng" algn="ctr">
+                      <a:solidFill>
+                        <a:srgbClr val="CCCCCC"/>
+                      </a:solidFill>
+                      <a:prstDash val="solid"/>
+                      <a:round/>
+                      <a:headEnd type="none" w="med" len="med"/>
+                      <a:tailEnd type="none" w="med" len="med"/>
+                    </a:lnR>
+                    <a:lnT w="6350" cap="flat" cmpd="sng" algn="ctr">
+                      <a:solidFill>
+                        <a:srgbClr val="CCCCCC"/>
+                      </a:solidFill>
+                      <a:prstDash val="solid"/>
+                      <a:round/>
+                      <a:headEnd type="none" w="med" len="med"/>
+                      <a:tailEnd type="none" w="med" len="med"/>
+                    </a:lnT>
+                    <a:lnB w="6350" cap="flat" cmpd="sng" algn="ctr">
+                      <a:solidFill>
+                        <a:srgbClr val="CCCCCC"/>
+                      </a:solidFill>
+                      <a:prstDash val="solid"/>
+                      <a:round/>
+                      <a:headEnd type="none" w="med" len="med"/>
+                      <a:tailEnd type="none" w="med" len="med"/>
+                    </a:lnB>
+                  </a:tcPr>
+                </a:tc>
+              </a:tr>
+              <a:tr h="0">
+                <a:tc>
+                  <a:txBody>
+                    <a:bodyPr/>
+                    <a:lstStyle/>
+                    <a:p>
+                      <a:pPr indent="0" marL="0">
+                        <a:buNone/>
+                      </a:pPr>
+                      <a:r>
+                        <a:rPr lang="en-US" sz="1100" dirty="0">
+                          <a:solidFill>
+                            <a:srgbClr val="000000"/>
+                          </a:solidFill>
+                          <a:latin typeface="Arial" pitchFamily="34" charset="0"/>
+                          <a:ea typeface="Arial" pitchFamily="34" charset="-122"/>
+                          <a:cs typeface="Arial" pitchFamily="34" charset="-120"/>
+                        </a:rPr>
+                        <a:t>St Petersburg FL homes for sale</a:t>
                       </a:r>
                       <a:endParaRPr lang="en-US" sz="1100" dirty="0">
                         <a:latin typeface="Arial" charset="0"/>
@@ -13561,7 +14515,334 @@
                           <a:ea typeface="Arial" pitchFamily="34" charset="-122"/>
                           <a:cs typeface="Arial" pitchFamily="34" charset="-120"/>
                         </a:rPr>
-                        <a:t>primary keyword 2</a:t>
+                        <a:t>St Petersburg FL real estate</a:t>
+                      </a:r>
+                      <a:endParaRPr lang="en-US" sz="1100" dirty="0">
+                        <a:latin typeface="Arial" charset="0"/>
+                        <a:ea typeface="Arial" charset="0"/>
+                        <a:cs typeface="Arial" charset="0"/>
+                      </a:endParaRPr>
+                    </a:p>
+                  </a:txBody>
+                  <a:tcPr marL="91440" marR="91440" marT="45720" marB="45720">
+                    <a:lnL w="6350" cap="flat" cmpd="sng" algn="ctr">
+                      <a:solidFill>
+                        <a:srgbClr val="CCCCCC"/>
+                      </a:solidFill>
+                      <a:prstDash val="solid"/>
+                      <a:round/>
+                      <a:headEnd type="none" w="med" len="med"/>
+                      <a:tailEnd type="none" w="med" len="med"/>
+                    </a:lnL>
+                    <a:lnR w="6350" cap="flat" cmpd="sng" algn="ctr">
+                      <a:solidFill>
+                        <a:srgbClr val="CCCCCC"/>
+                      </a:solidFill>
+                      <a:prstDash val="solid"/>
+                      <a:round/>
+                      <a:headEnd type="none" w="med" len="med"/>
+                      <a:tailEnd type="none" w="med" len="med"/>
+                    </a:lnR>
+                    <a:lnT w="6350" cap="flat" cmpd="sng" algn="ctr">
+                      <a:solidFill>
+                        <a:srgbClr val="CCCCCC"/>
+                      </a:solidFill>
+                      <a:prstDash val="solid"/>
+                      <a:round/>
+                      <a:headEnd type="none" w="med" len="med"/>
+                      <a:tailEnd type="none" w="med" len="med"/>
+                    </a:lnT>
+                    <a:lnB w="6350" cap="flat" cmpd="sng" algn="ctr">
+                      <a:solidFill>
+                        <a:srgbClr val="CCCCCC"/>
+                      </a:solidFill>
+                      <a:prstDash val="solid"/>
+                      <a:round/>
+                      <a:headEnd type="none" w="med" len="med"/>
+                      <a:tailEnd type="none" w="med" len="med"/>
+                    </a:lnB>
+                  </a:tcPr>
+                </a:tc>
+                <a:tc>
+                  <a:txBody>
+                    <a:bodyPr/>
+                    <a:lstStyle/>
+                    <a:p>
+                      <a:pPr indent="0" marL="0">
+                        <a:buNone/>
+                      </a:pPr>
+                      <a:r>
+                        <a:rPr lang="en-US" sz="1100" dirty="0">
+                          <a:solidFill>
+                            <a:srgbClr val="000000"/>
+                          </a:solidFill>
+                          <a:latin typeface="Arial" pitchFamily="34" charset="0"/>
+                          <a:ea typeface="Arial" pitchFamily="34" charset="-122"/>
+                          <a:cs typeface="Arial" pitchFamily="34" charset="-120"/>
+                        </a:rPr>
+                        <a:t>Very High</a:t>
+                      </a:r>
+                      <a:endParaRPr lang="en-US" sz="1100" dirty="0">
+                        <a:latin typeface="Arial" charset="0"/>
+                        <a:ea typeface="Arial" charset="0"/>
+                        <a:cs typeface="Arial" charset="0"/>
+                      </a:endParaRPr>
+                    </a:p>
+                  </a:txBody>
+                  <a:tcPr marL="91440" marR="91440" marT="45720" marB="45720">
+                    <a:lnL w="6350" cap="flat" cmpd="sng" algn="ctr">
+                      <a:solidFill>
+                        <a:srgbClr val="CCCCCC"/>
+                      </a:solidFill>
+                      <a:prstDash val="solid"/>
+                      <a:round/>
+                      <a:headEnd type="none" w="med" len="med"/>
+                      <a:tailEnd type="none" w="med" len="med"/>
+                    </a:lnL>
+                    <a:lnR w="6350" cap="flat" cmpd="sng" algn="ctr">
+                      <a:solidFill>
+                        <a:srgbClr val="CCCCCC"/>
+                      </a:solidFill>
+                      <a:prstDash val="solid"/>
+                      <a:round/>
+                      <a:headEnd type="none" w="med" len="med"/>
+                      <a:tailEnd type="none" w="med" len="med"/>
+                    </a:lnR>
+                    <a:lnT w="6350" cap="flat" cmpd="sng" algn="ctr">
+                      <a:solidFill>
+                        <a:srgbClr val="CCCCCC"/>
+                      </a:solidFill>
+                      <a:prstDash val="solid"/>
+                      <a:round/>
+                      <a:headEnd type="none" w="med" len="med"/>
+                      <a:tailEnd type="none" w="med" len="med"/>
+                    </a:lnT>
+                    <a:lnB w="6350" cap="flat" cmpd="sng" algn="ctr">
+                      <a:solidFill>
+                        <a:srgbClr val="CCCCCC"/>
+                      </a:solidFill>
+                      <a:prstDash val="solid"/>
+                      <a:round/>
+                      <a:headEnd type="none" w="med" len="med"/>
+                      <a:tailEnd type="none" w="med" len="med"/>
+                    </a:lnB>
+                  </a:tcPr>
+                </a:tc>
+                <a:tc>
+                  <a:txBody>
+                    <a:bodyPr/>
+                    <a:lstStyle/>
+                    <a:p>
+                      <a:pPr indent="0" marL="0">
+                        <a:buNone/>
+                      </a:pPr>
+                      <a:r>
+                        <a:rPr lang="en-US" sz="1100" dirty="0">
+                          <a:solidFill>
+                            <a:srgbClr val="E74C3C"/>
+                          </a:solidFill>
+                          <a:latin typeface="Arial" pitchFamily="34" charset="0"/>
+                          <a:ea typeface="Arial" pitchFamily="34" charset="-122"/>
+                          <a:cs typeface="Arial" pitchFamily="34" charset="-120"/>
+                        </a:rPr>
+                        <a:t>Not found</a:t>
+                      </a:r>
+                      <a:endParaRPr lang="en-US" sz="1100" dirty="0">
+                        <a:latin typeface="Arial" charset="0"/>
+                        <a:ea typeface="Arial" charset="0"/>
+                        <a:cs typeface="Arial" charset="0"/>
+                      </a:endParaRPr>
+                    </a:p>
+                  </a:txBody>
+                  <a:tcPr marL="91440" marR="91440" marT="45720" marB="45720">
+                    <a:lnL w="6350" cap="flat" cmpd="sng" algn="ctr">
+                      <a:solidFill>
+                        <a:srgbClr val="CCCCCC"/>
+                      </a:solidFill>
+                      <a:prstDash val="solid"/>
+                      <a:round/>
+                      <a:headEnd type="none" w="med" len="med"/>
+                      <a:tailEnd type="none" w="med" len="med"/>
+                    </a:lnL>
+                    <a:lnR w="6350" cap="flat" cmpd="sng" algn="ctr">
+                      <a:solidFill>
+                        <a:srgbClr val="CCCCCC"/>
+                      </a:solidFill>
+                      <a:prstDash val="solid"/>
+                      <a:round/>
+                      <a:headEnd type="none" w="med" len="med"/>
+                      <a:tailEnd type="none" w="med" len="med"/>
+                    </a:lnR>
+                    <a:lnT w="6350" cap="flat" cmpd="sng" algn="ctr">
+                      <a:solidFill>
+                        <a:srgbClr val="CCCCCC"/>
+                      </a:solidFill>
+                      <a:prstDash val="solid"/>
+                      <a:round/>
+                      <a:headEnd type="none" w="med" len="med"/>
+                      <a:tailEnd type="none" w="med" len="med"/>
+                    </a:lnT>
+                    <a:lnB w="6350" cap="flat" cmpd="sng" algn="ctr">
+                      <a:solidFill>
+                        <a:srgbClr val="CCCCCC"/>
+                      </a:solidFill>
+                      <a:prstDash val="solid"/>
+                      <a:round/>
+                      <a:headEnd type="none" w="med" len="med"/>
+                      <a:tailEnd type="none" w="med" len="med"/>
+                    </a:lnB>
+                  </a:tcPr>
+                </a:tc>
+                <a:tc>
+                  <a:txBody>
+                    <a:bodyPr/>
+                    <a:lstStyle/>
+                    <a:p>
+                      <a:pPr indent="0" marL="0">
+                        <a:buNone/>
+                      </a:pPr>
+                      <a:r>
+                        <a:rPr lang="en-US" sz="1100" dirty="0">
+                          <a:solidFill>
+                            <a:srgbClr val="000000"/>
+                          </a:solidFill>
+                          <a:latin typeface="Arial" pitchFamily="34" charset="0"/>
+                          <a:ea typeface="Arial" pitchFamily="34" charset="-122"/>
+                          <a:cs typeface="Arial" pitchFamily="34" charset="-120"/>
+                        </a:rPr>
+                        <a:t>Not found</a:t>
+                      </a:r>
+                      <a:endParaRPr lang="en-US" sz="1100" dirty="0">
+                        <a:latin typeface="Arial" charset="0"/>
+                        <a:ea typeface="Arial" charset="0"/>
+                        <a:cs typeface="Arial" charset="0"/>
+                      </a:endParaRPr>
+                    </a:p>
+                  </a:txBody>
+                  <a:tcPr marL="91440" marR="91440" marT="45720" marB="45720">
+                    <a:lnL w="6350" cap="flat" cmpd="sng" algn="ctr">
+                      <a:solidFill>
+                        <a:srgbClr val="CCCCCC"/>
+                      </a:solidFill>
+                      <a:prstDash val="solid"/>
+                      <a:round/>
+                      <a:headEnd type="none" w="med" len="med"/>
+                      <a:tailEnd type="none" w="med" len="med"/>
+                    </a:lnL>
+                    <a:lnR w="6350" cap="flat" cmpd="sng" algn="ctr">
+                      <a:solidFill>
+                        <a:srgbClr val="CCCCCC"/>
+                      </a:solidFill>
+                      <a:prstDash val="solid"/>
+                      <a:round/>
+                      <a:headEnd type="none" w="med" len="med"/>
+                      <a:tailEnd type="none" w="med" len="med"/>
+                    </a:lnR>
+                    <a:lnT w="6350" cap="flat" cmpd="sng" algn="ctr">
+                      <a:solidFill>
+                        <a:srgbClr val="CCCCCC"/>
+                      </a:solidFill>
+                      <a:prstDash val="solid"/>
+                      <a:round/>
+                      <a:headEnd type="none" w="med" len="med"/>
+                      <a:tailEnd type="none" w="med" len="med"/>
+                    </a:lnT>
+                    <a:lnB w="6350" cap="flat" cmpd="sng" algn="ctr">
+                      <a:solidFill>
+                        <a:srgbClr val="CCCCCC"/>
+                      </a:solidFill>
+                      <a:prstDash val="solid"/>
+                      <a:round/>
+                      <a:headEnd type="none" w="med" len="med"/>
+                      <a:tailEnd type="none" w="med" len="med"/>
+                    </a:lnB>
+                  </a:tcPr>
+                </a:tc>
+                <a:tc>
+                  <a:txBody>
+                    <a:bodyPr/>
+                    <a:lstStyle/>
+                    <a:p>
+                      <a:pPr indent="0" marL="0">
+                        <a:buNone/>
+                      </a:pPr>
+                      <a:r>
+                        <a:rPr lang="en-US" sz="1100" dirty="0">
+                          <a:solidFill>
+                            <a:srgbClr val="000000"/>
+                          </a:solidFill>
+                          <a:latin typeface="Arial" pitchFamily="34" charset="0"/>
+                          <a:ea typeface="Arial" pitchFamily="34" charset="-122"/>
+                          <a:cs typeface="Arial" pitchFamily="34" charset="-120"/>
+                        </a:rPr>
+                        <a:t>zillow.com</a:t>
+                      </a:r>
+                      <a:endParaRPr lang="en-US" sz="1100" dirty="0">
+                        <a:latin typeface="Arial" charset="0"/>
+                        <a:ea typeface="Arial" charset="0"/>
+                        <a:cs typeface="Arial" charset="0"/>
+                      </a:endParaRPr>
+                    </a:p>
+                  </a:txBody>
+                  <a:tcPr marL="91440" marR="91440" marT="45720" marB="45720">
+                    <a:lnL w="6350" cap="flat" cmpd="sng" algn="ctr">
+                      <a:solidFill>
+                        <a:srgbClr val="CCCCCC"/>
+                      </a:solidFill>
+                      <a:prstDash val="solid"/>
+                      <a:round/>
+                      <a:headEnd type="none" w="med" len="med"/>
+                      <a:tailEnd type="none" w="med" len="med"/>
+                    </a:lnL>
+                    <a:lnR w="6350" cap="flat" cmpd="sng" algn="ctr">
+                      <a:solidFill>
+                        <a:srgbClr val="CCCCCC"/>
+                      </a:solidFill>
+                      <a:prstDash val="solid"/>
+                      <a:round/>
+                      <a:headEnd type="none" w="med" len="med"/>
+                      <a:tailEnd type="none" w="med" len="med"/>
+                    </a:lnR>
+                    <a:lnT w="6350" cap="flat" cmpd="sng" algn="ctr">
+                      <a:solidFill>
+                        <a:srgbClr val="CCCCCC"/>
+                      </a:solidFill>
+                      <a:prstDash val="solid"/>
+                      <a:round/>
+                      <a:headEnd type="none" w="med" len="med"/>
+                      <a:tailEnd type="none" w="med" len="med"/>
+                    </a:lnT>
+                    <a:lnB w="6350" cap="flat" cmpd="sng" algn="ctr">
+                      <a:solidFill>
+                        <a:srgbClr val="CCCCCC"/>
+                      </a:solidFill>
+                      <a:prstDash val="solid"/>
+                      <a:round/>
+                      <a:headEnd type="none" w="med" len="med"/>
+                      <a:tailEnd type="none" w="med" len="med"/>
+                    </a:lnB>
+                  </a:tcPr>
+                </a:tc>
+              </a:tr>
+              <a:tr h="0">
+                <a:tc>
+                  <a:txBody>
+                    <a:bodyPr/>
+                    <a:lstStyle/>
+                    <a:p>
+                      <a:pPr indent="0" marL="0">
+                        <a:buNone/>
+                      </a:pPr>
+                      <a:r>
+                        <a:rPr lang="en-US" sz="1100" dirty="0">
+                          <a:solidFill>
+                            <a:srgbClr val="000000"/>
+                          </a:solidFill>
+                          <a:latin typeface="Arial" pitchFamily="34" charset="0"/>
+                          <a:ea typeface="Arial" pitchFamily="34" charset="-122"/>
+                          <a:cs typeface="Arial" pitchFamily="34" charset="-120"/>
+                        </a:rPr>
+                        <a:t>Tampa Bay waterfront homes for sale</a:t>
                       </a:r>
                       <a:endParaRPr lang="en-US" sz="1100" dirty="0">
                         <a:latin typeface="Arial" charset="0"/>
@@ -13750,13 +15031,13 @@
                       <a:r>
                         <a:rPr lang="en-US" sz="1100" dirty="0">
                           <a:solidFill>
-                            <a:srgbClr val="27AE60"/>
+                            <a:srgbClr val="000000"/>
                           </a:solidFill>
                           <a:latin typeface="Arial" pitchFamily="34" charset="0"/>
                           <a:ea typeface="Arial" pitchFamily="34" charset="-122"/>
                           <a:cs typeface="Arial" pitchFamily="34" charset="-120"/>
                         </a:rPr>
-                        <a:t>#6</a:t>
+                        <a:t>Not found</a:t>
                       </a:r>
                       <a:endParaRPr lang="en-US" sz="1100" dirty="0">
                         <a:latin typeface="Arial" charset="0"/>
@@ -13821,7 +15102,7 @@
                           <a:ea typeface="Arial" pitchFamily="34" charset="-122"/>
                           <a:cs typeface="Arial" pitchFamily="34" charset="-120"/>
                         </a:rPr>
-                        <a:t>example.com</a:t>
+                        <a:t>zillow.com</a:t>
                       </a:r>
                       <a:endParaRPr lang="en-US" sz="1100" dirty="0">
                         <a:latin typeface="Arial" charset="0"/>
@@ -13888,7 +15169,7 @@
                           <a:ea typeface="Arial" pitchFamily="34" charset="-122"/>
                           <a:cs typeface="Arial" pitchFamily="34" charset="-120"/>
                         </a:rPr>
-                        <a:t>primary keyword 3</a:t>
+                        <a:t>St Pete Beach homes for sale</a:t>
                       </a:r>
                       <a:endParaRPr lang="en-US" sz="1100" dirty="0">
                         <a:latin typeface="Arial" charset="0"/>
@@ -14148,7 +15429,7 @@
                           <a:ea typeface="Arial" pitchFamily="34" charset="-122"/>
                           <a:cs typeface="Arial" pitchFamily="34" charset="-120"/>
                         </a:rPr>
-                        <a:t>example.com</a:t>
+                        <a:t>zillow.com</a:t>
                       </a:r>
                       <a:endParaRPr lang="en-US" sz="1100" dirty="0">
                         <a:latin typeface="Arial" charset="0"/>
@@ -14215,7 +15496,334 @@
                           <a:ea typeface="Arial" pitchFamily="34" charset="-122"/>
                           <a:cs typeface="Arial" pitchFamily="34" charset="-120"/>
                         </a:rPr>
-                        <a:t>primary keyword 4</a:t>
+                        <a:t>Pinellas County real estate</a:t>
+                      </a:r>
+                      <a:endParaRPr lang="en-US" sz="1100" dirty="0">
+                        <a:latin typeface="Arial" charset="0"/>
+                        <a:ea typeface="Arial" charset="0"/>
+                        <a:cs typeface="Arial" charset="0"/>
+                      </a:endParaRPr>
+                    </a:p>
+                  </a:txBody>
+                  <a:tcPr marL="91440" marR="91440" marT="45720" marB="45720">
+                    <a:lnL w="6350" cap="flat" cmpd="sng" algn="ctr">
+                      <a:solidFill>
+                        <a:srgbClr val="CCCCCC"/>
+                      </a:solidFill>
+                      <a:prstDash val="solid"/>
+                      <a:round/>
+                      <a:headEnd type="none" w="med" len="med"/>
+                      <a:tailEnd type="none" w="med" len="med"/>
+                    </a:lnL>
+                    <a:lnR w="6350" cap="flat" cmpd="sng" algn="ctr">
+                      <a:solidFill>
+                        <a:srgbClr val="CCCCCC"/>
+                      </a:solidFill>
+                      <a:prstDash val="solid"/>
+                      <a:round/>
+                      <a:headEnd type="none" w="med" len="med"/>
+                      <a:tailEnd type="none" w="med" len="med"/>
+                    </a:lnR>
+                    <a:lnT w="6350" cap="flat" cmpd="sng" algn="ctr">
+                      <a:solidFill>
+                        <a:srgbClr val="CCCCCC"/>
+                      </a:solidFill>
+                      <a:prstDash val="solid"/>
+                      <a:round/>
+                      <a:headEnd type="none" w="med" len="med"/>
+                      <a:tailEnd type="none" w="med" len="med"/>
+                    </a:lnT>
+                    <a:lnB w="6350" cap="flat" cmpd="sng" algn="ctr">
+                      <a:solidFill>
+                        <a:srgbClr val="CCCCCC"/>
+                      </a:solidFill>
+                      <a:prstDash val="solid"/>
+                      <a:round/>
+                      <a:headEnd type="none" w="med" len="med"/>
+                      <a:tailEnd type="none" w="med" len="med"/>
+                    </a:lnB>
+                  </a:tcPr>
+                </a:tc>
+                <a:tc>
+                  <a:txBody>
+                    <a:bodyPr/>
+                    <a:lstStyle/>
+                    <a:p>
+                      <a:pPr indent="0" marL="0">
+                        <a:buNone/>
+                      </a:pPr>
+                      <a:r>
+                        <a:rPr lang="en-US" sz="1100" dirty="0">
+                          <a:solidFill>
+                            <a:srgbClr val="000000"/>
+                          </a:solidFill>
+                          <a:latin typeface="Arial" pitchFamily="34" charset="0"/>
+                          <a:ea typeface="Arial" pitchFamily="34" charset="-122"/>
+                          <a:cs typeface="Arial" pitchFamily="34" charset="-120"/>
+                        </a:rPr>
+                        <a:t>High</a:t>
+                      </a:r>
+                      <a:endParaRPr lang="en-US" sz="1100" dirty="0">
+                        <a:latin typeface="Arial" charset="0"/>
+                        <a:ea typeface="Arial" charset="0"/>
+                        <a:cs typeface="Arial" charset="0"/>
+                      </a:endParaRPr>
+                    </a:p>
+                  </a:txBody>
+                  <a:tcPr marL="91440" marR="91440" marT="45720" marB="45720">
+                    <a:lnL w="6350" cap="flat" cmpd="sng" algn="ctr">
+                      <a:solidFill>
+                        <a:srgbClr val="CCCCCC"/>
+                      </a:solidFill>
+                      <a:prstDash val="solid"/>
+                      <a:round/>
+                      <a:headEnd type="none" w="med" len="med"/>
+                      <a:tailEnd type="none" w="med" len="med"/>
+                    </a:lnL>
+                    <a:lnR w="6350" cap="flat" cmpd="sng" algn="ctr">
+                      <a:solidFill>
+                        <a:srgbClr val="CCCCCC"/>
+                      </a:solidFill>
+                      <a:prstDash val="solid"/>
+                      <a:round/>
+                      <a:headEnd type="none" w="med" len="med"/>
+                      <a:tailEnd type="none" w="med" len="med"/>
+                    </a:lnR>
+                    <a:lnT w="6350" cap="flat" cmpd="sng" algn="ctr">
+                      <a:solidFill>
+                        <a:srgbClr val="CCCCCC"/>
+                      </a:solidFill>
+                      <a:prstDash val="solid"/>
+                      <a:round/>
+                      <a:headEnd type="none" w="med" len="med"/>
+                      <a:tailEnd type="none" w="med" len="med"/>
+                    </a:lnT>
+                    <a:lnB w="6350" cap="flat" cmpd="sng" algn="ctr">
+                      <a:solidFill>
+                        <a:srgbClr val="CCCCCC"/>
+                      </a:solidFill>
+                      <a:prstDash val="solid"/>
+                      <a:round/>
+                      <a:headEnd type="none" w="med" len="med"/>
+                      <a:tailEnd type="none" w="med" len="med"/>
+                    </a:lnB>
+                  </a:tcPr>
+                </a:tc>
+                <a:tc>
+                  <a:txBody>
+                    <a:bodyPr/>
+                    <a:lstStyle/>
+                    <a:p>
+                      <a:pPr indent="0" marL="0">
+                        <a:buNone/>
+                      </a:pPr>
+                      <a:r>
+                        <a:rPr lang="en-US" sz="1100" dirty="0">
+                          <a:solidFill>
+                            <a:srgbClr val="E74C3C"/>
+                          </a:solidFill>
+                          <a:latin typeface="Arial" pitchFamily="34" charset="0"/>
+                          <a:ea typeface="Arial" pitchFamily="34" charset="-122"/>
+                          <a:cs typeface="Arial" pitchFamily="34" charset="-120"/>
+                        </a:rPr>
+                        <a:t>Not found</a:t>
+                      </a:r>
+                      <a:endParaRPr lang="en-US" sz="1100" dirty="0">
+                        <a:latin typeface="Arial" charset="0"/>
+                        <a:ea typeface="Arial" charset="0"/>
+                        <a:cs typeface="Arial" charset="0"/>
+                      </a:endParaRPr>
+                    </a:p>
+                  </a:txBody>
+                  <a:tcPr marL="91440" marR="91440" marT="45720" marB="45720">
+                    <a:lnL w="6350" cap="flat" cmpd="sng" algn="ctr">
+                      <a:solidFill>
+                        <a:srgbClr val="CCCCCC"/>
+                      </a:solidFill>
+                      <a:prstDash val="solid"/>
+                      <a:round/>
+                      <a:headEnd type="none" w="med" len="med"/>
+                      <a:tailEnd type="none" w="med" len="med"/>
+                    </a:lnL>
+                    <a:lnR w="6350" cap="flat" cmpd="sng" algn="ctr">
+                      <a:solidFill>
+                        <a:srgbClr val="CCCCCC"/>
+                      </a:solidFill>
+                      <a:prstDash val="solid"/>
+                      <a:round/>
+                      <a:headEnd type="none" w="med" len="med"/>
+                      <a:tailEnd type="none" w="med" len="med"/>
+                    </a:lnR>
+                    <a:lnT w="6350" cap="flat" cmpd="sng" algn="ctr">
+                      <a:solidFill>
+                        <a:srgbClr val="CCCCCC"/>
+                      </a:solidFill>
+                      <a:prstDash val="solid"/>
+                      <a:round/>
+                      <a:headEnd type="none" w="med" len="med"/>
+                      <a:tailEnd type="none" w="med" len="med"/>
+                    </a:lnT>
+                    <a:lnB w="6350" cap="flat" cmpd="sng" algn="ctr">
+                      <a:solidFill>
+                        <a:srgbClr val="CCCCCC"/>
+                      </a:solidFill>
+                      <a:prstDash val="solid"/>
+                      <a:round/>
+                      <a:headEnd type="none" w="med" len="med"/>
+                      <a:tailEnd type="none" w="med" len="med"/>
+                    </a:lnB>
+                  </a:tcPr>
+                </a:tc>
+                <a:tc>
+                  <a:txBody>
+                    <a:bodyPr/>
+                    <a:lstStyle/>
+                    <a:p>
+                      <a:pPr indent="0" marL="0">
+                        <a:buNone/>
+                      </a:pPr>
+                      <a:r>
+                        <a:rPr lang="en-US" sz="1100" dirty="0">
+                          <a:solidFill>
+                            <a:srgbClr val="000000"/>
+                          </a:solidFill>
+                          <a:latin typeface="Arial" pitchFamily="34" charset="0"/>
+                          <a:ea typeface="Arial" pitchFamily="34" charset="-122"/>
+                          <a:cs typeface="Arial" pitchFamily="34" charset="-120"/>
+                        </a:rPr>
+                        <a:t>Not found</a:t>
+                      </a:r>
+                      <a:endParaRPr lang="en-US" sz="1100" dirty="0">
+                        <a:latin typeface="Arial" charset="0"/>
+                        <a:ea typeface="Arial" charset="0"/>
+                        <a:cs typeface="Arial" charset="0"/>
+                      </a:endParaRPr>
+                    </a:p>
+                  </a:txBody>
+                  <a:tcPr marL="91440" marR="91440" marT="45720" marB="45720">
+                    <a:lnL w="6350" cap="flat" cmpd="sng" algn="ctr">
+                      <a:solidFill>
+                        <a:srgbClr val="CCCCCC"/>
+                      </a:solidFill>
+                      <a:prstDash val="solid"/>
+                      <a:round/>
+                      <a:headEnd type="none" w="med" len="med"/>
+                      <a:tailEnd type="none" w="med" len="med"/>
+                    </a:lnL>
+                    <a:lnR w="6350" cap="flat" cmpd="sng" algn="ctr">
+                      <a:solidFill>
+                        <a:srgbClr val="CCCCCC"/>
+                      </a:solidFill>
+                      <a:prstDash val="solid"/>
+                      <a:round/>
+                      <a:headEnd type="none" w="med" len="med"/>
+                      <a:tailEnd type="none" w="med" len="med"/>
+                    </a:lnR>
+                    <a:lnT w="6350" cap="flat" cmpd="sng" algn="ctr">
+                      <a:solidFill>
+                        <a:srgbClr val="CCCCCC"/>
+                      </a:solidFill>
+                      <a:prstDash val="solid"/>
+                      <a:round/>
+                      <a:headEnd type="none" w="med" len="med"/>
+                      <a:tailEnd type="none" w="med" len="med"/>
+                    </a:lnT>
+                    <a:lnB w="6350" cap="flat" cmpd="sng" algn="ctr">
+                      <a:solidFill>
+                        <a:srgbClr val="CCCCCC"/>
+                      </a:solidFill>
+                      <a:prstDash val="solid"/>
+                      <a:round/>
+                      <a:headEnd type="none" w="med" len="med"/>
+                      <a:tailEnd type="none" w="med" len="med"/>
+                    </a:lnB>
+                  </a:tcPr>
+                </a:tc>
+                <a:tc>
+                  <a:txBody>
+                    <a:bodyPr/>
+                    <a:lstStyle/>
+                    <a:p>
+                      <a:pPr indent="0" marL="0">
+                        <a:buNone/>
+                      </a:pPr>
+                      <a:r>
+                        <a:rPr lang="en-US" sz="1100" dirty="0">
+                          <a:solidFill>
+                            <a:srgbClr val="000000"/>
+                          </a:solidFill>
+                          <a:latin typeface="Arial" pitchFamily="34" charset="0"/>
+                          <a:ea typeface="Arial" pitchFamily="34" charset="-122"/>
+                          <a:cs typeface="Arial" pitchFamily="34" charset="-120"/>
+                        </a:rPr>
+                        <a:t>zillow.com</a:t>
+                      </a:r>
+                      <a:endParaRPr lang="en-US" sz="1100" dirty="0">
+                        <a:latin typeface="Arial" charset="0"/>
+                        <a:ea typeface="Arial" charset="0"/>
+                        <a:cs typeface="Arial" charset="0"/>
+                      </a:endParaRPr>
+                    </a:p>
+                  </a:txBody>
+                  <a:tcPr marL="91440" marR="91440" marT="45720" marB="45720">
+                    <a:lnL w="6350" cap="flat" cmpd="sng" algn="ctr">
+                      <a:solidFill>
+                        <a:srgbClr val="CCCCCC"/>
+                      </a:solidFill>
+                      <a:prstDash val="solid"/>
+                      <a:round/>
+                      <a:headEnd type="none" w="med" len="med"/>
+                      <a:tailEnd type="none" w="med" len="med"/>
+                    </a:lnL>
+                    <a:lnR w="6350" cap="flat" cmpd="sng" algn="ctr">
+                      <a:solidFill>
+                        <a:srgbClr val="CCCCCC"/>
+                      </a:solidFill>
+                      <a:prstDash val="solid"/>
+                      <a:round/>
+                      <a:headEnd type="none" w="med" len="med"/>
+                      <a:tailEnd type="none" w="med" len="med"/>
+                    </a:lnR>
+                    <a:lnT w="6350" cap="flat" cmpd="sng" algn="ctr">
+                      <a:solidFill>
+                        <a:srgbClr val="CCCCCC"/>
+                      </a:solidFill>
+                      <a:prstDash val="solid"/>
+                      <a:round/>
+                      <a:headEnd type="none" w="med" len="med"/>
+                      <a:tailEnd type="none" w="med" len="med"/>
+                    </a:lnT>
+                    <a:lnB w="6350" cap="flat" cmpd="sng" algn="ctr">
+                      <a:solidFill>
+                        <a:srgbClr val="CCCCCC"/>
+                      </a:solidFill>
+                      <a:prstDash val="solid"/>
+                      <a:round/>
+                      <a:headEnd type="none" w="med" len="med"/>
+                      <a:tailEnd type="none" w="med" len="med"/>
+                    </a:lnB>
+                  </a:tcPr>
+                </a:tc>
+              </a:tr>
+              <a:tr h="0">
+                <a:tc>
+                  <a:txBody>
+                    <a:bodyPr/>
+                    <a:lstStyle/>
+                    <a:p>
+                      <a:pPr indent="0" marL="0">
+                        <a:buNone/>
+                      </a:pPr>
+                      <a:r>
+                        <a:rPr lang="en-US" sz="1100" dirty="0">
+                          <a:solidFill>
+                            <a:srgbClr val="000000"/>
+                          </a:solidFill>
+                          <a:latin typeface="Arial" pitchFamily="34" charset="0"/>
+                          <a:ea typeface="Arial" pitchFamily="34" charset="-122"/>
+                          <a:cs typeface="Arial" pitchFamily="34" charset="-120"/>
+                        </a:rPr>
+                        <a:t>Shore Acres St Petersburg homes for sale</a:t>
                       </a:r>
                       <a:endParaRPr lang="en-US" sz="1100" dirty="0">
                         <a:latin typeface="Arial" charset="0"/>
@@ -14475,334 +16083,7 @@
                           <a:ea typeface="Arial" pitchFamily="34" charset="-122"/>
                           <a:cs typeface="Arial" pitchFamily="34" charset="-120"/>
                         </a:rPr>
-                        <a:t>example.com</a:t>
-                      </a:r>
-                      <a:endParaRPr lang="en-US" sz="1100" dirty="0">
-                        <a:latin typeface="Arial" charset="0"/>
-                        <a:ea typeface="Arial" charset="0"/>
-                        <a:cs typeface="Arial" charset="0"/>
-                      </a:endParaRPr>
-                    </a:p>
-                  </a:txBody>
-                  <a:tcPr marL="91440" marR="91440" marT="45720" marB="45720">
-                    <a:lnL w="6350" cap="flat" cmpd="sng" algn="ctr">
-                      <a:solidFill>
-                        <a:srgbClr val="CCCCCC"/>
-                      </a:solidFill>
-                      <a:prstDash val="solid"/>
-                      <a:round/>
-                      <a:headEnd type="none" w="med" len="med"/>
-                      <a:tailEnd type="none" w="med" len="med"/>
-                    </a:lnL>
-                    <a:lnR w="6350" cap="flat" cmpd="sng" algn="ctr">
-                      <a:solidFill>
-                        <a:srgbClr val="CCCCCC"/>
-                      </a:solidFill>
-                      <a:prstDash val="solid"/>
-                      <a:round/>
-                      <a:headEnd type="none" w="med" len="med"/>
-                      <a:tailEnd type="none" w="med" len="med"/>
-                    </a:lnR>
-                    <a:lnT w="6350" cap="flat" cmpd="sng" algn="ctr">
-                      <a:solidFill>
-                        <a:srgbClr val="CCCCCC"/>
-                      </a:solidFill>
-                      <a:prstDash val="solid"/>
-                      <a:round/>
-                      <a:headEnd type="none" w="med" len="med"/>
-                      <a:tailEnd type="none" w="med" len="med"/>
-                    </a:lnT>
-                    <a:lnB w="6350" cap="flat" cmpd="sng" algn="ctr">
-                      <a:solidFill>
-                        <a:srgbClr val="CCCCCC"/>
-                      </a:solidFill>
-                      <a:prstDash val="solid"/>
-                      <a:round/>
-                      <a:headEnd type="none" w="med" len="med"/>
-                      <a:tailEnd type="none" w="med" len="med"/>
-                    </a:lnB>
-                  </a:tcPr>
-                </a:tc>
-              </a:tr>
-              <a:tr h="0">
-                <a:tc>
-                  <a:txBody>
-                    <a:bodyPr/>
-                    <a:lstStyle/>
-                    <a:p>
-                      <a:pPr indent="0" marL="0">
-                        <a:buNone/>
-                      </a:pPr>
-                      <a:r>
-                        <a:rPr lang="en-US" sz="1100" dirty="0">
-                          <a:solidFill>
-                            <a:srgbClr val="000000"/>
-                          </a:solidFill>
-                          <a:latin typeface="Arial" pitchFamily="34" charset="0"/>
-                          <a:ea typeface="Arial" pitchFamily="34" charset="-122"/>
-                          <a:cs typeface="Arial" pitchFamily="34" charset="-120"/>
-                        </a:rPr>
-                        <a:t>primary keyword 5</a:t>
-                      </a:r>
-                      <a:endParaRPr lang="en-US" sz="1100" dirty="0">
-                        <a:latin typeface="Arial" charset="0"/>
-                        <a:ea typeface="Arial" charset="0"/>
-                        <a:cs typeface="Arial" charset="0"/>
-                      </a:endParaRPr>
-                    </a:p>
-                  </a:txBody>
-                  <a:tcPr marL="91440" marR="91440" marT="45720" marB="45720">
-                    <a:lnL w="6350" cap="flat" cmpd="sng" algn="ctr">
-                      <a:solidFill>
-                        <a:srgbClr val="CCCCCC"/>
-                      </a:solidFill>
-                      <a:prstDash val="solid"/>
-                      <a:round/>
-                      <a:headEnd type="none" w="med" len="med"/>
-                      <a:tailEnd type="none" w="med" len="med"/>
-                    </a:lnL>
-                    <a:lnR w="6350" cap="flat" cmpd="sng" algn="ctr">
-                      <a:solidFill>
-                        <a:srgbClr val="CCCCCC"/>
-                      </a:solidFill>
-                      <a:prstDash val="solid"/>
-                      <a:round/>
-                      <a:headEnd type="none" w="med" len="med"/>
-                      <a:tailEnd type="none" w="med" len="med"/>
-                    </a:lnR>
-                    <a:lnT w="6350" cap="flat" cmpd="sng" algn="ctr">
-                      <a:solidFill>
-                        <a:srgbClr val="CCCCCC"/>
-                      </a:solidFill>
-                      <a:prstDash val="solid"/>
-                      <a:round/>
-                      <a:headEnd type="none" w="med" len="med"/>
-                      <a:tailEnd type="none" w="med" len="med"/>
-                    </a:lnT>
-                    <a:lnB w="6350" cap="flat" cmpd="sng" algn="ctr">
-                      <a:solidFill>
-                        <a:srgbClr val="CCCCCC"/>
-                      </a:solidFill>
-                      <a:prstDash val="solid"/>
-                      <a:round/>
-                      <a:headEnd type="none" w="med" len="med"/>
-                      <a:tailEnd type="none" w="med" len="med"/>
-                    </a:lnB>
-                  </a:tcPr>
-                </a:tc>
-                <a:tc>
-                  <a:txBody>
-                    <a:bodyPr/>
-                    <a:lstStyle/>
-                    <a:p>
-                      <a:pPr indent="0" marL="0">
-                        <a:buNone/>
-                      </a:pPr>
-                      <a:r>
-                        <a:rPr lang="en-US" sz="1100" dirty="0">
-                          <a:solidFill>
-                            <a:srgbClr val="000000"/>
-                          </a:solidFill>
-                          <a:latin typeface="Arial" pitchFamily="34" charset="0"/>
-                          <a:ea typeface="Arial" pitchFamily="34" charset="-122"/>
-                          <a:cs typeface="Arial" pitchFamily="34" charset="-120"/>
-                        </a:rPr>
-                        <a:t>Medium</a:t>
-                      </a:r>
-                      <a:endParaRPr lang="en-US" sz="1100" dirty="0">
-                        <a:latin typeface="Arial" charset="0"/>
-                        <a:ea typeface="Arial" charset="0"/>
-                        <a:cs typeface="Arial" charset="0"/>
-                      </a:endParaRPr>
-                    </a:p>
-                  </a:txBody>
-                  <a:tcPr marL="91440" marR="91440" marT="45720" marB="45720">
-                    <a:lnL w="6350" cap="flat" cmpd="sng" algn="ctr">
-                      <a:solidFill>
-                        <a:srgbClr val="CCCCCC"/>
-                      </a:solidFill>
-                      <a:prstDash val="solid"/>
-                      <a:round/>
-                      <a:headEnd type="none" w="med" len="med"/>
-                      <a:tailEnd type="none" w="med" len="med"/>
-                    </a:lnL>
-                    <a:lnR w="6350" cap="flat" cmpd="sng" algn="ctr">
-                      <a:solidFill>
-                        <a:srgbClr val="CCCCCC"/>
-                      </a:solidFill>
-                      <a:prstDash val="solid"/>
-                      <a:round/>
-                      <a:headEnd type="none" w="med" len="med"/>
-                      <a:tailEnd type="none" w="med" len="med"/>
-                    </a:lnR>
-                    <a:lnT w="6350" cap="flat" cmpd="sng" algn="ctr">
-                      <a:solidFill>
-                        <a:srgbClr val="CCCCCC"/>
-                      </a:solidFill>
-                      <a:prstDash val="solid"/>
-                      <a:round/>
-                      <a:headEnd type="none" w="med" len="med"/>
-                      <a:tailEnd type="none" w="med" len="med"/>
-                    </a:lnT>
-                    <a:lnB w="6350" cap="flat" cmpd="sng" algn="ctr">
-                      <a:solidFill>
-                        <a:srgbClr val="CCCCCC"/>
-                      </a:solidFill>
-                      <a:prstDash val="solid"/>
-                      <a:round/>
-                      <a:headEnd type="none" w="med" len="med"/>
-                      <a:tailEnd type="none" w="med" len="med"/>
-                    </a:lnB>
-                  </a:tcPr>
-                </a:tc>
-                <a:tc>
-                  <a:txBody>
-                    <a:bodyPr/>
-                    <a:lstStyle/>
-                    <a:p>
-                      <a:pPr indent="0" marL="0">
-                        <a:buNone/>
-                      </a:pPr>
-                      <a:r>
-                        <a:rPr lang="en-US" sz="1100" dirty="0">
-                          <a:solidFill>
-                            <a:srgbClr val="E74C3C"/>
-                          </a:solidFill>
-                          <a:latin typeface="Arial" pitchFamily="34" charset="0"/>
-                          <a:ea typeface="Arial" pitchFamily="34" charset="-122"/>
-                          <a:cs typeface="Arial" pitchFamily="34" charset="-120"/>
-                        </a:rPr>
-                        <a:t>Not found</a:t>
-                      </a:r>
-                      <a:endParaRPr lang="en-US" sz="1100" dirty="0">
-                        <a:latin typeface="Arial" charset="0"/>
-                        <a:ea typeface="Arial" charset="0"/>
-                        <a:cs typeface="Arial" charset="0"/>
-                      </a:endParaRPr>
-                    </a:p>
-                  </a:txBody>
-                  <a:tcPr marL="91440" marR="91440" marT="45720" marB="45720">
-                    <a:lnL w="6350" cap="flat" cmpd="sng" algn="ctr">
-                      <a:solidFill>
-                        <a:srgbClr val="CCCCCC"/>
-                      </a:solidFill>
-                      <a:prstDash val="solid"/>
-                      <a:round/>
-                      <a:headEnd type="none" w="med" len="med"/>
-                      <a:tailEnd type="none" w="med" len="med"/>
-                    </a:lnL>
-                    <a:lnR w="6350" cap="flat" cmpd="sng" algn="ctr">
-                      <a:solidFill>
-                        <a:srgbClr val="CCCCCC"/>
-                      </a:solidFill>
-                      <a:prstDash val="solid"/>
-                      <a:round/>
-                      <a:headEnd type="none" w="med" len="med"/>
-                      <a:tailEnd type="none" w="med" len="med"/>
-                    </a:lnR>
-                    <a:lnT w="6350" cap="flat" cmpd="sng" algn="ctr">
-                      <a:solidFill>
-                        <a:srgbClr val="CCCCCC"/>
-                      </a:solidFill>
-                      <a:prstDash val="solid"/>
-                      <a:round/>
-                      <a:headEnd type="none" w="med" len="med"/>
-                      <a:tailEnd type="none" w="med" len="med"/>
-                    </a:lnT>
-                    <a:lnB w="6350" cap="flat" cmpd="sng" algn="ctr">
-                      <a:solidFill>
-                        <a:srgbClr val="CCCCCC"/>
-                      </a:solidFill>
-                      <a:prstDash val="solid"/>
-                      <a:round/>
-                      <a:headEnd type="none" w="med" len="med"/>
-                      <a:tailEnd type="none" w="med" len="med"/>
-                    </a:lnB>
-                  </a:tcPr>
-                </a:tc>
-                <a:tc>
-                  <a:txBody>
-                    <a:bodyPr/>
-                    <a:lstStyle/>
-                    <a:p>
-                      <a:pPr indent="0" marL="0">
-                        <a:buNone/>
-                      </a:pPr>
-                      <a:r>
-                        <a:rPr lang="en-US" sz="1100" dirty="0">
-                          <a:solidFill>
-                            <a:srgbClr val="27AE60"/>
-                          </a:solidFill>
-                          <a:latin typeface="Arial" pitchFamily="34" charset="0"/>
-                          <a:ea typeface="Arial" pitchFamily="34" charset="-122"/>
-                          <a:cs typeface="Arial" pitchFamily="34" charset="-120"/>
-                        </a:rPr>
-                        <a:t>#3</a:t>
-                      </a:r>
-                      <a:endParaRPr lang="en-US" sz="1100" dirty="0">
-                        <a:latin typeface="Arial" charset="0"/>
-                        <a:ea typeface="Arial" charset="0"/>
-                        <a:cs typeface="Arial" charset="0"/>
-                      </a:endParaRPr>
-                    </a:p>
-                  </a:txBody>
-                  <a:tcPr marL="91440" marR="91440" marT="45720" marB="45720">
-                    <a:lnL w="6350" cap="flat" cmpd="sng" algn="ctr">
-                      <a:solidFill>
-                        <a:srgbClr val="CCCCCC"/>
-                      </a:solidFill>
-                      <a:prstDash val="solid"/>
-                      <a:round/>
-                      <a:headEnd type="none" w="med" len="med"/>
-                      <a:tailEnd type="none" w="med" len="med"/>
-                    </a:lnL>
-                    <a:lnR w="6350" cap="flat" cmpd="sng" algn="ctr">
-                      <a:solidFill>
-                        <a:srgbClr val="CCCCCC"/>
-                      </a:solidFill>
-                      <a:prstDash val="solid"/>
-                      <a:round/>
-                      <a:headEnd type="none" w="med" len="med"/>
-                      <a:tailEnd type="none" w="med" len="med"/>
-                    </a:lnR>
-                    <a:lnT w="6350" cap="flat" cmpd="sng" algn="ctr">
-                      <a:solidFill>
-                        <a:srgbClr val="CCCCCC"/>
-                      </a:solidFill>
-                      <a:prstDash val="solid"/>
-                      <a:round/>
-                      <a:headEnd type="none" w="med" len="med"/>
-                      <a:tailEnd type="none" w="med" len="med"/>
-                    </a:lnT>
-                    <a:lnB w="6350" cap="flat" cmpd="sng" algn="ctr">
-                      <a:solidFill>
-                        <a:srgbClr val="CCCCCC"/>
-                      </a:solidFill>
-                      <a:prstDash val="solid"/>
-                      <a:round/>
-                      <a:headEnd type="none" w="med" len="med"/>
-                      <a:tailEnd type="none" w="med" len="med"/>
-                    </a:lnB>
-                  </a:tcPr>
-                </a:tc>
-                <a:tc>
-                  <a:txBody>
-                    <a:bodyPr/>
-                    <a:lstStyle/>
-                    <a:p>
-                      <a:pPr indent="0" marL="0">
-                        <a:buNone/>
-                      </a:pPr>
-                      <a:r>
-                        <a:rPr lang="en-US" sz="1100" dirty="0">
-                          <a:solidFill>
-                            <a:srgbClr val="000000"/>
-                          </a:solidFill>
-                          <a:latin typeface="Arial" pitchFamily="34" charset="0"/>
-                          <a:ea typeface="Arial" pitchFamily="34" charset="-122"/>
-                          <a:cs typeface="Arial" pitchFamily="34" charset="-120"/>
-                        </a:rPr>
-                        <a:t>example.com</a:t>
+                        <a:t>zillow.com</a:t>
                       </a:r>
                       <a:endParaRPr lang="en-US" sz="1100" dirty="0">
                         <a:latin typeface="Arial" charset="0"/>
@@ -15122,7 +16403,7 @@
                           <a:ea typeface="Arial" pitchFamily="34" charset="-122"/>
                           <a:cs typeface="Arial" pitchFamily="34" charset="-120"/>
                         </a:rPr>
-                        <a:t>Competitor 1</a:t>
+                        <a:t>Avalon Group</a:t>
                       </a:r>
                       <a:endParaRPr lang="en-US" sz="1200" dirty="0">
                         <a:latin typeface="Arial" charset="0"/>
@@ -15190,7 +16471,7 @@
                           <a:ea typeface="Arial" pitchFamily="34" charset="-122"/>
                           <a:cs typeface="Arial" pitchFamily="34" charset="-120"/>
                         </a:rPr>
-                        <a:t>Competitor 2</a:t>
+                        <a:t>Eagan Luxury</a:t>
                       </a:r>
                       <a:endParaRPr lang="en-US" sz="1200" dirty="0">
                         <a:latin typeface="Arial" charset="0"/>
@@ -15328,7 +16609,7 @@
                           <a:ea typeface="Arial" pitchFamily="34" charset="-122"/>
                           <a:cs typeface="Arial" pitchFamily="34" charset="-120"/>
                         </a:rPr>
-                        <a:t>Total Pages</a:t>
+                        <a:t>Blog Posts</a:t>
                       </a:r>
                       <a:endParaRPr lang="en-US" sz="1200" dirty="0">
                         <a:latin typeface="Arial" charset="0"/>
@@ -15393,7 +16674,7 @@
                           <a:ea typeface="Arial" pitchFamily="34" charset="-122"/>
                           <a:cs typeface="Arial" pitchFamily="34" charset="-120"/>
                         </a:rPr>
-                        <a:t>62</a:t>
+                        <a:t>287</a:t>
                       </a:r>
                       <a:endParaRPr lang="en-US" sz="1200" dirty="0">
                         <a:latin typeface="Arial" charset="0"/>
@@ -15458,7 +16739,7 @@
                           <a:ea typeface="Arial" pitchFamily="34" charset="-122"/>
                           <a:cs typeface="Arial" pitchFamily="34" charset="-120"/>
                         </a:rPr>
-                        <a:t>372</a:t>
+                        <a:t>235</a:t>
                       </a:r>
                       <a:endParaRPr lang="en-US" sz="1200" dirty="0">
                         <a:latin typeface="Arial" charset="0"/>
@@ -15523,7 +16804,7 @@
                           <a:ea typeface="Arial" pitchFamily="34" charset="-122"/>
                           <a:cs typeface="Arial" pitchFamily="34" charset="-120"/>
                         </a:rPr>
-                        <a:t>376</a:t>
+                        <a:t>226</a:t>
                       </a:r>
                       <a:endParaRPr lang="en-US" sz="1200" dirty="0">
                         <a:latin typeface="Arial" charset="0"/>
@@ -15588,7 +16869,7 @@
                           <a:ea typeface="Arial" pitchFamily="34" charset="-122"/>
                           <a:cs typeface="Arial" pitchFamily="34" charset="-120"/>
                         </a:rPr>
-                        <a:t>6x behind</a:t>
+                        <a:t>Liane leads in volume</a:t>
                       </a:r>
                       <a:endParaRPr lang="en-US" sz="1200" dirty="0">
                         <a:latin typeface="Arial" charset="0"/>
@@ -15655,7 +16936,7 @@
                           <a:ea typeface="Arial" pitchFamily="34" charset="-122"/>
                           <a:cs typeface="Arial" pitchFamily="34" charset="-120"/>
                         </a:rPr>
-                        <a:t>Blog Posts</a:t>
+                        <a:t>Total Pages</a:t>
                       </a:r>
                       <a:endParaRPr lang="en-US" sz="1200" dirty="0">
                         <a:latin typeface="Arial" charset="0"/>
@@ -15720,7 +17001,7 @@
                           <a:ea typeface="Arial" pitchFamily="34" charset="-122"/>
                           <a:cs typeface="Arial" pitchFamily="34" charset="-120"/>
                         </a:rPr>
-                        <a:t>5</a:t>
+                        <a:t>365+</a:t>
                       </a:r>
                       <a:endParaRPr lang="en-US" sz="1200" dirty="0">
                         <a:latin typeface="Arial" charset="0"/>
@@ -15785,7 +17066,7 @@
                           <a:ea typeface="Arial" pitchFamily="34" charset="-122"/>
                           <a:cs typeface="Arial" pitchFamily="34" charset="-120"/>
                         </a:rPr>
-                        <a:t>96</a:t>
+                        <a:t>287</a:t>
                       </a:r>
                       <a:endParaRPr lang="en-US" sz="1200" dirty="0">
                         <a:latin typeface="Arial" charset="0"/>
@@ -15850,7 +17131,7 @@
                           <a:ea typeface="Arial" pitchFamily="34" charset="-122"/>
                           <a:cs typeface="Arial" pitchFamily="34" charset="-120"/>
                         </a:rPr>
-                        <a:t>33</a:t>
+                        <a:t>381</a:t>
                       </a:r>
                       <a:endParaRPr lang="en-US" sz="1200" dirty="0">
                         <a:latin typeface="Arial" charset="0"/>
@@ -15915,7 +17196,7 @@
                           <a:ea typeface="Arial" pitchFamily="34" charset="-122"/>
                           <a:cs typeface="Arial" pitchFamily="34" charset="-120"/>
                         </a:rPr>
-                        <a:t>19x behind</a:t>
+                        <a:t>Mid-range overall</a:t>
                       </a:r>
                       <a:endParaRPr lang="en-US" sz="1200" dirty="0">
                         <a:latin typeface="Arial" charset="0"/>
@@ -15982,7 +17263,7 @@
                           <a:ea typeface="Arial" pitchFamily="34" charset="-122"/>
                           <a:cs typeface="Arial" pitchFamily="34" charset="-120"/>
                         </a:rPr>
-                        <a:t>Key Page Depth</a:t>
+                        <a:t>Neighborhood Pages</a:t>
                       </a:r>
                       <a:endParaRPr lang="en-US" sz="1200" dirty="0">
                         <a:latin typeface="Arial" charset="0"/>
@@ -16047,7 +17328,7 @@
                           <a:ea typeface="Arial" pitchFamily="34" charset="-122"/>
                           <a:cs typeface="Arial" pitchFamily="34" charset="-120"/>
                         </a:rPr>
-                        <a:t>~200 words</a:t>
+                        <a:t>15+</a:t>
                       </a:r>
                       <a:endParaRPr lang="en-US" sz="1200" dirty="0">
                         <a:latin typeface="Arial" charset="0"/>
@@ -16112,7 +17393,7 @@
                           <a:ea typeface="Arial" pitchFamily="34" charset="-122"/>
                           <a:cs typeface="Arial" pitchFamily="34" charset="-120"/>
                         </a:rPr>
-                        <a:t>500-2,000</a:t>
+                        <a:t>11</a:t>
                       </a:r>
                       <a:endParaRPr lang="en-US" sz="1200" dirty="0">
                         <a:latin typeface="Arial" charset="0"/>
@@ -16177,7 +17458,7 @@
                           <a:ea typeface="Arial" pitchFamily="34" charset="-122"/>
                           <a:cs typeface="Arial" pitchFamily="34" charset="-120"/>
                         </a:rPr>
-                        <a:t>3,500-4,500</a:t>
+                        <a:t>30</a:t>
                       </a:r>
                       <a:endParaRPr lang="en-US" sz="1200" dirty="0">
                         <a:latin typeface="Arial" charset="0"/>
@@ -16242,7 +17523,7 @@
                           <a:ea typeface="Arial" pitchFamily="34" charset="-122"/>
                           <a:cs typeface="Arial" pitchFamily="34" charset="-120"/>
                         </a:rPr>
-                        <a:t>20x behind</a:t>
+                        <a:t>Behind Eagan &amp; Smith</a:t>
                       </a:r>
                       <a:endParaRPr lang="en-US" sz="1200" dirty="0">
                         <a:latin typeface="Arial" charset="0"/>
@@ -16309,7 +17590,7 @@
                           <a:ea typeface="Arial" pitchFamily="34" charset="-122"/>
                           <a:cs typeface="Arial" pitchFamily="34" charset="-120"/>
                         </a:rPr>
-                        <a:t>Schema Markup</a:t>
+                        <a:t>Homepage Meta Desc</a:t>
                       </a:r>
                       <a:endParaRPr lang="en-US" sz="1200" dirty="0">
                         <a:latin typeface="Arial" charset="0"/>
@@ -16374,7 +17655,7 @@
                           <a:ea typeface="Arial" pitchFamily="34" charset="-122"/>
                           <a:cs typeface="Arial" pitchFamily="34" charset="-120"/>
                         </a:rPr>
-                        <a:t>None</a:t>
+                        <a:t>MISSING</a:t>
                       </a:r>
                       <a:endParaRPr lang="en-US" sz="1200" dirty="0">
                         <a:latin typeface="Arial" charset="0"/>
@@ -16439,7 +17720,7 @@
                           <a:ea typeface="Arial" pitchFamily="34" charset="-122"/>
                           <a:cs typeface="Arial" pitchFamily="34" charset="-120"/>
                         </a:rPr>
-                        <a:t>None</a:t>
+                        <a:t>Present</a:t>
                       </a:r>
                       <a:endParaRPr lang="en-US" sz="1200" dirty="0">
                         <a:latin typeface="Arial" charset="0"/>
@@ -16504,7 +17785,7 @@
                           <a:ea typeface="Arial" pitchFamily="34" charset="-122"/>
                           <a:cs typeface="Arial" pitchFamily="34" charset="-120"/>
                         </a:rPr>
-                        <a:t>Yes</a:t>
+                        <a:t>Present</a:t>
                       </a:r>
                       <a:endParaRPr lang="en-US" sz="1200" dirty="0">
                         <a:latin typeface="Arial" charset="0"/>
@@ -16569,7 +17850,7 @@
                           <a:ea typeface="Arial" pitchFamily="34" charset="-122"/>
                           <a:cs typeface="Arial" pitchFamily="34" charset="-120"/>
                         </a:rPr>
-                        <a:t>Missing</a:t>
+                        <a:t>Critical gap</a:t>
                       </a:r>
                       <a:endParaRPr lang="en-US" sz="1200" dirty="0">
                         <a:latin typeface="Arial" charset="0"/>
@@ -16636,7 +17917,7 @@
                           <a:ea typeface="Arial" pitchFamily="34" charset="-122"/>
                           <a:cs typeface="Arial" pitchFamily="34" charset="-120"/>
                         </a:rPr>
-                        <a:t>Keywords Ranking</a:t>
+                        <a:t>Schema Depth</a:t>
                       </a:r>
                       <a:endParaRPr lang="en-US" sz="1200" dirty="0">
                         <a:latin typeface="Arial" charset="0"/>
@@ -16701,7 +17982,7 @@
                           <a:ea typeface="Arial" pitchFamily="34" charset="-122"/>
                           <a:cs typeface="Arial" pitchFamily="34" charset="-120"/>
                         </a:rPr>
-                        <a:t>0 / 25</a:t>
+                        <a:t>Moderate</a:t>
                       </a:r>
                       <a:endParaRPr lang="en-US" sz="1200" dirty="0">
                         <a:latin typeface="Arial" charset="0"/>
@@ -16766,7 +18047,7 @@
                           <a:ea typeface="Arial" pitchFamily="34" charset="-122"/>
                           <a:cs typeface="Arial" pitchFamily="34" charset="-120"/>
                         </a:rPr>
-                        <a:t>5 / 25</a:t>
+                        <a:t>Moderate</a:t>
                       </a:r>
                       <a:endParaRPr lang="en-US" sz="1200" dirty="0">
                         <a:latin typeface="Arial" charset="0"/>
@@ -16831,7 +18112,7 @@
                           <a:ea typeface="Arial" pitchFamily="34" charset="-122"/>
                           <a:cs typeface="Arial" pitchFamily="34" charset="-120"/>
                         </a:rPr>
-                        <a:t>12 / 25</a:t>
+                        <a:t>Excellent</a:t>
                       </a:r>
                       <a:endParaRPr lang="en-US" sz="1200" dirty="0">
                         <a:latin typeface="Arial" charset="0"/>
@@ -16896,7 +18177,988 @@
                           <a:ea typeface="Arial" pitchFamily="34" charset="-122"/>
                           <a:cs typeface="Arial" pitchFamily="34" charset="-120"/>
                         </a:rPr>
-                        <a:t>Zero visibility</a:t>
+                        <a:t>Behind Eagan Luxury</a:t>
+                      </a:r>
+                      <a:endParaRPr lang="en-US" sz="1200" dirty="0">
+                        <a:latin typeface="Arial" charset="0"/>
+                        <a:ea typeface="Arial" charset="0"/>
+                        <a:cs typeface="Arial" charset="0"/>
+                      </a:endParaRPr>
+                    </a:p>
+                  </a:txBody>
+                  <a:tcPr marL="91440" marR="91440" marT="45720" marB="45720">
+                    <a:lnL w="6350" cap="flat" cmpd="sng" algn="ctr">
+                      <a:solidFill>
+                        <a:srgbClr val="CCCCCC"/>
+                      </a:solidFill>
+                      <a:prstDash val="solid"/>
+                      <a:round/>
+                      <a:headEnd type="none" w="med" len="med"/>
+                      <a:tailEnd type="none" w="med" len="med"/>
+                    </a:lnL>
+                    <a:lnR w="6350" cap="flat" cmpd="sng" algn="ctr">
+                      <a:solidFill>
+                        <a:srgbClr val="CCCCCC"/>
+                      </a:solidFill>
+                      <a:prstDash val="solid"/>
+                      <a:round/>
+                      <a:headEnd type="none" w="med" len="med"/>
+                      <a:tailEnd type="none" w="med" len="med"/>
+                    </a:lnR>
+                    <a:lnT w="6350" cap="flat" cmpd="sng" algn="ctr">
+                      <a:solidFill>
+                        <a:srgbClr val="CCCCCC"/>
+                      </a:solidFill>
+                      <a:prstDash val="solid"/>
+                      <a:round/>
+                      <a:headEnd type="none" w="med" len="med"/>
+                      <a:tailEnd type="none" w="med" len="med"/>
+                    </a:lnT>
+                    <a:lnB w="6350" cap="flat" cmpd="sng" algn="ctr">
+                      <a:solidFill>
+                        <a:srgbClr val="CCCCCC"/>
+                      </a:solidFill>
+                      <a:prstDash val="solid"/>
+                      <a:round/>
+                      <a:headEnd type="none" w="med" len="med"/>
+                      <a:tailEnd type="none" w="med" len="med"/>
+                    </a:lnB>
+                  </a:tcPr>
+                </a:tc>
+              </a:tr>
+              <a:tr h="0">
+                <a:tc>
+                  <a:txBody>
+                    <a:bodyPr/>
+                    <a:lstStyle/>
+                    <a:p>
+                      <a:pPr indent="0" marL="0">
+                        <a:buNone/>
+                      </a:pPr>
+                      <a:r>
+                        <a:rPr lang="en-US" sz="1200" dirty="0">
+                          <a:solidFill>
+                            <a:srgbClr val="000000"/>
+                          </a:solidFill>
+                          <a:latin typeface="Arial" pitchFamily="34" charset="0"/>
+                          <a:ea typeface="Arial" pitchFamily="34" charset="-122"/>
+                          <a:cs typeface="Arial" pitchFamily="34" charset="-120"/>
+                        </a:rPr>
+                        <a:t>Reviews Highlighted</a:t>
+                      </a:r>
+                      <a:endParaRPr lang="en-US" sz="1200" dirty="0">
+                        <a:latin typeface="Arial" charset="0"/>
+                        <a:ea typeface="Arial" charset="0"/>
+                        <a:cs typeface="Arial" charset="0"/>
+                      </a:endParaRPr>
+                    </a:p>
+                  </a:txBody>
+                  <a:tcPr marL="91440" marR="91440" marT="45720" marB="45720">
+                    <a:lnL w="6350" cap="flat" cmpd="sng" algn="ctr">
+                      <a:solidFill>
+                        <a:srgbClr val="CCCCCC"/>
+                      </a:solidFill>
+                      <a:prstDash val="solid"/>
+                      <a:round/>
+                      <a:headEnd type="none" w="med" len="med"/>
+                      <a:tailEnd type="none" w="med" len="med"/>
+                    </a:lnL>
+                    <a:lnR w="6350" cap="flat" cmpd="sng" algn="ctr">
+                      <a:solidFill>
+                        <a:srgbClr val="CCCCCC"/>
+                      </a:solidFill>
+                      <a:prstDash val="solid"/>
+                      <a:round/>
+                      <a:headEnd type="none" w="med" len="med"/>
+                      <a:tailEnd type="none" w="med" len="med"/>
+                    </a:lnR>
+                    <a:lnT w="6350" cap="flat" cmpd="sng" algn="ctr">
+                      <a:solidFill>
+                        <a:srgbClr val="CCCCCC"/>
+                      </a:solidFill>
+                      <a:prstDash val="solid"/>
+                      <a:round/>
+                      <a:headEnd type="none" w="med" len="med"/>
+                      <a:tailEnd type="none" w="med" len="med"/>
+                    </a:lnT>
+                    <a:lnB w="6350" cap="flat" cmpd="sng" algn="ctr">
+                      <a:solidFill>
+                        <a:srgbClr val="CCCCCC"/>
+                      </a:solidFill>
+                      <a:prstDash val="solid"/>
+                      <a:round/>
+                      <a:headEnd type="none" w="med" len="med"/>
+                      <a:tailEnd type="none" w="med" len="med"/>
+                    </a:lnB>
+                  </a:tcPr>
+                </a:tc>
+                <a:tc>
+                  <a:txBody>
+                    <a:bodyPr/>
+                    <a:lstStyle/>
+                    <a:p>
+                      <a:pPr indent="0" marL="0">
+                        <a:buNone/>
+                      </a:pPr>
+                      <a:r>
+                        <a:rPr lang="en-US" sz="1200" b="1" dirty="0">
+                          <a:solidFill>
+                            <a:srgbClr val="E74C3C"/>
+                          </a:solidFill>
+                          <a:latin typeface="Arial" pitchFamily="34" charset="0"/>
+                          <a:ea typeface="Arial" pitchFamily="34" charset="-122"/>
+                          <a:cs typeface="Arial" pitchFamily="34" charset="-120"/>
+                        </a:rPr>
+                        <a:t>"Top 3" badge</a:t>
+                      </a:r>
+                      <a:endParaRPr lang="en-US" sz="1200" dirty="0">
+                        <a:latin typeface="Arial" charset="0"/>
+                        <a:ea typeface="Arial" charset="0"/>
+                        <a:cs typeface="Arial" charset="0"/>
+                      </a:endParaRPr>
+                    </a:p>
+                  </a:txBody>
+                  <a:tcPr marL="91440" marR="91440" marT="45720" marB="45720">
+                    <a:lnL w="6350" cap="flat" cmpd="sng" algn="ctr">
+                      <a:solidFill>
+                        <a:srgbClr val="CCCCCC"/>
+                      </a:solidFill>
+                      <a:prstDash val="solid"/>
+                      <a:round/>
+                      <a:headEnd type="none" w="med" len="med"/>
+                      <a:tailEnd type="none" w="med" len="med"/>
+                    </a:lnL>
+                    <a:lnR w="6350" cap="flat" cmpd="sng" algn="ctr">
+                      <a:solidFill>
+                        <a:srgbClr val="CCCCCC"/>
+                      </a:solidFill>
+                      <a:prstDash val="solid"/>
+                      <a:round/>
+                      <a:headEnd type="none" w="med" len="med"/>
+                      <a:tailEnd type="none" w="med" len="med"/>
+                    </a:lnR>
+                    <a:lnT w="6350" cap="flat" cmpd="sng" algn="ctr">
+                      <a:solidFill>
+                        <a:srgbClr val="CCCCCC"/>
+                      </a:solidFill>
+                      <a:prstDash val="solid"/>
+                      <a:round/>
+                      <a:headEnd type="none" w="med" len="med"/>
+                      <a:tailEnd type="none" w="med" len="med"/>
+                    </a:lnT>
+                    <a:lnB w="6350" cap="flat" cmpd="sng" algn="ctr">
+                      <a:solidFill>
+                        <a:srgbClr val="CCCCCC"/>
+                      </a:solidFill>
+                      <a:prstDash val="solid"/>
+                      <a:round/>
+                      <a:headEnd type="none" w="med" len="med"/>
+                      <a:tailEnd type="none" w="med" len="med"/>
+                    </a:lnB>
+                  </a:tcPr>
+                </a:tc>
+                <a:tc>
+                  <a:txBody>
+                    <a:bodyPr/>
+                    <a:lstStyle/>
+                    <a:p>
+                      <a:pPr indent="0" marL="0">
+                        <a:buNone/>
+                      </a:pPr>
+                      <a:r>
+                        <a:rPr lang="en-US" sz="1200" dirty="0">
+                          <a:solidFill>
+                            <a:srgbClr val="000000"/>
+                          </a:solidFill>
+                          <a:latin typeface="Arial" pitchFamily="34" charset="0"/>
+                          <a:ea typeface="Arial" pitchFamily="34" charset="-122"/>
+                          <a:cs typeface="Arial" pitchFamily="34" charset="-120"/>
+                        </a:rPr>
+                        <a:t>300+ 5-star</a:t>
+                      </a:r>
+                      <a:endParaRPr lang="en-US" sz="1200" dirty="0">
+                        <a:latin typeface="Arial" charset="0"/>
+                        <a:ea typeface="Arial" charset="0"/>
+                        <a:cs typeface="Arial" charset="0"/>
+                      </a:endParaRPr>
+                    </a:p>
+                  </a:txBody>
+                  <a:tcPr marL="91440" marR="91440" marT="45720" marB="45720">
+                    <a:lnL w="6350" cap="flat" cmpd="sng" algn="ctr">
+                      <a:solidFill>
+                        <a:srgbClr val="CCCCCC"/>
+                      </a:solidFill>
+                      <a:prstDash val="solid"/>
+                      <a:round/>
+                      <a:headEnd type="none" w="med" len="med"/>
+                      <a:tailEnd type="none" w="med" len="med"/>
+                    </a:lnL>
+                    <a:lnR w="6350" cap="flat" cmpd="sng" algn="ctr">
+                      <a:solidFill>
+                        <a:srgbClr val="CCCCCC"/>
+                      </a:solidFill>
+                      <a:prstDash val="solid"/>
+                      <a:round/>
+                      <a:headEnd type="none" w="med" len="med"/>
+                      <a:tailEnd type="none" w="med" len="med"/>
+                    </a:lnR>
+                    <a:lnT w="6350" cap="flat" cmpd="sng" algn="ctr">
+                      <a:solidFill>
+                        <a:srgbClr val="CCCCCC"/>
+                      </a:solidFill>
+                      <a:prstDash val="solid"/>
+                      <a:round/>
+                      <a:headEnd type="none" w="med" len="med"/>
+                      <a:tailEnd type="none" w="med" len="med"/>
+                    </a:lnT>
+                    <a:lnB w="6350" cap="flat" cmpd="sng" algn="ctr">
+                      <a:solidFill>
+                        <a:srgbClr val="CCCCCC"/>
+                      </a:solidFill>
+                      <a:prstDash val="solid"/>
+                      <a:round/>
+                      <a:headEnd type="none" w="med" len="med"/>
+                      <a:tailEnd type="none" w="med" len="med"/>
+                    </a:lnB>
+                  </a:tcPr>
+                </a:tc>
+                <a:tc>
+                  <a:txBody>
+                    <a:bodyPr/>
+                    <a:lstStyle/>
+                    <a:p>
+                      <a:pPr indent="0" marL="0">
+                        <a:buNone/>
+                      </a:pPr>
+                      <a:r>
+                        <a:rPr lang="en-US" sz="1200" dirty="0">
+                          <a:solidFill>
+                            <a:srgbClr val="000000"/>
+                          </a:solidFill>
+                          <a:latin typeface="Arial" pitchFamily="34" charset="0"/>
+                          <a:ea typeface="Arial" pitchFamily="34" charset="-122"/>
+                          <a:cs typeface="Arial" pitchFamily="34" charset="-120"/>
+                        </a:rPr>
+                        <a:t>85, 5.0 stars</a:t>
+                      </a:r>
+                      <a:endParaRPr lang="en-US" sz="1200" dirty="0">
+                        <a:latin typeface="Arial" charset="0"/>
+                        <a:ea typeface="Arial" charset="0"/>
+                        <a:cs typeface="Arial" charset="0"/>
+                      </a:endParaRPr>
+                    </a:p>
+                  </a:txBody>
+                  <a:tcPr marL="91440" marR="91440" marT="45720" marB="45720">
+                    <a:lnL w="6350" cap="flat" cmpd="sng" algn="ctr">
+                      <a:solidFill>
+                        <a:srgbClr val="CCCCCC"/>
+                      </a:solidFill>
+                      <a:prstDash val="solid"/>
+                      <a:round/>
+                      <a:headEnd type="none" w="med" len="med"/>
+                      <a:tailEnd type="none" w="med" len="med"/>
+                    </a:lnL>
+                    <a:lnR w="6350" cap="flat" cmpd="sng" algn="ctr">
+                      <a:solidFill>
+                        <a:srgbClr val="CCCCCC"/>
+                      </a:solidFill>
+                      <a:prstDash val="solid"/>
+                      <a:round/>
+                      <a:headEnd type="none" w="med" len="med"/>
+                      <a:tailEnd type="none" w="med" len="med"/>
+                    </a:lnR>
+                    <a:lnT w="6350" cap="flat" cmpd="sng" algn="ctr">
+                      <a:solidFill>
+                        <a:srgbClr val="CCCCCC"/>
+                      </a:solidFill>
+                      <a:prstDash val="solid"/>
+                      <a:round/>
+                      <a:headEnd type="none" w="med" len="med"/>
+                      <a:tailEnd type="none" w="med" len="med"/>
+                    </a:lnT>
+                    <a:lnB w="6350" cap="flat" cmpd="sng" algn="ctr">
+                      <a:solidFill>
+                        <a:srgbClr val="CCCCCC"/>
+                      </a:solidFill>
+                      <a:prstDash val="solid"/>
+                      <a:round/>
+                      <a:headEnd type="none" w="med" len="med"/>
+                      <a:tailEnd type="none" w="med" len="med"/>
+                    </a:lnB>
+                  </a:tcPr>
+                </a:tc>
+                <a:tc>
+                  <a:txBody>
+                    <a:bodyPr/>
+                    <a:lstStyle/>
+                    <a:p>
+                      <a:pPr indent="0" marL="0">
+                        <a:buNone/>
+                      </a:pPr>
+                      <a:r>
+                        <a:rPr lang="en-US" sz="1200" dirty="0">
+                          <a:solidFill>
+                            <a:srgbClr val="E74C3C"/>
+                          </a:solidFill>
+                          <a:latin typeface="Arial" pitchFamily="34" charset="0"/>
+                          <a:ea typeface="Arial" pitchFamily="34" charset="-122"/>
+                          <a:cs typeface="Arial" pitchFamily="34" charset="-120"/>
+                        </a:rPr>
+                        <a:t>Under-leveraged</a:t>
+                      </a:r>
+                      <a:endParaRPr lang="en-US" sz="1200" dirty="0">
+                        <a:latin typeface="Arial" charset="0"/>
+                        <a:ea typeface="Arial" charset="0"/>
+                        <a:cs typeface="Arial" charset="0"/>
+                      </a:endParaRPr>
+                    </a:p>
+                  </a:txBody>
+                  <a:tcPr marL="91440" marR="91440" marT="45720" marB="45720">
+                    <a:lnL w="6350" cap="flat" cmpd="sng" algn="ctr">
+                      <a:solidFill>
+                        <a:srgbClr val="CCCCCC"/>
+                      </a:solidFill>
+                      <a:prstDash val="solid"/>
+                      <a:round/>
+                      <a:headEnd type="none" w="med" len="med"/>
+                      <a:tailEnd type="none" w="med" len="med"/>
+                    </a:lnL>
+                    <a:lnR w="6350" cap="flat" cmpd="sng" algn="ctr">
+                      <a:solidFill>
+                        <a:srgbClr val="CCCCCC"/>
+                      </a:solidFill>
+                      <a:prstDash val="solid"/>
+                      <a:round/>
+                      <a:headEnd type="none" w="med" len="med"/>
+                      <a:tailEnd type="none" w="med" len="med"/>
+                    </a:lnR>
+                    <a:lnT w="6350" cap="flat" cmpd="sng" algn="ctr">
+                      <a:solidFill>
+                        <a:srgbClr val="CCCCCC"/>
+                      </a:solidFill>
+                      <a:prstDash val="solid"/>
+                      <a:round/>
+                      <a:headEnd type="none" w="med" len="med"/>
+                      <a:tailEnd type="none" w="med" len="med"/>
+                    </a:lnT>
+                    <a:lnB w="6350" cap="flat" cmpd="sng" algn="ctr">
+                      <a:solidFill>
+                        <a:srgbClr val="CCCCCC"/>
+                      </a:solidFill>
+                      <a:prstDash val="solid"/>
+                      <a:round/>
+                      <a:headEnd type="none" w="med" len="med"/>
+                      <a:tailEnd type="none" w="med" len="med"/>
+                    </a:lnB>
+                  </a:tcPr>
+                </a:tc>
+              </a:tr>
+              <a:tr h="0">
+                <a:tc>
+                  <a:txBody>
+                    <a:bodyPr/>
+                    <a:lstStyle/>
+                    <a:p>
+                      <a:pPr indent="0" marL="0">
+                        <a:buNone/>
+                      </a:pPr>
+                      <a:r>
+                        <a:rPr lang="en-US" sz="1200" dirty="0">
+                          <a:solidFill>
+                            <a:srgbClr val="000000"/>
+                          </a:solidFill>
+                          <a:latin typeface="Arial" pitchFamily="34" charset="0"/>
+                          <a:ea typeface="Arial" pitchFamily="34" charset="-122"/>
+                          <a:cs typeface="Arial" pitchFamily="34" charset="-120"/>
+                        </a:rPr>
+                        <a:t>Lead Magnets</a:t>
+                      </a:r>
+                      <a:endParaRPr lang="en-US" sz="1200" dirty="0">
+                        <a:latin typeface="Arial" charset="0"/>
+                        <a:ea typeface="Arial" charset="0"/>
+                        <a:cs typeface="Arial" charset="0"/>
+                      </a:endParaRPr>
+                    </a:p>
+                  </a:txBody>
+                  <a:tcPr marL="91440" marR="91440" marT="45720" marB="45720">
+                    <a:lnL w="6350" cap="flat" cmpd="sng" algn="ctr">
+                      <a:solidFill>
+                        <a:srgbClr val="CCCCCC"/>
+                      </a:solidFill>
+                      <a:prstDash val="solid"/>
+                      <a:round/>
+                      <a:headEnd type="none" w="med" len="med"/>
+                      <a:tailEnd type="none" w="med" len="med"/>
+                    </a:lnL>
+                    <a:lnR w="6350" cap="flat" cmpd="sng" algn="ctr">
+                      <a:solidFill>
+                        <a:srgbClr val="CCCCCC"/>
+                      </a:solidFill>
+                      <a:prstDash val="solid"/>
+                      <a:round/>
+                      <a:headEnd type="none" w="med" len="med"/>
+                      <a:tailEnd type="none" w="med" len="med"/>
+                    </a:lnR>
+                    <a:lnT w="6350" cap="flat" cmpd="sng" algn="ctr">
+                      <a:solidFill>
+                        <a:srgbClr val="CCCCCC"/>
+                      </a:solidFill>
+                      <a:prstDash val="solid"/>
+                      <a:round/>
+                      <a:headEnd type="none" w="med" len="med"/>
+                      <a:tailEnd type="none" w="med" len="med"/>
+                    </a:lnT>
+                    <a:lnB w="6350" cap="flat" cmpd="sng" algn="ctr">
+                      <a:solidFill>
+                        <a:srgbClr val="CCCCCC"/>
+                      </a:solidFill>
+                      <a:prstDash val="solid"/>
+                      <a:round/>
+                      <a:headEnd type="none" w="med" len="med"/>
+                      <a:tailEnd type="none" w="med" len="med"/>
+                    </a:lnB>
+                  </a:tcPr>
+                </a:tc>
+                <a:tc>
+                  <a:txBody>
+                    <a:bodyPr/>
+                    <a:lstStyle/>
+                    <a:p>
+                      <a:pPr indent="0" marL="0">
+                        <a:buNone/>
+                      </a:pPr>
+                      <a:r>
+                        <a:rPr lang="en-US" sz="1200" b="1" dirty="0">
+                          <a:solidFill>
+                            <a:srgbClr val="E74C3C"/>
+                          </a:solidFill>
+                          <a:latin typeface="Arial" pitchFamily="34" charset="0"/>
+                          <a:ea typeface="Arial" pitchFamily="34" charset="-122"/>
+                          <a:cs typeface="Arial" pitchFamily="34" charset="-120"/>
+                        </a:rPr>
+                        <a:t>Broken home value form</a:t>
+                      </a:r>
+                      <a:endParaRPr lang="en-US" sz="1200" dirty="0">
+                        <a:latin typeface="Arial" charset="0"/>
+                        <a:ea typeface="Arial" charset="0"/>
+                        <a:cs typeface="Arial" charset="0"/>
+                      </a:endParaRPr>
+                    </a:p>
+                  </a:txBody>
+                  <a:tcPr marL="91440" marR="91440" marT="45720" marB="45720">
+                    <a:lnL w="6350" cap="flat" cmpd="sng" algn="ctr">
+                      <a:solidFill>
+                        <a:srgbClr val="CCCCCC"/>
+                      </a:solidFill>
+                      <a:prstDash val="solid"/>
+                      <a:round/>
+                      <a:headEnd type="none" w="med" len="med"/>
+                      <a:tailEnd type="none" w="med" len="med"/>
+                    </a:lnL>
+                    <a:lnR w="6350" cap="flat" cmpd="sng" algn="ctr">
+                      <a:solidFill>
+                        <a:srgbClr val="CCCCCC"/>
+                      </a:solidFill>
+                      <a:prstDash val="solid"/>
+                      <a:round/>
+                      <a:headEnd type="none" w="med" len="med"/>
+                      <a:tailEnd type="none" w="med" len="med"/>
+                    </a:lnR>
+                    <a:lnT w="6350" cap="flat" cmpd="sng" algn="ctr">
+                      <a:solidFill>
+                        <a:srgbClr val="CCCCCC"/>
+                      </a:solidFill>
+                      <a:prstDash val="solid"/>
+                      <a:round/>
+                      <a:headEnd type="none" w="med" len="med"/>
+                      <a:tailEnd type="none" w="med" len="med"/>
+                    </a:lnT>
+                    <a:lnB w="6350" cap="flat" cmpd="sng" algn="ctr">
+                      <a:solidFill>
+                        <a:srgbClr val="CCCCCC"/>
+                      </a:solidFill>
+                      <a:prstDash val="solid"/>
+                      <a:round/>
+                      <a:headEnd type="none" w="med" len="med"/>
+                      <a:tailEnd type="none" w="med" len="med"/>
+                    </a:lnB>
+                  </a:tcPr>
+                </a:tc>
+                <a:tc>
+                  <a:txBody>
+                    <a:bodyPr/>
+                    <a:lstStyle/>
+                    <a:p>
+                      <a:pPr indent="0" marL="0">
+                        <a:buNone/>
+                      </a:pPr>
+                      <a:r>
+                        <a:rPr lang="en-US" sz="1200" dirty="0">
+                          <a:solidFill>
+                            <a:srgbClr val="000000"/>
+                          </a:solidFill>
+                          <a:latin typeface="Arial" pitchFamily="34" charset="0"/>
+                          <a:ea typeface="Arial" pitchFamily="34" charset="-122"/>
+                          <a:cs typeface="Arial" pitchFamily="34" charset="-120"/>
+                        </a:rPr>
+                        <a:t>Reports, guides, SMS</a:t>
+                      </a:r>
+                      <a:endParaRPr lang="en-US" sz="1200" dirty="0">
+                        <a:latin typeface="Arial" charset="0"/>
+                        <a:ea typeface="Arial" charset="0"/>
+                        <a:cs typeface="Arial" charset="0"/>
+                      </a:endParaRPr>
+                    </a:p>
+                  </a:txBody>
+                  <a:tcPr marL="91440" marR="91440" marT="45720" marB="45720">
+                    <a:lnL w="6350" cap="flat" cmpd="sng" algn="ctr">
+                      <a:solidFill>
+                        <a:srgbClr val="CCCCCC"/>
+                      </a:solidFill>
+                      <a:prstDash val="solid"/>
+                      <a:round/>
+                      <a:headEnd type="none" w="med" len="med"/>
+                      <a:tailEnd type="none" w="med" len="med"/>
+                    </a:lnL>
+                    <a:lnR w="6350" cap="flat" cmpd="sng" algn="ctr">
+                      <a:solidFill>
+                        <a:srgbClr val="CCCCCC"/>
+                      </a:solidFill>
+                      <a:prstDash val="solid"/>
+                      <a:round/>
+                      <a:headEnd type="none" w="med" len="med"/>
+                      <a:tailEnd type="none" w="med" len="med"/>
+                    </a:lnR>
+                    <a:lnT w="6350" cap="flat" cmpd="sng" algn="ctr">
+                      <a:solidFill>
+                        <a:srgbClr val="CCCCCC"/>
+                      </a:solidFill>
+                      <a:prstDash val="solid"/>
+                      <a:round/>
+                      <a:headEnd type="none" w="med" len="med"/>
+                      <a:tailEnd type="none" w="med" len="med"/>
+                    </a:lnT>
+                    <a:lnB w="6350" cap="flat" cmpd="sng" algn="ctr">
+                      <a:solidFill>
+                        <a:srgbClr val="CCCCCC"/>
+                      </a:solidFill>
+                      <a:prstDash val="solid"/>
+                      <a:round/>
+                      <a:headEnd type="none" w="med" len="med"/>
+                      <a:tailEnd type="none" w="med" len="med"/>
+                    </a:lnB>
+                  </a:tcPr>
+                </a:tc>
+                <a:tc>
+                  <a:txBody>
+                    <a:bodyPr/>
+                    <a:lstStyle/>
+                    <a:p>
+                      <a:pPr indent="0" marL="0">
+                        <a:buNone/>
+                      </a:pPr>
+                      <a:r>
+                        <a:rPr lang="en-US" sz="1200" dirty="0">
+                          <a:solidFill>
+                            <a:srgbClr val="000000"/>
+                          </a:solidFill>
+                          <a:latin typeface="Arial" pitchFamily="34" charset="0"/>
+                          <a:ea typeface="Arial" pitchFamily="34" charset="-122"/>
+                          <a:cs typeface="Arial" pitchFamily="34" charset="-120"/>
+                        </a:rPr>
+                        <a:t>Valuation, consultation</a:t>
+                      </a:r>
+                      <a:endParaRPr lang="en-US" sz="1200" dirty="0">
+                        <a:latin typeface="Arial" charset="0"/>
+                        <a:ea typeface="Arial" charset="0"/>
+                        <a:cs typeface="Arial" charset="0"/>
+                      </a:endParaRPr>
+                    </a:p>
+                  </a:txBody>
+                  <a:tcPr marL="91440" marR="91440" marT="45720" marB="45720">
+                    <a:lnL w="6350" cap="flat" cmpd="sng" algn="ctr">
+                      <a:solidFill>
+                        <a:srgbClr val="CCCCCC"/>
+                      </a:solidFill>
+                      <a:prstDash val="solid"/>
+                      <a:round/>
+                      <a:headEnd type="none" w="med" len="med"/>
+                      <a:tailEnd type="none" w="med" len="med"/>
+                    </a:lnL>
+                    <a:lnR w="6350" cap="flat" cmpd="sng" algn="ctr">
+                      <a:solidFill>
+                        <a:srgbClr val="CCCCCC"/>
+                      </a:solidFill>
+                      <a:prstDash val="solid"/>
+                      <a:round/>
+                      <a:headEnd type="none" w="med" len="med"/>
+                      <a:tailEnd type="none" w="med" len="med"/>
+                    </a:lnR>
+                    <a:lnT w="6350" cap="flat" cmpd="sng" algn="ctr">
+                      <a:solidFill>
+                        <a:srgbClr val="CCCCCC"/>
+                      </a:solidFill>
+                      <a:prstDash val="solid"/>
+                      <a:round/>
+                      <a:headEnd type="none" w="med" len="med"/>
+                      <a:tailEnd type="none" w="med" len="med"/>
+                    </a:lnT>
+                    <a:lnB w="6350" cap="flat" cmpd="sng" algn="ctr">
+                      <a:solidFill>
+                        <a:srgbClr val="CCCCCC"/>
+                      </a:solidFill>
+                      <a:prstDash val="solid"/>
+                      <a:round/>
+                      <a:headEnd type="none" w="med" len="med"/>
+                      <a:tailEnd type="none" w="med" len="med"/>
+                    </a:lnB>
+                  </a:tcPr>
+                </a:tc>
+                <a:tc>
+                  <a:txBody>
+                    <a:bodyPr/>
+                    <a:lstStyle/>
+                    <a:p>
+                      <a:pPr indent="0" marL="0">
+                        <a:buNone/>
+                      </a:pPr>
+                      <a:r>
+                        <a:rPr lang="en-US" sz="1200" dirty="0">
+                          <a:solidFill>
+                            <a:srgbClr val="E74C3C"/>
+                          </a:solidFill>
+                          <a:latin typeface="Arial" pitchFamily="34" charset="0"/>
+                          <a:ea typeface="Arial" pitchFamily="34" charset="-122"/>
+                          <a:cs typeface="Arial" pitchFamily="34" charset="-120"/>
+                        </a:rPr>
+                        <a:t>Zero functional magnets</a:t>
+                      </a:r>
+                      <a:endParaRPr lang="en-US" sz="1200" dirty="0">
+                        <a:latin typeface="Arial" charset="0"/>
+                        <a:ea typeface="Arial" charset="0"/>
+                        <a:cs typeface="Arial" charset="0"/>
+                      </a:endParaRPr>
+                    </a:p>
+                  </a:txBody>
+                  <a:tcPr marL="91440" marR="91440" marT="45720" marB="45720">
+                    <a:lnL w="6350" cap="flat" cmpd="sng" algn="ctr">
+                      <a:solidFill>
+                        <a:srgbClr val="CCCCCC"/>
+                      </a:solidFill>
+                      <a:prstDash val="solid"/>
+                      <a:round/>
+                      <a:headEnd type="none" w="med" len="med"/>
+                      <a:tailEnd type="none" w="med" len="med"/>
+                    </a:lnL>
+                    <a:lnR w="6350" cap="flat" cmpd="sng" algn="ctr">
+                      <a:solidFill>
+                        <a:srgbClr val="CCCCCC"/>
+                      </a:solidFill>
+                      <a:prstDash val="solid"/>
+                      <a:round/>
+                      <a:headEnd type="none" w="med" len="med"/>
+                      <a:tailEnd type="none" w="med" len="med"/>
+                    </a:lnR>
+                    <a:lnT w="6350" cap="flat" cmpd="sng" algn="ctr">
+                      <a:solidFill>
+                        <a:srgbClr val="CCCCCC"/>
+                      </a:solidFill>
+                      <a:prstDash val="solid"/>
+                      <a:round/>
+                      <a:headEnd type="none" w="med" len="med"/>
+                      <a:tailEnd type="none" w="med" len="med"/>
+                    </a:lnT>
+                    <a:lnB w="6350" cap="flat" cmpd="sng" algn="ctr">
+                      <a:solidFill>
+                        <a:srgbClr val="CCCCCC"/>
+                      </a:solidFill>
+                      <a:prstDash val="solid"/>
+                      <a:round/>
+                      <a:headEnd type="none" w="med" len="med"/>
+                      <a:tailEnd type="none" w="med" len="med"/>
+                    </a:lnB>
+                  </a:tcPr>
+                </a:tc>
+              </a:tr>
+              <a:tr h="0">
+                <a:tc>
+                  <a:txBody>
+                    <a:bodyPr/>
+                    <a:lstStyle/>
+                    <a:p>
+                      <a:pPr indent="0" marL="0">
+                        <a:buNone/>
+                      </a:pPr>
+                      <a:r>
+                        <a:rPr lang="en-US" sz="1200" dirty="0">
+                          <a:solidFill>
+                            <a:srgbClr val="000000"/>
+                          </a:solidFill>
+                          <a:latin typeface="Arial" pitchFamily="34" charset="0"/>
+                          <a:ea typeface="Arial" pitchFamily="34" charset="-122"/>
+                          <a:cs typeface="Arial" pitchFamily="34" charset="-120"/>
+                        </a:rPr>
+                        <a:t>Est. Domain Rating</a:t>
+                      </a:r>
+                      <a:endParaRPr lang="en-US" sz="1200" dirty="0">
+                        <a:latin typeface="Arial" charset="0"/>
+                        <a:ea typeface="Arial" charset="0"/>
+                        <a:cs typeface="Arial" charset="0"/>
+                      </a:endParaRPr>
+                    </a:p>
+                  </a:txBody>
+                  <a:tcPr marL="91440" marR="91440" marT="45720" marB="45720">
+                    <a:lnL w="6350" cap="flat" cmpd="sng" algn="ctr">
+                      <a:solidFill>
+                        <a:srgbClr val="CCCCCC"/>
+                      </a:solidFill>
+                      <a:prstDash val="solid"/>
+                      <a:round/>
+                      <a:headEnd type="none" w="med" len="med"/>
+                      <a:tailEnd type="none" w="med" len="med"/>
+                    </a:lnL>
+                    <a:lnR w="6350" cap="flat" cmpd="sng" algn="ctr">
+                      <a:solidFill>
+                        <a:srgbClr val="CCCCCC"/>
+                      </a:solidFill>
+                      <a:prstDash val="solid"/>
+                      <a:round/>
+                      <a:headEnd type="none" w="med" len="med"/>
+                      <a:tailEnd type="none" w="med" len="med"/>
+                    </a:lnR>
+                    <a:lnT w="6350" cap="flat" cmpd="sng" algn="ctr">
+                      <a:solidFill>
+                        <a:srgbClr val="CCCCCC"/>
+                      </a:solidFill>
+                      <a:prstDash val="solid"/>
+                      <a:round/>
+                      <a:headEnd type="none" w="med" len="med"/>
+                      <a:tailEnd type="none" w="med" len="med"/>
+                    </a:lnT>
+                    <a:lnB w="6350" cap="flat" cmpd="sng" algn="ctr">
+                      <a:solidFill>
+                        <a:srgbClr val="CCCCCC"/>
+                      </a:solidFill>
+                      <a:prstDash val="solid"/>
+                      <a:round/>
+                      <a:headEnd type="none" w="med" len="med"/>
+                      <a:tailEnd type="none" w="med" len="med"/>
+                    </a:lnB>
+                  </a:tcPr>
+                </a:tc>
+                <a:tc>
+                  <a:txBody>
+                    <a:bodyPr/>
+                    <a:lstStyle/>
+                    <a:p>
+                      <a:pPr indent="0" marL="0">
+                        <a:buNone/>
+                      </a:pPr>
+                      <a:r>
+                        <a:rPr lang="en-US" sz="1200" b="1" dirty="0">
+                          <a:solidFill>
+                            <a:srgbClr val="E74C3C"/>
+                          </a:solidFill>
+                          <a:latin typeface="Arial" pitchFamily="34" charset="0"/>
+                          <a:ea typeface="Arial" pitchFamily="34" charset="-122"/>
+                          <a:cs typeface="Arial" pitchFamily="34" charset="-120"/>
+                        </a:rPr>
+                        <a:t>20-30</a:t>
+                      </a:r>
+                      <a:endParaRPr lang="en-US" sz="1200" dirty="0">
+                        <a:latin typeface="Arial" charset="0"/>
+                        <a:ea typeface="Arial" charset="0"/>
+                        <a:cs typeface="Arial" charset="0"/>
+                      </a:endParaRPr>
+                    </a:p>
+                  </a:txBody>
+                  <a:tcPr marL="91440" marR="91440" marT="45720" marB="45720">
+                    <a:lnL w="6350" cap="flat" cmpd="sng" algn="ctr">
+                      <a:solidFill>
+                        <a:srgbClr val="CCCCCC"/>
+                      </a:solidFill>
+                      <a:prstDash val="solid"/>
+                      <a:round/>
+                      <a:headEnd type="none" w="med" len="med"/>
+                      <a:tailEnd type="none" w="med" len="med"/>
+                    </a:lnL>
+                    <a:lnR w="6350" cap="flat" cmpd="sng" algn="ctr">
+                      <a:solidFill>
+                        <a:srgbClr val="CCCCCC"/>
+                      </a:solidFill>
+                      <a:prstDash val="solid"/>
+                      <a:round/>
+                      <a:headEnd type="none" w="med" len="med"/>
+                      <a:tailEnd type="none" w="med" len="med"/>
+                    </a:lnR>
+                    <a:lnT w="6350" cap="flat" cmpd="sng" algn="ctr">
+                      <a:solidFill>
+                        <a:srgbClr val="CCCCCC"/>
+                      </a:solidFill>
+                      <a:prstDash val="solid"/>
+                      <a:round/>
+                      <a:headEnd type="none" w="med" len="med"/>
+                      <a:tailEnd type="none" w="med" len="med"/>
+                    </a:lnT>
+                    <a:lnB w="6350" cap="flat" cmpd="sng" algn="ctr">
+                      <a:solidFill>
+                        <a:srgbClr val="CCCCCC"/>
+                      </a:solidFill>
+                      <a:prstDash val="solid"/>
+                      <a:round/>
+                      <a:headEnd type="none" w="med" len="med"/>
+                      <a:tailEnd type="none" w="med" len="med"/>
+                    </a:lnB>
+                  </a:tcPr>
+                </a:tc>
+                <a:tc>
+                  <a:txBody>
+                    <a:bodyPr/>
+                    <a:lstStyle/>
+                    <a:p>
+                      <a:pPr indent="0" marL="0">
+                        <a:buNone/>
+                      </a:pPr>
+                      <a:r>
+                        <a:rPr lang="en-US" sz="1200" dirty="0">
+                          <a:solidFill>
+                            <a:srgbClr val="000000"/>
+                          </a:solidFill>
+                          <a:latin typeface="Arial" pitchFamily="34" charset="0"/>
+                          <a:ea typeface="Arial" pitchFamily="34" charset="-122"/>
+                          <a:cs typeface="Arial" pitchFamily="34" charset="-120"/>
+                        </a:rPr>
+                        <a:t>35-45</a:t>
+                      </a:r>
+                      <a:endParaRPr lang="en-US" sz="1200" dirty="0">
+                        <a:latin typeface="Arial" charset="0"/>
+                        <a:ea typeface="Arial" charset="0"/>
+                        <a:cs typeface="Arial" charset="0"/>
+                      </a:endParaRPr>
+                    </a:p>
+                  </a:txBody>
+                  <a:tcPr marL="91440" marR="91440" marT="45720" marB="45720">
+                    <a:lnL w="6350" cap="flat" cmpd="sng" algn="ctr">
+                      <a:solidFill>
+                        <a:srgbClr val="CCCCCC"/>
+                      </a:solidFill>
+                      <a:prstDash val="solid"/>
+                      <a:round/>
+                      <a:headEnd type="none" w="med" len="med"/>
+                      <a:tailEnd type="none" w="med" len="med"/>
+                    </a:lnL>
+                    <a:lnR w="6350" cap="flat" cmpd="sng" algn="ctr">
+                      <a:solidFill>
+                        <a:srgbClr val="CCCCCC"/>
+                      </a:solidFill>
+                      <a:prstDash val="solid"/>
+                      <a:round/>
+                      <a:headEnd type="none" w="med" len="med"/>
+                      <a:tailEnd type="none" w="med" len="med"/>
+                    </a:lnR>
+                    <a:lnT w="6350" cap="flat" cmpd="sng" algn="ctr">
+                      <a:solidFill>
+                        <a:srgbClr val="CCCCCC"/>
+                      </a:solidFill>
+                      <a:prstDash val="solid"/>
+                      <a:round/>
+                      <a:headEnd type="none" w="med" len="med"/>
+                      <a:tailEnd type="none" w="med" len="med"/>
+                    </a:lnT>
+                    <a:lnB w="6350" cap="flat" cmpd="sng" algn="ctr">
+                      <a:solidFill>
+                        <a:srgbClr val="CCCCCC"/>
+                      </a:solidFill>
+                      <a:prstDash val="solid"/>
+                      <a:round/>
+                      <a:headEnd type="none" w="med" len="med"/>
+                      <a:tailEnd type="none" w="med" len="med"/>
+                    </a:lnB>
+                  </a:tcPr>
+                </a:tc>
+                <a:tc>
+                  <a:txBody>
+                    <a:bodyPr/>
+                    <a:lstStyle/>
+                    <a:p>
+                      <a:pPr indent="0" marL="0">
+                        <a:buNone/>
+                      </a:pPr>
+                      <a:r>
+                        <a:rPr lang="en-US" sz="1200" dirty="0">
+                          <a:solidFill>
+                            <a:srgbClr val="000000"/>
+                          </a:solidFill>
+                          <a:latin typeface="Arial" pitchFamily="34" charset="0"/>
+                          <a:ea typeface="Arial" pitchFamily="34" charset="-122"/>
+                          <a:cs typeface="Arial" pitchFamily="34" charset="-120"/>
+                        </a:rPr>
+                        <a:t>30-40</a:t>
+                      </a:r>
+                      <a:endParaRPr lang="en-US" sz="1200" dirty="0">
+                        <a:latin typeface="Arial" charset="0"/>
+                        <a:ea typeface="Arial" charset="0"/>
+                        <a:cs typeface="Arial" charset="0"/>
+                      </a:endParaRPr>
+                    </a:p>
+                  </a:txBody>
+                  <a:tcPr marL="91440" marR="91440" marT="45720" marB="45720">
+                    <a:lnL w="6350" cap="flat" cmpd="sng" algn="ctr">
+                      <a:solidFill>
+                        <a:srgbClr val="CCCCCC"/>
+                      </a:solidFill>
+                      <a:prstDash val="solid"/>
+                      <a:round/>
+                      <a:headEnd type="none" w="med" len="med"/>
+                      <a:tailEnd type="none" w="med" len="med"/>
+                    </a:lnL>
+                    <a:lnR w="6350" cap="flat" cmpd="sng" algn="ctr">
+                      <a:solidFill>
+                        <a:srgbClr val="CCCCCC"/>
+                      </a:solidFill>
+                      <a:prstDash val="solid"/>
+                      <a:round/>
+                      <a:headEnd type="none" w="med" len="med"/>
+                      <a:tailEnd type="none" w="med" len="med"/>
+                    </a:lnR>
+                    <a:lnT w="6350" cap="flat" cmpd="sng" algn="ctr">
+                      <a:solidFill>
+                        <a:srgbClr val="CCCCCC"/>
+                      </a:solidFill>
+                      <a:prstDash val="solid"/>
+                      <a:round/>
+                      <a:headEnd type="none" w="med" len="med"/>
+                      <a:tailEnd type="none" w="med" len="med"/>
+                    </a:lnT>
+                    <a:lnB w="6350" cap="flat" cmpd="sng" algn="ctr">
+                      <a:solidFill>
+                        <a:srgbClr val="CCCCCC"/>
+                      </a:solidFill>
+                      <a:prstDash val="solid"/>
+                      <a:round/>
+                      <a:headEnd type="none" w="med" len="med"/>
+                      <a:tailEnd type="none" w="med" len="med"/>
+                    </a:lnB>
+                  </a:tcPr>
+                </a:tc>
+                <a:tc>
+                  <a:txBody>
+                    <a:bodyPr/>
+                    <a:lstStyle/>
+                    <a:p>
+                      <a:pPr indent="0" marL="0">
+                        <a:buNone/>
+                      </a:pPr>
+                      <a:r>
+                        <a:rPr lang="en-US" sz="1200" dirty="0">
+                          <a:solidFill>
+                            <a:srgbClr val="E74C3C"/>
+                          </a:solidFill>
+                          <a:latin typeface="Arial" pitchFamily="34" charset="0"/>
+                          <a:ea typeface="Arial" pitchFamily="34" charset="-122"/>
+                          <a:cs typeface="Arial" pitchFamily="34" charset="-120"/>
+                        </a:rPr>
+                        <a:t>Below top competitors</a:t>
                       </a:r>
                       <a:endParaRPr lang="en-US" sz="1200" dirty="0">
                         <a:latin typeface="Arial" charset="0"/>
@@ -17066,7 +19328,7 @@
                 <a:ea typeface="Arial" pitchFamily="34" charset="-122"/>
                 <a:cs typeface="Arial" pitchFamily="34" charset="-120"/>
               </a:rPr>
-              <a:t>Content Depth</a:t>
+              <a:t>Review-Driven SEO (Avalon Group)</a:t>
             </a:r>
             <a:endParaRPr lang="en-US" sz="1400" dirty="0"/>
           </a:p>
@@ -17105,7 +19367,7 @@
                 <a:ea typeface="Arial" pitchFamily="34" charset="-122"/>
                 <a:cs typeface="Arial" pitchFamily="34" charset="-120"/>
               </a:rPr>
-              <a:t>Top competitor has 300+ pages at 3,500-4,500 words each with dedicated sub-pages</a:t>
+              <a:t>'300+ 5-star reviews' embedded in meta descriptions, homepage hero, and every key page. Drives click-through rates and builds instant trust. Multi-layered lead capture with market report lead magnets, SMS opt-in, downloadable guides, and OAuth signup</a:t>
             </a:r>
             <a:endParaRPr lang="en-US" sz="1100" dirty="0"/>
           </a:p>
@@ -17144,7 +19406,7 @@
                 <a:ea typeface="Arial" pitchFamily="34" charset="-122"/>
                 <a:cs typeface="Arial" pitchFamily="34" charset="-120"/>
               </a:rPr>
-              <a:t>Market Reports</a:t>
+              <a:t>Schema Markup Sophistication (Eagan Luxury)</a:t>
             </a:r>
             <a:endParaRPr lang="en-US" sz="1400" dirty="0"/>
           </a:p>
@@ -17183,7 +19445,7 @@
                 <a:ea typeface="Arial" pitchFamily="34" charset="-122"/>
                 <a:cs typeface="Arial" pitchFamily="34" charset="-120"/>
               </a:rPr>
-              <a:t>Competitor publishes monthly reports with pricing data, inventory, and year-over-year trends</a:t>
+              <a:t>Implements AggregateRating (5.0 stars, 85 reviews), AggregateOffer (150 listings, $800K-$12M), Service definitions, BreadcrumbList, and CollectionPage schemas. Enables star ratings and price ranges in search results</a:t>
             </a:r>
             <a:endParaRPr lang="en-US" sz="1100" dirty="0"/>
           </a:p>
@@ -17222,7 +19484,7 @@
                 <a:ea typeface="Arial" pitchFamily="34" charset="-122"/>
                 <a:cs typeface="Arial" pitchFamily="34" charset="-120"/>
               </a:rPr>
-              <a:t>Blog Volume</a:t>
+              <a:t>Community Magazine Model (Eagan Luxury)</a:t>
             </a:r>
             <a:endParaRPr lang="en-US" sz="1400" dirty="0"/>
           </a:p>
@@ -17261,7 +19523,7 @@
                 <a:ea typeface="Arial" pitchFamily="34" charset="-122"/>
                 <a:cs typeface="Arial" pitchFamily="34" charset="-120"/>
               </a:rPr>
-              <a:t>Competitors have 33-207 blog posts vs. client's 5</a:t>
+              <a:t>Each of 30 communities has restaurant guides and lifestyle magazine subpages — 60+ additional content pages targeting '[Neighborhood] restaurants' and '[Neighborhood] lifestyle' keywords. Unique in the market</a:t>
             </a:r>
             <a:endParaRPr lang="en-US" sz="1100" dirty="0"/>
           </a:p>
@@ -17300,7 +19562,7 @@
                 <a:ea typeface="Arial" pitchFamily="34" charset="-122"/>
                 <a:cs typeface="Arial" pitchFamily="34" charset="-120"/>
               </a:rPr>
-              <a:t>FAQ Sections</a:t>
+              <a:t>Institutional Authority (Smith &amp; Associates)</a:t>
             </a:r>
             <a:endParaRPr lang="en-US" sz="1400" dirty="0"/>
           </a:p>
@@ -17339,7 +19601,7 @@
                 <a:ea typeface="Arial" pitchFamily="34" charset="-122"/>
                 <a:cs typeface="Arial" pitchFamily="34" charset="-120"/>
               </a:rPr>
-              <a:t>Competitor uses FAQ schema targeting 'People Also Ask' and AI Overview citations</a:t>
+              <a:t>55+ years in business, 100+ agents each with personalized subdomains, 50+ community pages spanning all of Tampa Bay. Agent subdomain strategy massively expands SEO footprint</a:t>
             </a:r>
             <a:endParaRPr lang="en-US" sz="1100" dirty="0"/>
           </a:p>
@@ -17378,7 +19640,7 @@
                 <a:ea typeface="Arial" pitchFamily="34" charset="-122"/>
                 <a:cs typeface="Arial" pitchFamily="34" charset="-120"/>
               </a:rPr>
-              <a:t>Local Resources</a:t>
+              <a:t>Lifestyle Content Integration (Salamone Group)</a:t>
             </a:r>
             <a:endParaRPr lang="en-US" sz="1400" dirty="0"/>
           </a:p>
@@ -17417,7 +19679,7 @@
                 <a:ea typeface="Arial" pitchFamily="34" charset="-122"/>
                 <a:cs typeface="Arial" pitchFamily="34" charset="-120"/>
               </a:rPr>
-              <a:t>Competitor has 14+ local resource pages building topical authority</a:t>
+              <a:t>Art, Food, Events sections create a lifestyle destination. Compass Concierge program (fronting seller prep costs) is a genuine competitive advantage. Premium domain stpete.pro is short and keyword-rich</a:t>
             </a:r>
             <a:endParaRPr lang="en-US" sz="1100" dirty="0"/>
           </a:p>
@@ -17456,7 +19718,7 @@
                 <a:ea typeface="Arial" pitchFamily="34" charset="-122"/>
                 <a:cs typeface="Arial" pitchFamily="34" charset="-120"/>
               </a:rPr>
-              <a:t>Schema Markup</a:t>
+              <a:t>Notable Transactions Showcase (Dynasty Group)</a:t>
             </a:r>
             <a:endParaRPr lang="en-US" sz="1400" dirty="0"/>
           </a:p>
@@ -17495,7 +19757,7 @@
                 <a:ea typeface="Arial" pitchFamily="34" charset="-122"/>
                 <a:cs typeface="Arial" pitchFamily="34" charset="-120"/>
               </a:rPr>
-              <a:t>Top competitors have structured data on every page enabling rich search results</a:t>
+              <a:t>Homepage displays 30+ past sales with exact prices ($14M, $13M, $9.6M). Far more compelling social proof than generic 'Top 1%' claims. Modern Luxury Presence platform with video backgrounds</a:t>
             </a:r>
             <a:endParaRPr lang="en-US" sz="1100" dirty="0"/>
           </a:p>
@@ -17716,7 +19978,7 @@
                 <a:ea typeface="Arial" pitchFamily="34" charset="-122"/>
                 <a:cs typeface="Arial" pitchFamily="34" charset="-120"/>
               </a:rPr>
-              <a:t>Fix H1 tags, meta descriptions,</a:t>
+              <a:t>Fix broken forms, meta descriptions,</a:t>
             </a:r>
             <a:endParaRPr lang="en-US" sz="1200" dirty="0"/>
           </a:p>
@@ -17733,7 +19995,7 @@
                 <a:ea typeface="Arial" pitchFamily="34" charset="-122"/>
                 <a:cs typeface="Arial" pitchFamily="34" charset="-120"/>
               </a:rPr>
-              <a:t>schema markup, errors,</a:t>
+              <a:t>title tags, H1 tags, schema types,</a:t>
             </a:r>
             <a:endParaRPr lang="en-US" sz="1200" dirty="0"/>
           </a:p>
@@ -17750,7 +20012,7 @@
                 <a:ea typeface="Arial" pitchFamily="34" charset="-122"/>
                 <a:cs typeface="Arial" pitchFamily="34" charset="-120"/>
               </a:rPr>
-              <a:t>OG tags</a:t>
+              <a:t>sitemap cleanup, attachment noindex</a:t>
             </a:r>
             <a:endParaRPr lang="en-US" sz="1200" dirty="0"/>
           </a:p>
@@ -17930,7 +20192,7 @@
                 <a:ea typeface="Arial" pitchFamily="34" charset="-122"/>
                 <a:cs typeface="Arial" pitchFamily="34" charset="-120"/>
               </a:rPr>
-              <a:t>Expand key pages,</a:t>
+              <a:t>Deploy blog posts, expand neighborhood</a:t>
             </a:r>
             <a:endParaRPr lang="en-US" sz="1200" dirty="0"/>
           </a:p>
@@ -17947,7 +20209,7 @@
                 <a:ea typeface="Arial" pitchFamily="34" charset="-122"/>
                 <a:cs typeface="Arial" pitchFamily="34" charset="-120"/>
               </a:rPr>
-              <a:t>launch reports,</a:t>
+              <a:t>pages to 2,000+ words, create</a:t>
             </a:r>
             <a:endParaRPr lang="en-US" sz="1200" dirty="0"/>
           </a:p>
@@ -17964,7 +20226,7 @@
                 <a:ea typeface="Arial" pitchFamily="34" charset="-122"/>
                 <a:cs typeface="Arial" pitchFamily="34" charset="-120"/>
               </a:rPr>
-              <a:t>revive the blog</a:t>
+              <a:t>property-type landing pages</a:t>
             </a:r>
             <a:endParaRPr lang="en-US" sz="1200" dirty="0"/>
           </a:p>
@@ -18144,7 +20406,7 @@
                 <a:ea typeface="Arial" pitchFamily="34" charset="-122"/>
                 <a:cs typeface="Arial" pitchFamily="34" charset="-120"/>
               </a:rPr>
-              <a:t>Build topic sections,</a:t>
+              <a:t>Build 10+ new neighborhood pages,</a:t>
             </a:r>
             <a:endParaRPr lang="en-US" sz="1200" dirty="0"/>
           </a:p>
@@ -18161,7 +20423,7 @@
                 <a:ea typeface="Arial" pitchFamily="34" charset="-122"/>
                 <a:cs typeface="Arial" pitchFamily="34" charset="-120"/>
               </a:rPr>
-              <a:t>sub-pages,</a:t>
+              <a:t>condo building pages, relocation guide,</a:t>
             </a:r>
             <a:endParaRPr lang="en-US" sz="1200" dirty="0"/>
           </a:p>
@@ -18178,7 +20440,7 @@
                 <a:ea typeface="Arial" pitchFamily="34" charset="-122"/>
                 <a:cs typeface="Arial" pitchFamily="34" charset="-120"/>
               </a:rPr>
-              <a:t>lifestyle guides</a:t>
+              <a:t>lifestyle content hub</a:t>
             </a:r>
             <a:endParaRPr lang="en-US" sz="1200" dirty="0"/>
           </a:p>
@@ -18358,7 +20620,7 @@
                 <a:ea typeface="Arial" pitchFamily="34" charset="-122"/>
                 <a:cs typeface="Arial" pitchFamily="34" charset="-120"/>
               </a:rPr>
-              <a:t>Video content, press mentions,</a:t>
+              <a:t>Claim DA 90+ directory profiles,</a:t>
             </a:r>
             <a:endParaRPr lang="en-US" sz="1200" dirty="0"/>
           </a:p>
@@ -18375,7 +20637,7 @@
                 <a:ea typeface="Arial" pitchFamily="34" charset="-122"/>
                 <a:cs typeface="Arial" pitchFamily="34" charset="-120"/>
               </a:rPr>
-              <a:t>email newsletter, local citations,</a:t>
+              <a:t>join Chamber, email newsletter,</a:t>
             </a:r>
             <a:endParaRPr lang="en-US" sz="1200" dirty="0"/>
           </a:p>
@@ -18392,7 +20654,24 @@
                 <a:ea typeface="Arial" pitchFamily="34" charset="-122"/>
                 <a:cs typeface="Arial" pitchFamily="34" charset="-120"/>
               </a:rPr>
-              <a:t>conversion optimization</a:t>
+              <a:t>lead magnets, press re-engagement,</a:t>
+            </a:r>
+            <a:endParaRPr lang="en-US" sz="1200" dirty="0"/>
+          </a:p>
+          <a:p>
+            <a:pPr algn="ctr" indent="0" marL="0">
+              <a:buNone/>
+            </a:pPr>
+            <a:r>
+              <a:rPr lang="en-US" sz="1200" dirty="0">
+                <a:solidFill>
+                  <a:srgbClr val="FFFFFF"/>
+                </a:solidFill>
+                <a:latin typeface="Arial" pitchFamily="34" charset="0"/>
+                <a:ea typeface="Arial" pitchFamily="34" charset="-122"/>
+                <a:cs typeface="Arial" pitchFamily="34" charset="-120"/>
+              </a:rPr>
+              <a:t>local event sponsorships</a:t>
             </a:r>
             <a:endParaRPr lang="en-US" sz="1200" dirty="0"/>
           </a:p>
@@ -18910,7 +21189,7 @@
                           <a:ea typeface="Arial" pitchFamily="34" charset="-122"/>
                           <a:cs typeface="Arial" pitchFamily="34" charset="-120"/>
                         </a:rPr>
-                        <a:t>Fix broken/error pages — remove from sitemap</a:t>
+                        <a:t>Fix Market Analysis page form — primary seller lead capture is broken</a:t>
                       </a:r>
                       <a:endParaRPr lang="en-US" sz="1200" dirty="0">
                         <a:latin typeface="Arial" charset="0"/>
@@ -18969,13 +21248,13 @@
                       <a:r>
                         <a:rPr lang="en-US" sz="1200" b="1" dirty="0">
                           <a:solidFill>
-                            <a:srgbClr val="27AE60"/>
+                            <a:srgbClr val="F39C12"/>
                           </a:solidFill>
                           <a:latin typeface="Arial" pitchFamily="34" charset="0"/>
                           <a:ea typeface="Arial" pitchFamily="34" charset="-122"/>
                           <a:cs typeface="Arial" pitchFamily="34" charset="-120"/>
                         </a:rPr>
-                        <a:t>High</a:t>
+                        <a:t>Critical</a:t>
                       </a:r>
                       <a:endParaRPr lang="en-US" sz="1200" dirty="0">
                         <a:latin typeface="Arial" charset="0"/>
@@ -19172,7 +21451,7 @@
                           <a:ea typeface="Arial" pitchFamily="34" charset="-122"/>
                           <a:cs typeface="Arial" pitchFamily="34" charset="-120"/>
                         </a:rPr>
-                        <a:t>Fix corrupted or duplicate meta tags</a:t>
+                        <a:t>Write meta descriptions for Homepage, Blog, Reviews, Contact, Search, Active/Sold Listings</a:t>
                       </a:r>
                       <a:endParaRPr lang="en-US" sz="1200" dirty="0">
                         <a:latin typeface="Arial" charset="0"/>
@@ -19434,7 +21713,7 @@
                           <a:ea typeface="Arial" pitchFamily="34" charset="-122"/>
                           <a:cs typeface="Arial" pitchFamily="34" charset="-120"/>
                         </a:rPr>
-                        <a:t>Consolidate to single H1 per page</a:t>
+                        <a:t>Rewrite homepage title tag: 'St. Petersburg Luxury &amp; Waterfront Real Estate | Liane Jamason'</a:t>
                       </a:r>
                       <a:endParaRPr lang="en-US" sz="1200" dirty="0">
                         <a:latin typeface="Arial" charset="0"/>
@@ -19696,7 +21975,7 @@
                           <a:ea typeface="Arial" pitchFamily="34" charset="-122"/>
                           <a:cs typeface="Arial" pitchFamily="34" charset="-120"/>
                         </a:rPr>
-                        <a:t>Add H1 tags to pages missing them</a:t>
+                        <a:t>Fix Active Listings meta description (currently says 'View My Sold Listings')</a:t>
                       </a:r>
                       <a:endParaRPr lang="en-US" sz="1200" dirty="0">
                         <a:latin typeface="Arial" charset="0"/>
@@ -19958,7 +22237,7 @@
                           <a:ea typeface="Arial" pitchFamily="34" charset="-122"/>
                           <a:cs typeface="Arial" pitchFamily="34" charset="-120"/>
                         </a:rPr>
-                        <a:t>Rewrite meta descriptions with location keywords</a:t>
+                        <a:t>Fix Market Analysis meta description typo ('you home' → 'your home')</a:t>
                       </a:r>
                       <a:endParaRPr lang="en-US" sz="1200" dirty="0">
                         <a:latin typeface="Arial" charset="0"/>
@@ -20017,13 +22296,13 @@
                       <a:r>
                         <a:rPr lang="en-US" sz="1200" b="1" dirty="0">
                           <a:solidFill>
-                            <a:srgbClr val="27AE60"/>
+                            <a:srgbClr val="F39C12"/>
                           </a:solidFill>
                           <a:latin typeface="Arial" pitchFamily="34" charset="0"/>
                           <a:ea typeface="Arial" pitchFamily="34" charset="-122"/>
                           <a:cs typeface="Arial" pitchFamily="34" charset="-120"/>
                         </a:rPr>
-                        <a:t>High</a:t>
+                        <a:t>Low</a:t>
                       </a:r>
                       <a:endParaRPr lang="en-US" sz="1200" dirty="0">
                         <a:latin typeface="Arial" charset="0"/>
@@ -20220,7 +22499,7 @@
                           <a:ea typeface="Arial" pitchFamily="34" charset="-122"/>
                           <a:cs typeface="Arial" pitchFamily="34" charset="-120"/>
                         </a:rPr>
-                        <a:t>Add Open Graph tags to homepage</a:t>
+                        <a:t>Noindex off-topic pages (travel hacking, credit card points)</a:t>
                       </a:r>
                       <a:endParaRPr lang="en-US" sz="1200" dirty="0">
                         <a:latin typeface="Arial" charset="0"/>
@@ -20482,7 +22761,7 @@
                           <a:ea typeface="Arial" pitchFamily="34" charset="-122"/>
                           <a:cs typeface="Arial" pitchFamily="34" charset="-120"/>
                         </a:rPr>
-                        <a:t>Remove keyword stuffing from any pages</a:t>
+                        <a:t>Disable attachment page indexing in Rank Math (7 sitemaps feeding thin pages)</a:t>
                       </a:r>
                       <a:endParaRPr lang="en-US" sz="1200" dirty="0">
                         <a:latin typeface="Arial" charset="0"/>
@@ -20541,13 +22820,13 @@
                       <a:r>
                         <a:rPr lang="en-US" sz="1200" b="1" dirty="0">
                           <a:solidFill>
-                            <a:srgbClr val="F39C12"/>
+                            <a:srgbClr val="27AE60"/>
                           </a:solidFill>
                           <a:latin typeface="Arial" pitchFamily="34" charset="0"/>
                           <a:ea typeface="Arial" pitchFamily="34" charset="-122"/>
                           <a:cs typeface="Arial" pitchFamily="34" charset="-120"/>
                         </a:rPr>
-                        <a:t>Medium</a:t>
+                        <a:t>High</a:t>
                       </a:r>
                       <a:endParaRPr lang="en-US" sz="1200" dirty="0">
                         <a:latin typeface="Arial" charset="0"/>
@@ -20744,7 +23023,7 @@
                           <a:ea typeface="Arial" pitchFamily="34" charset="-122"/>
                           <a:cs typeface="Arial" pitchFamily="34" charset="-120"/>
                         </a:rPr>
-                        <a:t>Add canonical tags to dynamic/search pages</a:t>
+                        <a:t>Fix or remove broken idx_page-sitemap.xml (returns 404)</a:t>
                       </a:r>
                       <a:endParaRPr lang="en-US" sz="1200" dirty="0">
                         <a:latin typeface="Arial" charset="0"/>
@@ -21006,7 +23285,7 @@
                           <a:ea typeface="Arial" pitchFamily="34" charset="-122"/>
                           <a:cs typeface="Arial" pitchFamily="34" charset="-120"/>
                         </a:rPr>
-                        <a:t>Fix any unprofessional contact info</a:t>
+                        <a:t>Update StPetersburg.com listing from 'Smith &amp; Associates' to Corcoran Dwellings</a:t>
                       </a:r>
                       <a:endParaRPr lang="en-US" sz="1200" dirty="0">
                         <a:latin typeface="Arial" charset="0"/>
@@ -21268,7 +23547,7 @@
                           <a:ea typeface="Arial" pitchFamily="34" charset="-122"/>
                           <a:cs typeface="Arial" pitchFamily="34" charset="-120"/>
                         </a:rPr>
-                        <a:t>Add LocalBusiness + industry schema markup</a:t>
+                        <a:t>Claim Yelp, Realtor.com, Redfin, BBB profiles (DA 90+ directories)</a:t>
                       </a:r>
                       <a:endParaRPr lang="en-US" sz="1200" dirty="0">
                         <a:latin typeface="Arial" charset="0"/>
@@ -21668,7 +23947,7 @@
                 <a:ea typeface="Arial" pitchFamily="34" charset="-122"/>
                 <a:cs typeface="Arial" pitchFamily="34" charset="-120"/>
               </a:rPr>
-              <a:t>Write and publish market/industry report with current data</a:t>
+              <a:t>Fix all H1 tag issues (duplicates on 8+ pages, missing on blog index, generic on 5+ pages)</a:t>
             </a:r>
             <a:endParaRPr lang="en-US" sz="1300" dirty="0"/>
           </a:p>
@@ -21729,7 +24008,7 @@
                 <a:ea typeface="Arial" pitchFamily="34" charset="-122"/>
                 <a:cs typeface="Arial" pitchFamily="34" charset="-120"/>
               </a:rPr>
-              <a:t>Expand top 10 key pages from thin to 1,000-1,500 words</a:t>
+              <a:t>Rewrite all core page title tags (About, Sell, Buy, Contact, Blog)</a:t>
             </a:r>
             <a:endParaRPr lang="en-US" sz="1300" dirty="0"/>
           </a:p>
@@ -21790,7 +24069,7 @@
                 <a:ea typeface="Arial" pitchFamily="34" charset="-122"/>
                 <a:cs typeface="Arial" pitchFamily="34" charset="-120"/>
               </a:rPr>
-              <a:t>Write 4-6 new locally-focused blog posts</a:t>
+              <a:t>Update Buy page to remove 'Jamason Group' branding</a:t>
             </a:r>
             <a:endParaRPr lang="en-US" sz="1300" dirty="0"/>
           </a:p>
@@ -21851,7 +24130,7 @@
                 <a:ea typeface="Arial" pitchFamily="34" charset="-122"/>
                 <a:cs typeface="Arial" pitchFamily="34" charset="-120"/>
               </a:rPr>
-              <a:t>Add contact forms + CTAs to every key page</a:t>
+              <a:t>Add email newsletter signup to blog sidebar and post footers</a:t>
             </a:r>
             <a:endParaRPr lang="en-US" sz="1300" dirty="0"/>
           </a:p>
@@ -21912,7 +24191,7 @@
                 <a:ea typeface="Arial" pitchFamily="34" charset="-122"/>
                 <a:cs typeface="Arial" pitchFamily="34" charset="-120"/>
               </a:rPr>
-              <a:t>Create testimonials/reviews page</a:t>
+              <a:t>Add end-of-post CTAs to all blog articles</a:t>
             </a:r>
             <a:endParaRPr lang="en-US" sz="1300" dirty="0"/>
           </a:p>
@@ -21973,7 +24252,251 @@
                 <a:ea typeface="Arial" pitchFamily="34" charset="-122"/>
                 <a:cs typeface="Arial" pitchFamily="34" charset="-120"/>
               </a:rPr>
-              <a:t>Rewrite About page with credentials and video</a:t>
+              <a:t>Rewrite Sell page with real seller content, process, and CTAs</a:t>
+            </a:r>
+            <a:endParaRPr lang="en-US" sz="1300" dirty="0"/>
+          </a:p>
+        </p:txBody>
+      </p:sp>
+      <p:sp>
+        <p:nvSpPr>
+          <p:cNvPr id="17" name="Shape 15"/>
+          <p:cNvSpPr/>
+          <p:nvPr/>
+        </p:nvSpPr>
+        <p:spPr>
+          <a:xfrm>
+            <a:off x="457200" y="4965192"/>
+            <a:ext cx="228600" cy="228600"/>
+          </a:xfrm>
+          <a:prstGeom prst="rect">
+            <a:avLst>
+              <a:gd name="adj" fmla="val 8000"/>
+            </a:avLst>
+          </a:prstGeom>
+          <a:solidFill>
+            <a:srgbClr val="E94560"/>
+          </a:solidFill>
+          <a:ln/>
+        </p:spPr>
+      </p:sp>
+      <p:sp>
+        <p:nvSpPr>
+          <p:cNvPr id="18" name="Text 16"/>
+          <p:cNvSpPr/>
+          <p:nvPr/>
+        </p:nvSpPr>
+        <p:spPr>
+          <a:xfrm>
+            <a:off x="914400" y="4919472"/>
+            <a:ext cx="10515600" cy="411480"/>
+          </a:xfrm>
+          <a:prstGeom prst="rect">
+            <a:avLst/>
+          </a:prstGeom>
+          <a:noFill/>
+          <a:ln/>
+        </p:spPr>
+        <p:txBody>
+          <a:bodyPr wrap="square" rtlCol="0" anchor="ctr"/>
+          <a:lstStyle/>
+          <a:p>
+            <a:pPr indent="0" marL="0">
+              <a:buNone/>
+            </a:pPr>
+            <a:r>
+              <a:rPr lang="en-US" sz="1300" dirty="0">
+                <a:solidFill>
+                  <a:srgbClr val="1A1A2E"/>
+                </a:solidFill>
+                <a:latin typeface="Arial" pitchFamily="34" charset="0"/>
+                <a:ea typeface="Arial" pitchFamily="34" charset="-122"/>
+                <a:cs typeface="Arial" pitchFamily="34" charset="-120"/>
+              </a:rPr>
+              <a:t>Add alt text to all content images (hero, headshot, press logos, property photos)</a:t>
+            </a:r>
+            <a:endParaRPr lang="en-US" sz="1300" dirty="0"/>
+          </a:p>
+        </p:txBody>
+      </p:sp>
+      <p:sp>
+        <p:nvSpPr>
+          <p:cNvPr id="19" name="Shape 17"/>
+          <p:cNvSpPr/>
+          <p:nvPr/>
+        </p:nvSpPr>
+        <p:spPr>
+          <a:xfrm>
+            <a:off x="457200" y="5495544"/>
+            <a:ext cx="228600" cy="228600"/>
+          </a:xfrm>
+          <a:prstGeom prst="rect">
+            <a:avLst>
+              <a:gd name="adj" fmla="val 8000"/>
+            </a:avLst>
+          </a:prstGeom>
+          <a:solidFill>
+            <a:srgbClr val="E94560"/>
+          </a:solidFill>
+          <a:ln/>
+        </p:spPr>
+      </p:sp>
+      <p:sp>
+        <p:nvSpPr>
+          <p:cNvPr id="20" name="Text 18"/>
+          <p:cNvSpPr/>
+          <p:nvPr/>
+        </p:nvSpPr>
+        <p:spPr>
+          <a:xfrm>
+            <a:off x="914400" y="5449824"/>
+            <a:ext cx="10515600" cy="411480"/>
+          </a:xfrm>
+          <a:prstGeom prst="rect">
+            <a:avLst/>
+          </a:prstGeom>
+          <a:noFill/>
+          <a:ln/>
+        </p:spPr>
+        <p:txBody>
+          <a:bodyPr wrap="square" rtlCol="0" anchor="ctr"/>
+          <a:lstStyle/>
+          <a:p>
+            <a:pPr indent="0" marL="0">
+              <a:buNone/>
+            </a:pPr>
+            <a:r>
+              <a:rPr lang="en-US" sz="1300" dirty="0">
+                <a:solidFill>
+                  <a:srgbClr val="1A1A2E"/>
+                </a:solidFill>
+                <a:latin typeface="Arial" pitchFamily="34" charset="0"/>
+                <a:ea typeface="Arial" pitchFamily="34" charset="-122"/>
+                <a:cs typeface="Arial" pitchFamily="34" charset="-120"/>
+              </a:rPr>
+              <a:t>Fix broken pages (In the Press, Short Sales, Clearwater)</a:t>
+            </a:r>
+            <a:endParaRPr lang="en-US" sz="1300" dirty="0"/>
+          </a:p>
+        </p:txBody>
+      </p:sp>
+      <p:sp>
+        <p:nvSpPr>
+          <p:cNvPr id="21" name="Shape 19"/>
+          <p:cNvSpPr/>
+          <p:nvPr/>
+        </p:nvSpPr>
+        <p:spPr>
+          <a:xfrm>
+            <a:off x="457200" y="6025896"/>
+            <a:ext cx="228600" cy="228600"/>
+          </a:xfrm>
+          <a:prstGeom prst="rect">
+            <a:avLst>
+              <a:gd name="adj" fmla="val 8000"/>
+            </a:avLst>
+          </a:prstGeom>
+          <a:solidFill>
+            <a:srgbClr val="E94560"/>
+          </a:solidFill>
+          <a:ln/>
+        </p:spPr>
+      </p:sp>
+      <p:sp>
+        <p:nvSpPr>
+          <p:cNvPr id="22" name="Text 20"/>
+          <p:cNvSpPr/>
+          <p:nvPr/>
+        </p:nvSpPr>
+        <p:spPr>
+          <a:xfrm>
+            <a:off x="914400" y="5980176"/>
+            <a:ext cx="10515600" cy="411480"/>
+          </a:xfrm>
+          <a:prstGeom prst="rect">
+            <a:avLst/>
+          </a:prstGeom>
+          <a:noFill/>
+          <a:ln/>
+        </p:spPr>
+        <p:txBody>
+          <a:bodyPr wrap="square" rtlCol="0" anchor="ctr"/>
+          <a:lstStyle/>
+          <a:p>
+            <a:pPr indent="0" marL="0">
+              <a:buNone/>
+            </a:pPr>
+            <a:r>
+              <a:rPr lang="en-US" sz="1300" dirty="0">
+                <a:solidFill>
+                  <a:srgbClr val="1A1A2E"/>
+                </a:solidFill>
+                <a:latin typeface="Arial" pitchFamily="34" charset="0"/>
+                <a:ea typeface="Arial" pitchFamily="34" charset="-122"/>
+                <a:cs typeface="Arial" pitchFamily="34" charset="-120"/>
+              </a:rPr>
+              <a:t>Add AggregateRating/Review schema to Reviews page</a:t>
+            </a:r>
+            <a:endParaRPr lang="en-US" sz="1300" dirty="0"/>
+          </a:p>
+        </p:txBody>
+      </p:sp>
+      <p:sp>
+        <p:nvSpPr>
+          <p:cNvPr id="23" name="Shape 21"/>
+          <p:cNvSpPr/>
+          <p:nvPr/>
+        </p:nvSpPr>
+        <p:spPr>
+          <a:xfrm>
+            <a:off x="457200" y="6556248"/>
+            <a:ext cx="228600" cy="228600"/>
+          </a:xfrm>
+          <a:prstGeom prst="rect">
+            <a:avLst>
+              <a:gd name="adj" fmla="val 8000"/>
+            </a:avLst>
+          </a:prstGeom>
+          <a:solidFill>
+            <a:srgbClr val="E94560"/>
+          </a:solidFill>
+          <a:ln/>
+        </p:spPr>
+      </p:sp>
+      <p:sp>
+        <p:nvSpPr>
+          <p:cNvPr id="24" name="Text 22"/>
+          <p:cNvSpPr/>
+          <p:nvPr/>
+        </p:nvSpPr>
+        <p:spPr>
+          <a:xfrm>
+            <a:off x="914400" y="6510528"/>
+            <a:ext cx="10515600" cy="411480"/>
+          </a:xfrm>
+          <a:prstGeom prst="rect">
+            <a:avLst/>
+          </a:prstGeom>
+          <a:noFill/>
+          <a:ln/>
+        </p:spPr>
+        <p:txBody>
+          <a:bodyPr wrap="square" rtlCol="0" anchor="ctr"/>
+          <a:lstStyle/>
+          <a:p>
+            <a:pPr indent="0" marL="0">
+              <a:buNone/>
+            </a:pPr>
+            <a:r>
+              <a:rPr lang="en-US" sz="1300" dirty="0">
+                <a:solidFill>
+                  <a:srgbClr val="1A1A2E"/>
+                </a:solidFill>
+                <a:latin typeface="Arial" pitchFamily="34" charset="0"/>
+                <a:ea typeface="Arial" pitchFamily="34" charset="-122"/>
+                <a:cs typeface="Arial" pitchFamily="34" charset="-120"/>
+              </a:rPr>
+              <a:t>Verify/optimize Google Business Profile; begin weekly posting</a:t>
             </a:r>
             <a:endParaRPr lang="en-US" sz="1300" dirty="0"/>
           </a:p>
